--- a/tak-evac/outputs/TAKイーヴァック様_初回お打ち合わせ資料.pptx
+++ b/tak-evac/outputs/TAKイーヴァック様_初回お打ち合わせ資料.pptx
@@ -13,9 +13,12 @@
     <p:sldId id="261" r:id="rId7"/>
     <p:sldId id="262" r:id="rId8"/>
     <p:sldId id="263" r:id="rId9"/>
+    <p:sldId id="264" r:id="rId10"/>
+    <p:sldId id="265" r:id="rId11"/>
+    <p:sldId id="266" r:id="rId12"/>
   </p:sldIdLst>
   <p:notesMasterIdLst>
-    <p:notesMasterId r:id="rId10"/>
+    <p:notesMasterId r:id="rId13"/>
   </p:notesMasterIdLst>
   <p:sldSz cx="12192000" cy="6858000"/>
   <p:notesSz cx="6858000" cy="12192000"/>
@@ -551,6 +554,182 @@
 </p:notes>
 </file>
 
+<file path=ppt/notesSlides/notesSlide10.xml><?xml version="1.0" encoding="utf-8"?>
+<p:notes xmlns:a="http://schemas.openxmlformats.org/drawingml/2006/main" xmlns:r="http://schemas.openxmlformats.org/officeDocument/2006/relationships" xmlns:p="http://schemas.openxmlformats.org/presentationml/2006/main">
+  <p:cSld>
+    <p:spTree>
+      <p:nvGrpSpPr>
+        <p:cNvPr id="1" name=""/>
+        <p:cNvGrpSpPr/>
+        <p:nvPr/>
+      </p:nvGrpSpPr>
+      <p:grpSpPr>
+        <a:xfrm>
+          <a:off x="0" y="0"/>
+          <a:ext cx="0" cy="0"/>
+          <a:chOff x="0" y="0"/>
+          <a:chExt cx="0" cy="0"/>
+        </a:xfrm>
+      </p:grpSpPr>
+      <p:sp>
+        <p:nvSpPr>
+          <p:cNvPr id="2" name="Slide Image Placeholder 1"/>
+          <p:cNvSpPr>
+            <a:spLocks noGrp="1" noRot="1" noChangeAspect="1"/>
+          </p:cNvSpPr>
+          <p:nvPr>
+            <p:ph type="sldImg"/>
+          </p:nvPr>
+        </p:nvSpPr>
+        <p:spPr/>
+      </p:sp>
+      <p:sp>
+        <p:nvSpPr>
+          <p:cNvPr id="3" name="Notes Placeholder 2"/>
+          <p:cNvSpPr>
+            <a:spLocks noGrp="1"/>
+          </p:cNvSpPr>
+          <p:nvPr>
+            <p:ph type="body" idx="1"/>
+          </p:nvPr>
+        </p:nvSpPr>
+        <p:spPr/>
+        <p:txBody>
+          <a:bodyPr/>
+          <a:lstStyle/>
+          <a:p>
+            <a:r>
+              <a:rPr lang="en-US" dirty="0"/>
+              <a:t>次回の日程・テーマ・同席者をこの場で決める。お客様と『戦友』として、一緒に社内へ進める姿勢を伝える。</a:t>
+            </a:r>
+            <a:endParaRPr lang="en-US" dirty="0"/>
+          </a:p>
+        </p:txBody>
+      </p:sp>
+      <p:sp>
+        <p:nvSpPr>
+          <p:cNvPr id="4" name="Slide Number Placeholder 3"/>
+          <p:cNvSpPr>
+            <a:spLocks noGrp="1"/>
+          </p:cNvSpPr>
+          <p:nvPr>
+            <p:ph type="sldNum" sz="quarter" idx="10"/>
+          </p:nvPr>
+        </p:nvSpPr>
+        <p:spPr/>
+        <p:txBody>
+          <a:bodyPr/>
+          <a:lstStyle/>
+          <a:p>
+            <a:fld id="{F7021451-1387-4CA6-816F-3879F97B5CBC}" type="slidenum">
+              <a:rPr lang="en-US"/>
+              <a:t>10</a:t>
+            </a:fld>
+            <a:endParaRPr lang="en-US"/>
+          </a:p>
+        </p:txBody>
+      </p:sp>
+    </p:spTree>
+    <p:extLst>
+      <p:ext uri="{BB962C8B-B14F-4D97-AF65-F5344CB8AC3E}">
+        <p14:creationId xmlns:p14="http://schemas.microsoft.com/office/powerpoint/2010/main" val="1024086991"/>
+      </p:ext>
+    </p:extLst>
+  </p:cSld>
+  <p:clrMapOvr>
+    <a:masterClrMapping/>
+  </p:clrMapOvr>
+</p:notes>
+</file>
+
+<file path=ppt/notesSlides/notesSlide11.xml><?xml version="1.0" encoding="utf-8"?>
+<p:notes xmlns:a="http://schemas.openxmlformats.org/drawingml/2006/main" xmlns:r="http://schemas.openxmlformats.org/officeDocument/2006/relationships" xmlns:p="http://schemas.openxmlformats.org/presentationml/2006/main">
+  <p:cSld>
+    <p:spTree>
+      <p:nvGrpSpPr>
+        <p:cNvPr id="1" name=""/>
+        <p:cNvGrpSpPr/>
+        <p:nvPr/>
+      </p:nvGrpSpPr>
+      <p:grpSpPr>
+        <a:xfrm>
+          <a:off x="0" y="0"/>
+          <a:ext cx="0" cy="0"/>
+          <a:chOff x="0" y="0"/>
+          <a:chExt cx="0" cy="0"/>
+        </a:xfrm>
+      </p:grpSpPr>
+      <p:sp>
+        <p:nvSpPr>
+          <p:cNvPr id="2" name="Slide Image Placeholder 1"/>
+          <p:cNvSpPr>
+            <a:spLocks noGrp="1" noRot="1" noChangeAspect="1"/>
+          </p:cNvSpPr>
+          <p:nvPr>
+            <p:ph type="sldImg"/>
+          </p:nvPr>
+        </p:nvSpPr>
+        <p:spPr/>
+      </p:sp>
+      <p:sp>
+        <p:nvSpPr>
+          <p:cNvPr id="3" name="Notes Placeholder 2"/>
+          <p:cNvSpPr>
+            <a:spLocks noGrp="1"/>
+          </p:cNvSpPr>
+          <p:nvPr>
+            <p:ph type="body" idx="1"/>
+          </p:nvPr>
+        </p:nvSpPr>
+        <p:spPr/>
+        <p:txBody>
+          <a:bodyPr/>
+          <a:lstStyle/>
+          <a:p>
+            <a:r>
+              <a:rPr lang="en-US" dirty="0"/>
+              <a:t/>
+            </a:r>
+            <a:endParaRPr lang="en-US" dirty="0"/>
+          </a:p>
+        </p:txBody>
+      </p:sp>
+      <p:sp>
+        <p:nvSpPr>
+          <p:cNvPr id="4" name="Slide Number Placeholder 3"/>
+          <p:cNvSpPr>
+            <a:spLocks noGrp="1"/>
+          </p:cNvSpPr>
+          <p:nvPr>
+            <p:ph type="sldNum" sz="quarter" idx="10"/>
+          </p:nvPr>
+        </p:nvSpPr>
+        <p:spPr/>
+        <p:txBody>
+          <a:bodyPr/>
+          <a:lstStyle/>
+          <a:p>
+            <a:fld id="{F7021451-1387-4CA6-816F-3879F97B5CBC}" type="slidenum">
+              <a:rPr lang="en-US"/>
+              <a:t>11</a:t>
+            </a:fld>
+            <a:endParaRPr lang="en-US"/>
+          </a:p>
+        </p:txBody>
+      </p:sp>
+    </p:spTree>
+    <p:extLst>
+      <p:ext uri="{BB962C8B-B14F-4D97-AF65-F5344CB8AC3E}">
+        <p14:creationId xmlns:p14="http://schemas.microsoft.com/office/powerpoint/2010/main" val="1024086991"/>
+      </p:ext>
+    </p:extLst>
+  </p:cSld>
+  <p:clrMapOvr>
+    <a:masterClrMapping/>
+  </p:clrMapOvr>
+</p:notes>
+</file>
+
 <file path=ppt/notesSlides/notesSlide2.xml><?xml version="1.0" encoding="utf-8"?>
 <p:notes xmlns:a="http://schemas.openxmlformats.org/drawingml/2006/main" xmlns:r="http://schemas.openxmlformats.org/officeDocument/2006/relationships" xmlns:p="http://schemas.openxmlformats.org/presentationml/2006/main">
   <p:cSld>
@@ -597,7 +776,7 @@
           <a:p>
             <a:r>
               <a:rPr lang="en-US" dirty="0"/>
-              <a:t>【不要】説明よりお伺いに時間を割くことを示す。途中退席の予定がないかもここで確認する。</a:t>
+              <a:t>【不要】お伺いに一番時間を割くことを示す。途中退席の予定がないかもここで確認する。</a:t>
             </a:r>
             <a:endParaRPr lang="en-US" dirty="0"/>
           </a:p>
@@ -685,7 +864,7 @@
           <a:p>
             <a:r>
               <a:rPr lang="en-US" dirty="0"/>
-              <a:t>【不信】『この会社に相談して大丈夫か』を崩すパート。10分以内で終える。事例は相手の関心が出てから補足する。</a:t>
+              <a:t>【不信】『この会社に相談して大丈夫か』を崩すパート。5分程度で終え、次のナレッジベースに時間を回す。</a:t>
             </a:r>
             <a:endParaRPr lang="en-US" dirty="0"/>
           </a:p>
@@ -773,7 +952,7 @@
           <a:p>
             <a:r>
               <a:rPr lang="en-US" dirty="0"/>
-              <a:t>【不要】本日の山場。4つは仮説。『どれが一番近いですか』と聞き、外れたら素直に直す。</a:t>
+              <a:t>【不要】大きな入口。会社全体の話として共感を得る。『御社でも、この人に聞かないと分からない、という場面はありますか』と問いかけ、次のページへ。3つは一般的な話で、TAK様の事実ではない。</a:t>
             </a:r>
             <a:endParaRPr lang="en-US" dirty="0"/>
           </a:p>
@@ -861,7 +1040,7 @@
           <a:p>
             <a:r>
               <a:rPr lang="en-US" dirty="0"/>
-              <a:t>【不適】反応があった行だけ深掘り。効果・金額・連携可否はこの場で約束しない。</a:t>
+              <a:t>【不信・不適】thomasの議事録AIとAIデータ統合を組み合わせた考え方。社名を出せる事例ではないので、他社名は口頭でも出さない。セキュリティ（社外に出したくない）の質問が出たら、環境を確認して決めると答える。</a:t>
             </a:r>
             <a:endParaRPr lang="en-US" dirty="0"/>
           </a:p>
@@ -949,7 +1128,7 @@
           <a:p>
             <a:r>
               <a:rPr lang="en-US" dirty="0"/>
-              <a:t>【不急】④で『いつまでに』を必ず聞く。【決裁】⑤で決裁者・親会社承認の要否をさりげなく確認する。</a:t>
+              <a:t>大きな話から調達業務へ移る橋渡し。質問例は仮の例。佐藤様の業務に近い質問を一つ挙げていただけると次につながる。</a:t>
             </a:r>
             <a:endParaRPr lang="en-US" dirty="0"/>
           </a:p>
@@ -1037,7 +1216,7 @@
           <a:p>
             <a:r>
               <a:rPr lang="en-US" dirty="0"/>
-              <a:t>次回の日程・テーマ・同席者をこの場で決める。お客様と『戦友』として、一緒に社内へ進める姿勢を伝える。</a:t>
+              <a:t>【不要】小さな話題に入る。4つは仮説。『どれが一番近いですか』と聞き、外れたら素直に直す。</a:t>
             </a:r>
             <a:endParaRPr lang="en-US" dirty="0"/>
           </a:p>
@@ -1125,7 +1304,7 @@
           <a:p>
             <a:r>
               <a:rPr lang="en-US" dirty="0"/>
-              <a:t/>
+              <a:t>【不適】反応があった行だけ深掘り。効果・金額・連携可否はこの場で約束しない。</a:t>
             </a:r>
             <a:endParaRPr lang="en-US" dirty="0"/>
           </a:p>
@@ -1149,6 +1328,94 @@
             <a:fld id="{F7021451-1387-4CA6-816F-3879F97B5CBC}" type="slidenum">
               <a:rPr lang="en-US"/>
               <a:t>8</a:t>
+            </a:fld>
+            <a:endParaRPr lang="en-US"/>
+          </a:p>
+        </p:txBody>
+      </p:sp>
+    </p:spTree>
+    <p:extLst>
+      <p:ext uri="{BB962C8B-B14F-4D97-AF65-F5344CB8AC3E}">
+        <p14:creationId xmlns:p14="http://schemas.microsoft.com/office/powerpoint/2010/main" val="1024086991"/>
+      </p:ext>
+    </p:extLst>
+  </p:cSld>
+  <p:clrMapOvr>
+    <a:masterClrMapping/>
+  </p:clrMapOvr>
+</p:notes>
+</file>
+
+<file path=ppt/notesSlides/notesSlide9.xml><?xml version="1.0" encoding="utf-8"?>
+<p:notes xmlns:a="http://schemas.openxmlformats.org/drawingml/2006/main" xmlns:r="http://schemas.openxmlformats.org/officeDocument/2006/relationships" xmlns:p="http://schemas.openxmlformats.org/presentationml/2006/main">
+  <p:cSld>
+    <p:spTree>
+      <p:nvGrpSpPr>
+        <p:cNvPr id="1" name=""/>
+        <p:cNvGrpSpPr/>
+        <p:nvPr/>
+      </p:nvGrpSpPr>
+      <p:grpSpPr>
+        <a:xfrm>
+          <a:off x="0" y="0"/>
+          <a:ext cx="0" cy="0"/>
+          <a:chOff x="0" y="0"/>
+          <a:chExt cx="0" cy="0"/>
+        </a:xfrm>
+      </p:grpSpPr>
+      <p:sp>
+        <p:nvSpPr>
+          <p:cNvPr id="2" name="Slide Image Placeholder 1"/>
+          <p:cNvSpPr>
+            <a:spLocks noGrp="1" noRot="1" noChangeAspect="1"/>
+          </p:cNvSpPr>
+          <p:nvPr>
+            <p:ph type="sldImg"/>
+          </p:nvPr>
+        </p:nvSpPr>
+        <p:spPr/>
+      </p:sp>
+      <p:sp>
+        <p:nvSpPr>
+          <p:cNvPr id="3" name="Notes Placeholder 2"/>
+          <p:cNvSpPr>
+            <a:spLocks noGrp="1"/>
+          </p:cNvSpPr>
+          <p:nvPr>
+            <p:ph type="body" idx="1"/>
+          </p:nvPr>
+        </p:nvSpPr>
+        <p:spPr/>
+        <p:txBody>
+          <a:bodyPr/>
+          <a:lstStyle/>
+          <a:p>
+            <a:r>
+              <a:rPr lang="en-US" dirty="0"/>
+              <a:t>【不急】⑤で『いつまでに』を必ず聞く。【決裁】⑥で決裁者・親会社承認の要否をさりげなく確認する。④でクラウド利用のルールも確認。</a:t>
+            </a:r>
+            <a:endParaRPr lang="en-US" dirty="0"/>
+          </a:p>
+        </p:txBody>
+      </p:sp>
+      <p:sp>
+        <p:nvSpPr>
+          <p:cNvPr id="4" name="Slide Number Placeholder 3"/>
+          <p:cNvSpPr>
+            <a:spLocks noGrp="1"/>
+          </p:cNvSpPr>
+          <p:nvPr>
+            <p:ph type="sldNum" sz="quarter" idx="10"/>
+          </p:nvPr>
+        </p:nvSpPr>
+        <p:spPr/>
+        <p:txBody>
+          <a:bodyPr/>
+          <a:lstStyle/>
+          <a:p>
+            <a:fld id="{F7021451-1387-4CA6-816F-3879F97B5CBC}" type="slidenum">
+              <a:rPr lang="en-US"/>
+              <a:t>9</a:t>
             </a:fld>
             <a:endParaRPr lang="en-US"/>
           </a:p>
@@ -1599,7 +1866,7 @@
                 <a:ea typeface="Yu Gothic" pitchFamily="34" charset="-122"/>
                 <a:cs typeface="Yu Gothic" pitchFamily="34" charset="-120"/>
               </a:rPr>
-              <a:t>定型業務・調達業務の効率化に向けて</a:t>
+              <a:t>現場の知恵を残し、調達業務の手間を減らす</a:t>
             </a:r>
             <a:endParaRPr lang="en-US" sz="3200" dirty="0"/>
           </a:p>
@@ -1728,6 +1995,1016 @@
               <a:t>thomas株式会社</a:t>
             </a:r>
             <a:endParaRPr lang="en-US" sz="1867" dirty="0"/>
+          </a:p>
+        </p:txBody>
+      </p:sp>
+    </p:spTree>
+  </p:cSld>
+  <p:clrMapOvr>
+    <a:masterClrMapping/>
+  </p:clrMapOvr>
+</p:sld>
+</file>
+
+<file path=ppt/slides/slide10.xml><?xml version="1.0" encoding="utf-8"?>
+<p:sld xmlns:a="http://schemas.openxmlformats.org/drawingml/2006/main" xmlns:r="http://schemas.openxmlformats.org/officeDocument/2006/relationships" xmlns:p="http://schemas.openxmlformats.org/presentationml/2006/main">
+  <p:cSld name="Slide 10">
+    <p:bg>
+      <p:bgPr>
+        <a:solidFill>
+          <a:srgbClr val="FFFFFF"/>
+        </a:solidFill>
+      </p:bgPr>
+    </p:bg>
+    <p:spTree>
+      <p:nvGrpSpPr>
+        <p:cNvPr id="1" name=""/>
+        <p:cNvGrpSpPr/>
+        <p:nvPr/>
+      </p:nvGrpSpPr>
+      <p:grpSpPr>
+        <a:xfrm>
+          <a:off x="0" y="0"/>
+          <a:ext cx="0" cy="0"/>
+          <a:chOff x="0" y="0"/>
+          <a:chExt cx="0" cy="0"/>
+        </a:xfrm>
+      </p:grpSpPr>
+      <p:sp>
+        <p:nvSpPr>
+          <p:cNvPr id="2" name="Text 0"/>
+          <p:cNvSpPr/>
+          <p:nvPr/>
+        </p:nvSpPr>
+        <p:spPr>
+          <a:xfrm>
+            <a:off x="1216152" y="411480"/>
+            <a:ext cx="9820656" cy="548640"/>
+          </a:xfrm>
+          <a:prstGeom prst="rect">
+            <a:avLst/>
+          </a:prstGeom>
+          <a:noFill/>
+          <a:ln/>
+        </p:spPr>
+        <p:txBody>
+          <a:bodyPr wrap="square" lIns="0" tIns="0" rIns="0" bIns="0" rtlCol="0" anchor="ctr"/>
+          <a:lstStyle/>
+          <a:p>
+            <a:pPr indent="0" marL="0">
+              <a:buNone/>
+            </a:pPr>
+            <a:r>
+              <a:rPr lang="en-US" sz="2800" b="1" dirty="0">
+                <a:solidFill>
+                  <a:srgbClr val="002060"/>
+                </a:solidFill>
+                <a:latin typeface="Yu Gothic" pitchFamily="34" charset="0"/>
+                <a:ea typeface="Yu Gothic" pitchFamily="34" charset="-122"/>
+                <a:cs typeface="Yu Gothic" pitchFamily="34" charset="-120"/>
+              </a:rPr>
+              <a:t>今後の進め方（案）</a:t>
+            </a:r>
+            <a:endParaRPr lang="en-US" sz="2800" dirty="0"/>
+          </a:p>
+        </p:txBody>
+      </p:sp>
+      <p:sp>
+        <p:nvSpPr>
+          <p:cNvPr id="3" name="Shape 1"/>
+          <p:cNvSpPr/>
+          <p:nvPr/>
+        </p:nvSpPr>
+        <p:spPr>
+          <a:xfrm>
+            <a:off x="1216152" y="1024128"/>
+            <a:ext cx="1097280" cy="0"/>
+          </a:xfrm>
+          <a:prstGeom prst="line">
+            <a:avLst/>
+          </a:prstGeom>
+          <a:noFill/>
+          <a:ln w="31750">
+            <a:solidFill>
+              <a:srgbClr val="EB6311"/>
+            </a:solidFill>
+            <a:prstDash val="solid"/>
+          </a:ln>
+        </p:spPr>
+      </p:sp>
+      <p:sp>
+        <p:nvSpPr>
+          <p:cNvPr id="4" name="Text 2"/>
+          <p:cNvSpPr/>
+          <p:nvPr/>
+        </p:nvSpPr>
+        <p:spPr>
+          <a:xfrm>
+            <a:off x="1216152" y="1115568"/>
+            <a:ext cx="9820656" cy="365760"/>
+          </a:xfrm>
+          <a:prstGeom prst="rect">
+            <a:avLst/>
+          </a:prstGeom>
+          <a:noFill/>
+          <a:ln/>
+        </p:spPr>
+        <p:txBody>
+          <a:bodyPr wrap="square" lIns="0" tIns="0" rIns="0" bIns="0" rtlCol="0" anchor="ctr"/>
+          <a:lstStyle/>
+          <a:p>
+            <a:pPr indent="0" marL="0">
+              <a:buNone/>
+            </a:pPr>
+            <a:r>
+              <a:rPr lang="en-US" sz="1500" dirty="0">
+                <a:solidFill>
+                  <a:srgbClr val="64748B"/>
+                </a:solidFill>
+                <a:latin typeface="Yu Gothic" pitchFamily="34" charset="0"/>
+                <a:ea typeface="Yu Gothic" pitchFamily="34" charset="-122"/>
+                <a:cs typeface="Yu Gothic" pitchFamily="34" charset="-120"/>
+              </a:rPr>
+              <a:t>小さく確かめながら進めます</a:t>
+            </a:r>
+            <a:endParaRPr lang="en-US" sz="1500" dirty="0"/>
+          </a:p>
+        </p:txBody>
+      </p:sp>
+      <p:pic>
+        <p:nvPicPr>
+          <p:cNvPr id="5" name="Image 0" descr="/home/user/-/tak-evac/src/assets/logo_t.png">    </p:cNvPr>
+          <p:cNvPicPr>
+            <a:picLocks noChangeAspect="1"/>
+          </p:cNvPicPr>
+          <p:nvPr/>
+        </p:nvPicPr>
+        <p:blipFill>
+          <a:blip r:embed="rId1"/>
+          <a:stretch>
+            <a:fillRect/>
+          </a:stretch>
+        </p:blipFill>
+        <p:spPr>
+          <a:xfrm>
+            <a:off x="228600" y="6199632"/>
+            <a:ext cx="457200" cy="457200"/>
+          </a:xfrm>
+          <a:prstGeom prst="rect">
+            <a:avLst/>
+          </a:prstGeom>
+        </p:spPr>
+      </p:pic>
+      <p:sp>
+        <p:nvSpPr>
+          <p:cNvPr id="6" name="Shape 3"/>
+          <p:cNvSpPr/>
+          <p:nvPr/>
+        </p:nvSpPr>
+        <p:spPr>
+          <a:xfrm>
+            <a:off x="2443734" y="2011680"/>
+            <a:ext cx="7365492" cy="0"/>
+          </a:xfrm>
+          <a:prstGeom prst="line">
+            <a:avLst/>
+          </a:prstGeom>
+          <a:noFill/>
+          <a:ln w="38100">
+            <a:solidFill>
+              <a:srgbClr val="E2E8F0"/>
+            </a:solidFill>
+            <a:prstDash val="solid"/>
+          </a:ln>
+        </p:spPr>
+      </p:sp>
+      <p:sp>
+        <p:nvSpPr>
+          <p:cNvPr id="7" name="Shape 4"/>
+          <p:cNvSpPr/>
+          <p:nvPr/>
+        </p:nvSpPr>
+        <p:spPr>
+          <a:xfrm>
+            <a:off x="2077974" y="1645920"/>
+            <a:ext cx="731520" cy="731520"/>
+          </a:xfrm>
+          <a:prstGeom prst="ellipse">
+            <a:avLst/>
+          </a:prstGeom>
+          <a:solidFill>
+            <a:srgbClr val="EB6311"/>
+          </a:solidFill>
+          <a:ln w="38100">
+            <a:solidFill>
+              <a:srgbClr val="FFFFFF"/>
+            </a:solidFill>
+            <a:prstDash val="solid"/>
+          </a:ln>
+        </p:spPr>
+      </p:sp>
+      <p:sp>
+        <p:nvSpPr>
+          <p:cNvPr id="8" name="Text 5"/>
+          <p:cNvSpPr/>
+          <p:nvPr/>
+        </p:nvSpPr>
+        <p:spPr>
+          <a:xfrm>
+            <a:off x="2077974" y="1645920"/>
+            <a:ext cx="731520" cy="731520"/>
+          </a:xfrm>
+          <a:prstGeom prst="rect">
+            <a:avLst/>
+          </a:prstGeom>
+          <a:noFill/>
+          <a:ln/>
+        </p:spPr>
+        <p:txBody>
+          <a:bodyPr wrap="square" lIns="0" tIns="0" rIns="0" bIns="0" rtlCol="0" anchor="ctr"/>
+          <a:lstStyle/>
+          <a:p>
+            <a:pPr algn="ctr" indent="0" marL="0">
+              <a:buNone/>
+            </a:pPr>
+            <a:r>
+              <a:rPr lang="en-US" sz="2400" b="1" dirty="0">
+                <a:solidFill>
+                  <a:srgbClr val="FFFFFF"/>
+                </a:solidFill>
+                <a:latin typeface="Yu Gothic" pitchFamily="34" charset="0"/>
+                <a:ea typeface="Yu Gothic" pitchFamily="34" charset="-122"/>
+                <a:cs typeface="Yu Gothic" pitchFamily="34" charset="-120"/>
+              </a:rPr>
+              <a:t>1</a:t>
+            </a:r>
+            <a:endParaRPr lang="en-US" sz="2400" dirty="0"/>
+          </a:p>
+        </p:txBody>
+      </p:sp>
+      <p:sp>
+        <p:nvSpPr>
+          <p:cNvPr id="9" name="Text 6"/>
+          <p:cNvSpPr/>
+          <p:nvPr/>
+        </p:nvSpPr>
+        <p:spPr>
+          <a:xfrm>
+            <a:off x="1307592" y="2560320"/>
+            <a:ext cx="2272284" cy="457200"/>
+          </a:xfrm>
+          <a:prstGeom prst="rect">
+            <a:avLst/>
+          </a:prstGeom>
+          <a:noFill/>
+          <a:ln/>
+        </p:spPr>
+        <p:txBody>
+          <a:bodyPr wrap="square" lIns="0" tIns="0" rIns="0" bIns="0" rtlCol="0" anchor="ctr"/>
+          <a:lstStyle/>
+          <a:p>
+            <a:pPr algn="ctr" indent="0" marL="0">
+              <a:buNone/>
+            </a:pPr>
+            <a:r>
+              <a:rPr lang="en-US" sz="2000" b="1" dirty="0">
+                <a:solidFill>
+                  <a:srgbClr val="EB6311"/>
+                </a:solidFill>
+                <a:latin typeface="Yu Gothic" pitchFamily="34" charset="0"/>
+                <a:ea typeface="Yu Gothic" pitchFamily="34" charset="-122"/>
+                <a:cs typeface="Yu Gothic" pitchFamily="34" charset="-120"/>
+              </a:rPr>
+              <a:t>本日のお伺い</a:t>
+            </a:r>
+            <a:endParaRPr lang="en-US" sz="2000" dirty="0"/>
+          </a:p>
+        </p:txBody>
+      </p:sp>
+      <p:sp>
+        <p:nvSpPr>
+          <p:cNvPr id="10" name="Text 7"/>
+          <p:cNvSpPr/>
+          <p:nvPr/>
+        </p:nvSpPr>
+        <p:spPr>
+          <a:xfrm>
+            <a:off x="1353312" y="3063240"/>
+            <a:ext cx="2180844" cy="1005840"/>
+          </a:xfrm>
+          <a:prstGeom prst="rect">
+            <a:avLst/>
+          </a:prstGeom>
+          <a:noFill/>
+          <a:ln/>
+        </p:spPr>
+        <p:txBody>
+          <a:bodyPr wrap="square" lIns="0" tIns="0" rIns="0" bIns="0" rtlCol="0" anchor="t"/>
+          <a:lstStyle/>
+          <a:p>
+            <a:pPr algn="ctr" indent="0" marL="0">
+              <a:buNone/>
+            </a:pPr>
+            <a:r>
+              <a:rPr lang="en-US" sz="1500" dirty="0">
+                <a:solidFill>
+                  <a:srgbClr val="334155"/>
+                </a:solidFill>
+                <a:latin typeface="Yu Gothic" pitchFamily="34" charset="0"/>
+                <a:ea typeface="Yu Gothic" pitchFamily="34" charset="-122"/>
+                <a:cs typeface="Yu Gothic" pitchFamily="34" charset="-120"/>
+              </a:rPr>
+              <a:t>現状とお困りごとを伺い、テーマの候補を挙げる</a:t>
+            </a:r>
+            <a:endParaRPr lang="en-US" sz="1500" dirty="0"/>
+          </a:p>
+        </p:txBody>
+      </p:sp>
+      <p:sp>
+        <p:nvSpPr>
+          <p:cNvPr id="11" name="Shape 8"/>
+          <p:cNvSpPr/>
+          <p:nvPr/>
+        </p:nvSpPr>
+        <p:spPr>
+          <a:xfrm>
+            <a:off x="4533138" y="1645920"/>
+            <a:ext cx="731520" cy="731520"/>
+          </a:xfrm>
+          <a:prstGeom prst="ellipse">
+            <a:avLst/>
+          </a:prstGeom>
+          <a:solidFill>
+            <a:srgbClr val="002060"/>
+          </a:solidFill>
+          <a:ln w="38100">
+            <a:solidFill>
+              <a:srgbClr val="FFFFFF"/>
+            </a:solidFill>
+            <a:prstDash val="solid"/>
+          </a:ln>
+        </p:spPr>
+      </p:sp>
+      <p:sp>
+        <p:nvSpPr>
+          <p:cNvPr id="12" name="Text 9"/>
+          <p:cNvSpPr/>
+          <p:nvPr/>
+        </p:nvSpPr>
+        <p:spPr>
+          <a:xfrm>
+            <a:off x="4533138" y="1645920"/>
+            <a:ext cx="731520" cy="731520"/>
+          </a:xfrm>
+          <a:prstGeom prst="rect">
+            <a:avLst/>
+          </a:prstGeom>
+          <a:noFill/>
+          <a:ln/>
+        </p:spPr>
+        <p:txBody>
+          <a:bodyPr wrap="square" lIns="0" tIns="0" rIns="0" bIns="0" rtlCol="0" anchor="ctr"/>
+          <a:lstStyle/>
+          <a:p>
+            <a:pPr algn="ctr" indent="0" marL="0">
+              <a:buNone/>
+            </a:pPr>
+            <a:r>
+              <a:rPr lang="en-US" sz="2400" b="1" dirty="0">
+                <a:solidFill>
+                  <a:srgbClr val="FFFFFF"/>
+                </a:solidFill>
+                <a:latin typeface="Yu Gothic" pitchFamily="34" charset="0"/>
+                <a:ea typeface="Yu Gothic" pitchFamily="34" charset="-122"/>
+                <a:cs typeface="Yu Gothic" pitchFamily="34" charset="-120"/>
+              </a:rPr>
+              <a:t>2</a:t>
+            </a:r>
+            <a:endParaRPr lang="en-US" sz="2400" dirty="0"/>
+          </a:p>
+        </p:txBody>
+      </p:sp>
+      <p:sp>
+        <p:nvSpPr>
+          <p:cNvPr id="13" name="Text 10"/>
+          <p:cNvSpPr/>
+          <p:nvPr/>
+        </p:nvSpPr>
+        <p:spPr>
+          <a:xfrm>
+            <a:off x="3762756" y="2560320"/>
+            <a:ext cx="2272284" cy="457200"/>
+          </a:xfrm>
+          <a:prstGeom prst="rect">
+            <a:avLst/>
+          </a:prstGeom>
+          <a:noFill/>
+          <a:ln/>
+        </p:spPr>
+        <p:txBody>
+          <a:bodyPr wrap="square" lIns="0" tIns="0" rIns="0" bIns="0" rtlCol="0" anchor="ctr"/>
+          <a:lstStyle/>
+          <a:p>
+            <a:pPr algn="ctr" indent="0" marL="0">
+              <a:buNone/>
+            </a:pPr>
+            <a:r>
+              <a:rPr lang="en-US" sz="2000" b="1" dirty="0">
+                <a:solidFill>
+                  <a:srgbClr val="002060"/>
+                </a:solidFill>
+                <a:latin typeface="Yu Gothic" pitchFamily="34" charset="0"/>
+                <a:ea typeface="Yu Gothic" pitchFamily="34" charset="-122"/>
+                <a:cs typeface="Yu Gothic" pitchFamily="34" charset="-120"/>
+              </a:rPr>
+              <a:t>業務の詳細確認</a:t>
+            </a:r>
+            <a:endParaRPr lang="en-US" sz="2000" dirty="0"/>
+          </a:p>
+        </p:txBody>
+      </p:sp>
+      <p:sp>
+        <p:nvSpPr>
+          <p:cNvPr id="14" name="Text 11"/>
+          <p:cNvSpPr/>
+          <p:nvPr/>
+        </p:nvSpPr>
+        <p:spPr>
+          <a:xfrm>
+            <a:off x="3808476" y="3063240"/>
+            <a:ext cx="2180844" cy="1005840"/>
+          </a:xfrm>
+          <a:prstGeom prst="rect">
+            <a:avLst/>
+          </a:prstGeom>
+          <a:noFill/>
+          <a:ln/>
+        </p:spPr>
+        <p:txBody>
+          <a:bodyPr wrap="square" lIns="0" tIns="0" rIns="0" bIns="0" rtlCol="0" anchor="t"/>
+          <a:lstStyle/>
+          <a:p>
+            <a:pPr algn="ctr" indent="0" marL="0">
+              <a:buNone/>
+            </a:pPr>
+            <a:r>
+              <a:rPr lang="en-US" sz="1500" dirty="0">
+                <a:solidFill>
+                  <a:srgbClr val="334155"/>
+                </a:solidFill>
+                <a:latin typeface="Yu Gothic" pitchFamily="34" charset="0"/>
+                <a:ea typeface="Yu Gothic" pitchFamily="34" charset="-122"/>
+                <a:cs typeface="Yu Gothic" pitchFamily="34" charset="-120"/>
+              </a:rPr>
+              <a:t>実務ご担当者様も交え、対象業務の流れと手間を確認する</a:t>
+            </a:r>
+            <a:endParaRPr lang="en-US" sz="1500" dirty="0"/>
+          </a:p>
+        </p:txBody>
+      </p:sp>
+      <p:sp>
+        <p:nvSpPr>
+          <p:cNvPr id="15" name="Shape 12"/>
+          <p:cNvSpPr/>
+          <p:nvPr/>
+        </p:nvSpPr>
+        <p:spPr>
+          <a:xfrm>
+            <a:off x="6988302" y="1645920"/>
+            <a:ext cx="731520" cy="731520"/>
+          </a:xfrm>
+          <a:prstGeom prst="ellipse">
+            <a:avLst/>
+          </a:prstGeom>
+          <a:solidFill>
+            <a:srgbClr val="002060"/>
+          </a:solidFill>
+          <a:ln w="38100">
+            <a:solidFill>
+              <a:srgbClr val="FFFFFF"/>
+            </a:solidFill>
+            <a:prstDash val="solid"/>
+          </a:ln>
+        </p:spPr>
+      </p:sp>
+      <p:sp>
+        <p:nvSpPr>
+          <p:cNvPr id="16" name="Text 13"/>
+          <p:cNvSpPr/>
+          <p:nvPr/>
+        </p:nvSpPr>
+        <p:spPr>
+          <a:xfrm>
+            <a:off x="6988302" y="1645920"/>
+            <a:ext cx="731520" cy="731520"/>
+          </a:xfrm>
+          <a:prstGeom prst="rect">
+            <a:avLst/>
+          </a:prstGeom>
+          <a:noFill/>
+          <a:ln/>
+        </p:spPr>
+        <p:txBody>
+          <a:bodyPr wrap="square" lIns="0" tIns="0" rIns="0" bIns="0" rtlCol="0" anchor="ctr"/>
+          <a:lstStyle/>
+          <a:p>
+            <a:pPr algn="ctr" indent="0" marL="0">
+              <a:buNone/>
+            </a:pPr>
+            <a:r>
+              <a:rPr lang="en-US" sz="2400" b="1" dirty="0">
+                <a:solidFill>
+                  <a:srgbClr val="FFFFFF"/>
+                </a:solidFill>
+                <a:latin typeface="Yu Gothic" pitchFamily="34" charset="0"/>
+                <a:ea typeface="Yu Gothic" pitchFamily="34" charset="-122"/>
+                <a:cs typeface="Yu Gothic" pitchFamily="34" charset="-120"/>
+              </a:rPr>
+              <a:t>3</a:t>
+            </a:r>
+            <a:endParaRPr lang="en-US" sz="2400" dirty="0"/>
+          </a:p>
+        </p:txBody>
+      </p:sp>
+      <p:sp>
+        <p:nvSpPr>
+          <p:cNvPr id="17" name="Text 14"/>
+          <p:cNvSpPr/>
+          <p:nvPr/>
+        </p:nvSpPr>
+        <p:spPr>
+          <a:xfrm>
+            <a:off x="6217920" y="2560320"/>
+            <a:ext cx="2272284" cy="457200"/>
+          </a:xfrm>
+          <a:prstGeom prst="rect">
+            <a:avLst/>
+          </a:prstGeom>
+          <a:noFill/>
+          <a:ln/>
+        </p:spPr>
+        <p:txBody>
+          <a:bodyPr wrap="square" lIns="0" tIns="0" rIns="0" bIns="0" rtlCol="0" anchor="ctr"/>
+          <a:lstStyle/>
+          <a:p>
+            <a:pPr algn="ctr" indent="0" marL="0">
+              <a:buNone/>
+            </a:pPr>
+            <a:r>
+              <a:rPr lang="en-US" sz="2000" b="1" dirty="0">
+                <a:solidFill>
+                  <a:srgbClr val="002060"/>
+                </a:solidFill>
+                <a:latin typeface="Yu Gothic" pitchFamily="34" charset="0"/>
+                <a:ea typeface="Yu Gothic" pitchFamily="34" charset="-122"/>
+                <a:cs typeface="Yu Gothic" pitchFamily="34" charset="-120"/>
+              </a:rPr>
+              <a:t>ご提案</a:t>
+            </a:r>
+            <a:endParaRPr lang="en-US" sz="2000" dirty="0"/>
+          </a:p>
+        </p:txBody>
+      </p:sp>
+      <p:sp>
+        <p:nvSpPr>
+          <p:cNvPr id="18" name="Text 15"/>
+          <p:cNvSpPr/>
+          <p:nvPr/>
+        </p:nvSpPr>
+        <p:spPr>
+          <a:xfrm>
+            <a:off x="6263640" y="3063240"/>
+            <a:ext cx="2180844" cy="1005840"/>
+          </a:xfrm>
+          <a:prstGeom prst="rect">
+            <a:avLst/>
+          </a:prstGeom>
+          <a:noFill/>
+          <a:ln/>
+        </p:spPr>
+        <p:txBody>
+          <a:bodyPr wrap="square" lIns="0" tIns="0" rIns="0" bIns="0" rtlCol="0" anchor="t"/>
+          <a:lstStyle/>
+          <a:p>
+            <a:pPr algn="ctr" indent="0" marL="0">
+              <a:buNone/>
+            </a:pPr>
+            <a:r>
+              <a:rPr lang="en-US" sz="1500" dirty="0">
+                <a:solidFill>
+                  <a:srgbClr val="334155"/>
+                </a:solidFill>
+                <a:latin typeface="Yu Gothic" pitchFamily="34" charset="0"/>
+                <a:ea typeface="Yu Gothic" pitchFamily="34" charset="-122"/>
+                <a:cs typeface="Yu Gothic" pitchFamily="34" charset="-120"/>
+              </a:rPr>
+              <a:t>効果が見込める業務を選び、進め方と概算をご提示する</a:t>
+            </a:r>
+            <a:endParaRPr lang="en-US" sz="1500" dirty="0"/>
+          </a:p>
+        </p:txBody>
+      </p:sp>
+      <p:sp>
+        <p:nvSpPr>
+          <p:cNvPr id="19" name="Shape 16"/>
+          <p:cNvSpPr/>
+          <p:nvPr/>
+        </p:nvSpPr>
+        <p:spPr>
+          <a:xfrm>
+            <a:off x="9443466" y="1645920"/>
+            <a:ext cx="731520" cy="731520"/>
+          </a:xfrm>
+          <a:prstGeom prst="ellipse">
+            <a:avLst/>
+          </a:prstGeom>
+          <a:solidFill>
+            <a:srgbClr val="002060"/>
+          </a:solidFill>
+          <a:ln w="38100">
+            <a:solidFill>
+              <a:srgbClr val="FFFFFF"/>
+            </a:solidFill>
+            <a:prstDash val="solid"/>
+          </a:ln>
+        </p:spPr>
+      </p:sp>
+      <p:sp>
+        <p:nvSpPr>
+          <p:cNvPr id="20" name="Text 17"/>
+          <p:cNvSpPr/>
+          <p:nvPr/>
+        </p:nvSpPr>
+        <p:spPr>
+          <a:xfrm>
+            <a:off x="9443466" y="1645920"/>
+            <a:ext cx="731520" cy="731520"/>
+          </a:xfrm>
+          <a:prstGeom prst="rect">
+            <a:avLst/>
+          </a:prstGeom>
+          <a:noFill/>
+          <a:ln/>
+        </p:spPr>
+        <p:txBody>
+          <a:bodyPr wrap="square" lIns="0" tIns="0" rIns="0" bIns="0" rtlCol="0" anchor="ctr"/>
+          <a:lstStyle/>
+          <a:p>
+            <a:pPr algn="ctr" indent="0" marL="0">
+              <a:buNone/>
+            </a:pPr>
+            <a:r>
+              <a:rPr lang="en-US" sz="2400" b="1" dirty="0">
+                <a:solidFill>
+                  <a:srgbClr val="FFFFFF"/>
+                </a:solidFill>
+                <a:latin typeface="Yu Gothic" pitchFamily="34" charset="0"/>
+                <a:ea typeface="Yu Gothic" pitchFamily="34" charset="-122"/>
+                <a:cs typeface="Yu Gothic" pitchFamily="34" charset="-120"/>
+              </a:rPr>
+              <a:t>4</a:t>
+            </a:r>
+            <a:endParaRPr lang="en-US" sz="2400" dirty="0"/>
+          </a:p>
+        </p:txBody>
+      </p:sp>
+      <p:sp>
+        <p:nvSpPr>
+          <p:cNvPr id="21" name="Text 18"/>
+          <p:cNvSpPr/>
+          <p:nvPr/>
+        </p:nvSpPr>
+        <p:spPr>
+          <a:xfrm>
+            <a:off x="8673084" y="2560320"/>
+            <a:ext cx="2272284" cy="457200"/>
+          </a:xfrm>
+          <a:prstGeom prst="rect">
+            <a:avLst/>
+          </a:prstGeom>
+          <a:noFill/>
+          <a:ln/>
+        </p:spPr>
+        <p:txBody>
+          <a:bodyPr wrap="square" lIns="0" tIns="0" rIns="0" bIns="0" rtlCol="0" anchor="ctr"/>
+          <a:lstStyle/>
+          <a:p>
+            <a:pPr algn="ctr" indent="0" marL="0">
+              <a:buNone/>
+            </a:pPr>
+            <a:r>
+              <a:rPr lang="en-US" sz="2000" b="1" dirty="0">
+                <a:solidFill>
+                  <a:srgbClr val="002060"/>
+                </a:solidFill>
+                <a:latin typeface="Yu Gothic" pitchFamily="34" charset="0"/>
+                <a:ea typeface="Yu Gothic" pitchFamily="34" charset="-122"/>
+                <a:cs typeface="Yu Gothic" pitchFamily="34" charset="-120"/>
+              </a:rPr>
+              <a:t>小さく試す</a:t>
+            </a:r>
+            <a:endParaRPr lang="en-US" sz="2000" dirty="0"/>
+          </a:p>
+        </p:txBody>
+      </p:sp>
+      <p:sp>
+        <p:nvSpPr>
+          <p:cNvPr id="22" name="Text 19"/>
+          <p:cNvSpPr/>
+          <p:nvPr/>
+        </p:nvSpPr>
+        <p:spPr>
+          <a:xfrm>
+            <a:off x="8718804" y="3063240"/>
+            <a:ext cx="2180844" cy="1005840"/>
+          </a:xfrm>
+          <a:prstGeom prst="rect">
+            <a:avLst/>
+          </a:prstGeom>
+          <a:noFill/>
+          <a:ln/>
+        </p:spPr>
+        <p:txBody>
+          <a:bodyPr wrap="square" lIns="0" tIns="0" rIns="0" bIns="0" rtlCol="0" anchor="t"/>
+          <a:lstStyle/>
+          <a:p>
+            <a:pPr algn="ctr" indent="0" marL="0">
+              <a:buNone/>
+            </a:pPr>
+            <a:r>
+              <a:rPr lang="en-US" sz="1500" dirty="0">
+                <a:solidFill>
+                  <a:srgbClr val="334155"/>
+                </a:solidFill>
+                <a:latin typeface="Yu Gothic" pitchFamily="34" charset="0"/>
+                <a:ea typeface="Yu Gothic" pitchFamily="34" charset="-122"/>
+                <a:cs typeface="Yu Gothic" pitchFamily="34" charset="-120"/>
+              </a:rPr>
+              <a:t>デモや一部業務での検証で、使えるかを確かめる</a:t>
+            </a:r>
+            <a:endParaRPr lang="en-US" sz="1500" dirty="0"/>
+          </a:p>
+        </p:txBody>
+      </p:sp>
+      <p:sp>
+        <p:nvSpPr>
+          <p:cNvPr id="23" name="Shape 20"/>
+          <p:cNvSpPr/>
+          <p:nvPr/>
+        </p:nvSpPr>
+        <p:spPr>
+          <a:xfrm>
+            <a:off x="1216152" y="4434840"/>
+            <a:ext cx="9820656" cy="1325880"/>
+          </a:xfrm>
+          <a:prstGeom prst="rect">
+            <a:avLst/>
+          </a:prstGeom>
+          <a:solidFill>
+            <a:srgbClr val="FFF7ED"/>
+          </a:solidFill>
+          <a:ln w="12700">
+            <a:solidFill>
+              <a:srgbClr val="EB6311"/>
+            </a:solidFill>
+            <a:prstDash val="solid"/>
+          </a:ln>
+        </p:spPr>
+      </p:sp>
+      <p:sp>
+        <p:nvSpPr>
+          <p:cNvPr id="24" name="Text 21"/>
+          <p:cNvSpPr/>
+          <p:nvPr/>
+        </p:nvSpPr>
+        <p:spPr>
+          <a:xfrm>
+            <a:off x="1536192" y="4434840"/>
+            <a:ext cx="2560320" cy="1325880"/>
+          </a:xfrm>
+          <a:prstGeom prst="rect">
+            <a:avLst/>
+          </a:prstGeom>
+          <a:noFill/>
+          <a:ln/>
+        </p:spPr>
+        <p:txBody>
+          <a:bodyPr wrap="square" lIns="0" tIns="0" rIns="0" bIns="0" rtlCol="0" anchor="ctr"/>
+          <a:lstStyle/>
+          <a:p>
+            <a:pPr indent="0" marL="0">
+              <a:buNone/>
+            </a:pPr>
+            <a:r>
+              <a:rPr lang="en-US" sz="1800" b="1" dirty="0">
+                <a:solidFill>
+                  <a:srgbClr val="EB6311"/>
+                </a:solidFill>
+                <a:latin typeface="Yu Gothic" pitchFamily="34" charset="0"/>
+                <a:ea typeface="Yu Gothic" pitchFamily="34" charset="-122"/>
+                <a:cs typeface="Yu Gothic" pitchFamily="34" charset="-120"/>
+              </a:rPr>
+              <a:t>本日決めたいこと</a:t>
+            </a:r>
+            <a:endParaRPr lang="en-US" sz="1800" dirty="0"/>
+          </a:p>
+        </p:txBody>
+      </p:sp>
+      <p:sp>
+        <p:nvSpPr>
+          <p:cNvPr id="25" name="Text 22"/>
+          <p:cNvSpPr/>
+          <p:nvPr/>
+        </p:nvSpPr>
+        <p:spPr>
+          <a:xfrm>
+            <a:off x="4142232" y="4434840"/>
+            <a:ext cx="6620256" cy="1325880"/>
+          </a:xfrm>
+          <a:prstGeom prst="rect">
+            <a:avLst/>
+          </a:prstGeom>
+          <a:noFill/>
+          <a:ln/>
+        </p:spPr>
+        <p:txBody>
+          <a:bodyPr wrap="square" lIns="0" tIns="0" rIns="0" bIns="0" rtlCol="0" anchor="ctr"/>
+          <a:lstStyle/>
+          <a:p>
+            <a:pPr marL="342900" indent="-342900">
+              <a:spcAft>
+                <a:spcPts val="600"/>
+              </a:spcAft>
+              <a:buSzPct val="100000"/>
+              <a:buChar char="•"/>
+            </a:pPr>
+            <a:r>
+              <a:rPr lang="en-US" sz="1800" dirty="0">
+                <a:solidFill>
+                  <a:srgbClr val="002060"/>
+                </a:solidFill>
+                <a:latin typeface="Yu Gothic" pitchFamily="34" charset="0"/>
+                <a:ea typeface="Yu Gothic" pitchFamily="34" charset="-122"/>
+                <a:cs typeface="Yu Gothic" pitchFamily="34" charset="-120"/>
+              </a:rPr>
+              <a:t>次回、詳しく確認するテーマ</a:t>
+            </a:r>
+            <a:endParaRPr lang="en-US" sz="1800" dirty="0"/>
+          </a:p>
+          <a:p>
+            <a:pPr marL="342900" indent="-342900">
+              <a:spcAft>
+                <a:spcPts val="600"/>
+              </a:spcAft>
+              <a:buSzPct val="100000"/>
+              <a:buChar char="•"/>
+            </a:pPr>
+            <a:r>
+              <a:rPr lang="en-US" sz="1800" dirty="0">
+                <a:solidFill>
+                  <a:srgbClr val="002060"/>
+                </a:solidFill>
+                <a:latin typeface="Yu Gothic" pitchFamily="34" charset="0"/>
+                <a:ea typeface="Yu Gothic" pitchFamily="34" charset="-122"/>
+                <a:cs typeface="Yu Gothic" pitchFamily="34" charset="-120"/>
+              </a:rPr>
+              <a:t>次回の日程と、ご同席いただく方（実務ご担当者様など）</a:t>
+            </a:r>
+            <a:endParaRPr lang="en-US" sz="1800" dirty="0"/>
+          </a:p>
+        </p:txBody>
+      </p:sp>
+    </p:spTree>
+  </p:cSld>
+  <p:clrMapOvr>
+    <a:masterClrMapping/>
+  </p:clrMapOvr>
+</p:sld>
+</file>
+
+<file path=ppt/slides/slide11.xml><?xml version="1.0" encoding="utf-8"?>
+<p:sld xmlns:a="http://schemas.openxmlformats.org/drawingml/2006/main" xmlns:r="http://schemas.openxmlformats.org/officeDocument/2006/relationships" xmlns:p="http://schemas.openxmlformats.org/presentationml/2006/main">
+  <p:cSld name="Slide 11">
+    <p:bg>
+      <p:bgPr>
+        <a:solidFill>
+          <a:srgbClr val="FFFFFF"/>
+        </a:solidFill>
+      </p:bgPr>
+    </p:bg>
+    <p:spTree>
+      <p:nvGrpSpPr>
+        <p:cNvPr id="1" name=""/>
+        <p:cNvGrpSpPr/>
+        <p:nvPr/>
+      </p:nvGrpSpPr>
+      <p:grpSpPr>
+        <a:xfrm>
+          <a:off x="0" y="0"/>
+          <a:ext cx="0" cy="0"/>
+          <a:chOff x="0" y="0"/>
+          <a:chExt cx="0" cy="0"/>
+        </a:xfrm>
+      </p:grpSpPr>
+      <p:pic>
+        <p:nvPicPr>
+          <p:cNvPr id="2" name="Image 0" descr="/home/user/-/tak-evac/src/assets/bg_cover.png">    </p:cNvPr>
+          <p:cNvPicPr>
+            <a:picLocks noChangeAspect="1"/>
+          </p:cNvPicPr>
+          <p:nvPr/>
+        </p:nvPicPr>
+        <p:blipFill>
+          <a:blip r:embed="rId1"/>
+          <a:stretch>
+            <a:fillRect/>
+          </a:stretch>
+        </p:blipFill>
+        <p:spPr>
+          <a:xfrm>
+            <a:off x="0" y="0"/>
+            <a:ext cx="12191695" cy="6858000"/>
+          </a:xfrm>
+          <a:prstGeom prst="rect">
+            <a:avLst/>
+          </a:prstGeom>
+        </p:spPr>
+      </p:pic>
+      <p:sp>
+        <p:nvSpPr>
+          <p:cNvPr id="3" name="Text 0"/>
+          <p:cNvSpPr/>
+          <p:nvPr/>
+        </p:nvSpPr>
+        <p:spPr>
+          <a:xfrm>
+            <a:off x="457200" y="2377440"/>
+            <a:ext cx="11277295" cy="2103120"/>
+          </a:xfrm>
+          <a:prstGeom prst="rect">
+            <a:avLst/>
+          </a:prstGeom>
+          <a:noFill/>
+          <a:ln/>
+        </p:spPr>
+        <p:txBody>
+          <a:bodyPr wrap="square" lIns="0" tIns="0" rIns="0" bIns="0" rtlCol="0" anchor="ctr"/>
+          <a:lstStyle/>
+          <a:p>
+            <a:pPr algn="ctr" indent="0" marL="0">
+              <a:buNone/>
+            </a:pPr>
+            <a:r>
+              <a:rPr lang="en-US" sz="12000" b="1" dirty="0">
+                <a:solidFill>
+                  <a:srgbClr val="002060"/>
+                </a:solidFill>
+                <a:latin typeface="Yu Gothic" pitchFamily="34" charset="0"/>
+                <a:ea typeface="Yu Gothic" pitchFamily="34" charset="-122"/>
+                <a:cs typeface="Yu Gothic" pitchFamily="34" charset="-120"/>
+              </a:rPr>
+              <a:t>thank you!</a:t>
+            </a:r>
+            <a:endParaRPr lang="en-US" sz="12000" dirty="0"/>
+          </a:p>
+        </p:txBody>
+      </p:sp>
+      <p:sp>
+        <p:nvSpPr>
+          <p:cNvPr id="4" name="Text 1"/>
+          <p:cNvSpPr/>
+          <p:nvPr/>
+        </p:nvSpPr>
+        <p:spPr>
+          <a:xfrm>
+            <a:off x="457200" y="4663440"/>
+            <a:ext cx="11277295" cy="548640"/>
+          </a:xfrm>
+          <a:prstGeom prst="rect">
+            <a:avLst/>
+          </a:prstGeom>
+          <a:noFill/>
+          <a:ln/>
+        </p:spPr>
+        <p:txBody>
+          <a:bodyPr wrap="square" lIns="0" tIns="0" rIns="0" bIns="0" rtlCol="0" anchor="ctr"/>
+          <a:lstStyle/>
+          <a:p>
+            <a:pPr algn="ctr" indent="0" marL="0">
+              <a:buNone/>
+            </a:pPr>
+            <a:r>
+              <a:rPr lang="en-US" sz="2200" b="1" dirty="0">
+                <a:solidFill>
+                  <a:srgbClr val="002060"/>
+                </a:solidFill>
+                <a:latin typeface="Yu Gothic" pitchFamily="34" charset="0"/>
+                <a:ea typeface="Yu Gothic" pitchFamily="34" charset="-122"/>
+                <a:cs typeface="Yu Gothic" pitchFamily="34" charset="-120"/>
+              </a:rPr>
+              <a:t>thomas株式会社　宮川 晋之介</a:t>
+            </a:r>
+            <a:endParaRPr lang="en-US" sz="2200" dirty="0"/>
           </a:p>
         </p:txBody>
       </p:sp>
@@ -1921,7 +3198,7 @@
                 <a:ea typeface="Yu Gothic" pitchFamily="34" charset="-122"/>
                 <a:cs typeface="Yu Gothic" pitchFamily="34" charset="-120"/>
               </a:rPr>
-              <a:t>調達業務・定型業務の現状とお困りごとを伺い、弊社がお手伝いできる点を一緒に整理する</a:t>
+              <a:t>現場の知恵の残し方と、調達業務・定型業務のお困りごとを伺い、お手伝いできる点を一緒に整理する</a:t>
             </a:r>
             <a:endParaRPr lang="en-US" sz="2200" dirty="0"/>
           </a:p>
@@ -2120,7 +3397,7 @@
                 <a:ea typeface="Yu Gothic" pitchFamily="34" charset="-122"/>
                 <a:cs typeface="Yu Gothic" pitchFamily="34" charset="-120"/>
               </a:rPr>
-              <a:t>5分</a:t>
+              <a:t>10分</a:t>
             </a:r>
             <a:endParaRPr lang="en-US" sz="2000" dirty="0"/>
           </a:p>
@@ -2137,7 +3414,7 @@
                 <a:ea typeface="Yu Gothic" pitchFamily="34" charset="-122"/>
                 <a:cs typeface="Yu Gothic" pitchFamily="34" charset="-120"/>
               </a:rPr>
-              <a:t>ご挨拶・本日の目的</a:t>
+              <a:t>ご挨拶・ご紹介</a:t>
             </a:r>
             <a:endParaRPr lang="en-US" sz="2000" dirty="0"/>
           </a:p>
@@ -2213,7 +3490,7 @@
                 <a:ea typeface="Yu Gothic" pitchFamily="34" charset="-122"/>
                 <a:cs typeface="Yu Gothic" pitchFamily="34" charset="-120"/>
               </a:rPr>
-              <a:t>thomasのご紹介</a:t>
+              <a:t>ナレッジベース</a:t>
             </a:r>
             <a:endParaRPr lang="en-US" sz="2000" dirty="0"/>
           </a:p>
@@ -2272,7 +3549,7 @@
                 <a:ea typeface="Yu Gothic" pitchFamily="34" charset="-122"/>
                 <a:cs typeface="Yu Gothic" pitchFamily="34" charset="-120"/>
               </a:rPr>
-              <a:t>30分</a:t>
+              <a:t>25分</a:t>
             </a:r>
             <a:endParaRPr lang="en-US" sz="2000" dirty="0"/>
           </a:p>
@@ -3077,7 +4354,7 @@
                 <a:ea typeface="Yu Gothic" pitchFamily="34" charset="-122"/>
                 <a:cs typeface="Yu Gothic" pitchFamily="34" charset="-120"/>
               </a:rPr>
-              <a:t>業務自動化（RPA）</a:t>
+              <a:t>議事録AI</a:t>
             </a:r>
             <a:endParaRPr lang="en-US" sz="1600" dirty="0"/>
           </a:p>
@@ -3094,7 +4371,7 @@
                 <a:ea typeface="Yu Gothic" pitchFamily="34" charset="-122"/>
                 <a:cs typeface="Yu Gothic" pitchFamily="34" charset="-120"/>
               </a:rPr>
-              <a:t>繰り返しのパソコン作業をロボットが代行</a:t>
+              <a:t>会議・通話の文字起こしと要約を自動化</a:t>
             </a:r>
             <a:endParaRPr lang="en-US" sz="1600" dirty="0"/>
           </a:p>
@@ -3153,7 +4430,7 @@
                 <a:ea typeface="Yu Gothic" pitchFamily="34" charset="-122"/>
                 <a:cs typeface="Yu Gothic" pitchFamily="34" charset="-120"/>
               </a:rPr>
-              <a:t>議事録AI</a:t>
+              <a:t>AIデータ統合・ダッシュボード</a:t>
             </a:r>
             <a:endParaRPr lang="en-US" sz="1600" dirty="0"/>
           </a:p>
@@ -3170,7 +4447,7 @@
                 <a:ea typeface="Yu Gothic" pitchFamily="34" charset="-122"/>
                 <a:cs typeface="Yu Gothic" pitchFamily="34" charset="-120"/>
               </a:rPr>
-              <a:t>会議・通話の文字起こしと要約を自動化</a:t>
+              <a:t>散らばったデータを整理し、AIで活用</a:t>
             </a:r>
             <a:endParaRPr lang="en-US" sz="1600" dirty="0"/>
           </a:p>
@@ -3229,7 +4506,7 @@
                 <a:ea typeface="Yu Gothic" pitchFamily="34" charset="-122"/>
                 <a:cs typeface="Yu Gothic" pitchFamily="34" charset="-120"/>
               </a:rPr>
-              <a:t>与信管理DX</a:t>
+              <a:t>業務自動化（RPA）</a:t>
             </a:r>
             <a:endParaRPr lang="en-US" sz="1600" dirty="0"/>
           </a:p>
@@ -3246,7 +4523,7 @@
                 <a:ea typeface="Yu Gothic" pitchFamily="34" charset="-122"/>
                 <a:cs typeface="Yu Gothic" pitchFamily="34" charset="-120"/>
               </a:rPr>
-              <a:t>取引先の与信情報を定期取得し、変化を通知</a:t>
+              <a:t>繰り返しのパソコン作業をロボットが代行</a:t>
             </a:r>
             <a:endParaRPr lang="en-US" sz="1600" dirty="0"/>
           </a:p>
@@ -3305,7 +4582,7 @@
                 <a:ea typeface="Yu Gothic" pitchFamily="34" charset="-122"/>
                 <a:cs typeface="Yu Gothic" pitchFamily="34" charset="-120"/>
               </a:rPr>
-              <a:t>Smart CRM</a:t>
+              <a:t>与信管理DX</a:t>
             </a:r>
             <a:endParaRPr lang="en-US" sz="1600" dirty="0"/>
           </a:p>
@@ -3322,7 +4599,7 @@
                 <a:ea typeface="Yu Gothic" pitchFamily="34" charset="-122"/>
                 <a:cs typeface="Yu Gothic" pitchFamily="34" charset="-120"/>
               </a:rPr>
-              <a:t>Salesforceを基盤にした顧客・案件管理</a:t>
+              <a:t>取引先の与信情報を定期取得し、変化を通知</a:t>
             </a:r>
             <a:endParaRPr lang="en-US" sz="1600" dirty="0"/>
           </a:p>
@@ -3381,7 +4658,7 @@
                 <a:ea typeface="Yu Gothic" pitchFamily="34" charset="-122"/>
                 <a:cs typeface="Yu Gothic" pitchFamily="34" charset="-120"/>
               </a:rPr>
-              <a:t>AIデータ統合・ダッシュボード</a:t>
+              <a:t>Smart CRM</a:t>
             </a:r>
             <a:endParaRPr lang="en-US" sz="1600" dirty="0"/>
           </a:p>
@@ -3398,7 +4675,7 @@
                 <a:ea typeface="Yu Gothic" pitchFamily="34" charset="-122"/>
                 <a:cs typeface="Yu Gothic" pitchFamily="34" charset="-120"/>
               </a:rPr>
-              <a:t>散らばったデータを整理し、見える化</a:t>
+              <a:t>Salesforceを基盤にした顧客・案件管理</a:t>
             </a:r>
             <a:endParaRPr lang="en-US" sz="1600" dirty="0"/>
           </a:p>
@@ -3545,7 +4822,7 @@
                 <a:ea typeface="Yu Gothic" pitchFamily="34" charset="-122"/>
                 <a:cs typeface="Yu Gothic" pitchFamily="34" charset="-120"/>
               </a:rPr>
-              <a:t>調達業務で手間が生まれやすいところ</a:t>
+              <a:t>ベテランの判断や段取りは、どこに残っていますか</a:t>
             </a:r>
             <a:endParaRPr lang="en-US" sz="2800" dirty="0"/>
           </a:p>
@@ -3607,7 +4884,7 @@
                 <a:ea typeface="Yu Gothic" pitchFamily="34" charset="-122"/>
                 <a:cs typeface="Yu Gothic" pitchFamily="34" charset="-120"/>
               </a:rPr>
-              <a:t>設備工事業で一般的に見られる例です。貴社の実際のご状況を本日お伺いさせてください</a:t>
+              <a:t>建設・設備のお客様から、よく伺うお話です</a:t>
             </a:r>
             <a:endParaRPr lang="en-US" sz="1500" dirty="0"/>
           </a:p>
@@ -3645,18 +4922,21 @@
         </p:nvSpPr>
         <p:spPr>
           <a:xfrm>
-            <a:off x="1216152" y="1783080"/>
-            <a:ext cx="1730045" cy="1051560"/>
-          </a:xfrm>
-          <a:prstGeom prst="roundRect">
-            <a:avLst>
-              <a:gd name="adj" fmla="val 6957"/>
-            </a:avLst>
+            <a:off x="1216152" y="1691640"/>
+            <a:ext cx="4206240" cy="3154680"/>
+          </a:xfrm>
+          <a:prstGeom prst="rect">
+            <a:avLst/>
           </a:prstGeom>
           <a:solidFill>
-            <a:srgbClr val="002060"/>
+            <a:srgbClr val="F8FAFC"/>
           </a:solidFill>
-          <a:ln/>
+          <a:ln w="12700">
+            <a:solidFill>
+              <a:srgbClr val="64748B"/>
+            </a:solidFill>
+            <a:prstDash val="dash"/>
+          </a:ln>
         </p:spPr>
       </p:sp>
       <p:sp>
@@ -3667,8 +4947,8 @@
         </p:nvSpPr>
         <p:spPr>
           <a:xfrm>
-            <a:off x="1216152" y="1783080"/>
-            <a:ext cx="1730045" cy="1051560"/>
+            <a:off x="1216152" y="1691640"/>
+            <a:ext cx="4206240" cy="3154680"/>
           </a:xfrm>
           <a:prstGeom prst="rect">
             <a:avLst/>
@@ -3684,34 +4964,17 @@
               <a:buNone/>
             </a:pPr>
             <a:r>
-              <a:rPr lang="en-US" sz="1700" b="1" dirty="0">
-                <a:solidFill>
-                  <a:srgbClr val="FFFFFF"/>
-                </a:solidFill>
-                <a:latin typeface="Yu Gothic" pitchFamily="34" charset="0"/>
-                <a:ea typeface="Yu Gothic" pitchFamily="34" charset="-122"/>
-                <a:cs typeface="Yu Gothic" pitchFamily="34" charset="-120"/>
-              </a:rPr>
-              <a:t>業者選定・</a:t>
-            </a:r>
-            <a:endParaRPr lang="en-US" sz="1700" dirty="0"/>
-          </a:p>
-          <a:p>
-            <a:pPr algn="ctr" indent="0" marL="0">
-              <a:buNone/>
-            </a:pPr>
-            <a:r>
-              <a:rPr lang="en-US" sz="1700" b="1" dirty="0">
-                <a:solidFill>
-                  <a:srgbClr val="FFFFFF"/>
-                </a:solidFill>
-                <a:latin typeface="Yu Gothic" pitchFamily="34" charset="0"/>
-                <a:ea typeface="Yu Gothic" pitchFamily="34" charset="-122"/>
-                <a:cs typeface="Yu Gothic" pitchFamily="34" charset="-120"/>
-              </a:rPr>
-              <a:t>見積依頼</a:t>
-            </a:r>
-            <a:endParaRPr lang="en-US" sz="1700" dirty="0"/>
+              <a:rPr lang="en-US" sz="1400" dirty="0">
+                <a:solidFill>
+                  <a:srgbClr val="64748B"/>
+                </a:solidFill>
+                <a:latin typeface="Yu Gothic" pitchFamily="34" charset="0"/>
+                <a:ea typeface="Yu Gothic" pitchFamily="34" charset="-122"/>
+                <a:cs typeface="Yu Gothic" pitchFamily="34" charset="-120"/>
+              </a:rPr>
+              <a:t>IMG-01（イラスト作成待ち）</a:t>
+            </a:r>
+            <a:endParaRPr lang="en-US" sz="1400" dirty="0"/>
           </a:p>
         </p:txBody>
       </p:sp>
@@ -3723,28 +4986,8 @@
         </p:nvSpPr>
         <p:spPr>
           <a:xfrm>
-            <a:off x="2991917" y="2180844"/>
-            <a:ext cx="201168" cy="256032"/>
-          </a:xfrm>
-          <a:prstGeom prst="rightArrow">
-            <a:avLst/>
-          </a:prstGeom>
-          <a:solidFill>
-            <a:srgbClr val="64748B"/>
-          </a:solidFill>
-          <a:ln/>
-        </p:spPr>
-      </p:sp>
-      <p:sp>
-        <p:nvSpPr>
-          <p:cNvPr id="9" name="Shape 6"/>
-          <p:cNvSpPr/>
-          <p:nvPr/>
-        </p:nvSpPr>
-        <p:spPr>
-          <a:xfrm>
-            <a:off x="1880006" y="2743200"/>
-            <a:ext cx="402336" cy="402336"/>
+            <a:off x="5742432" y="1911096"/>
+            <a:ext cx="457200" cy="457200"/>
           </a:xfrm>
           <a:prstGeom prst="ellipse">
             <a:avLst/>
@@ -3752,13 +4995,47 @@
           <a:solidFill>
             <a:srgbClr val="EB6311"/>
           </a:solidFill>
-          <a:ln w="19050">
-            <a:solidFill>
-              <a:srgbClr val="FFFFFF"/>
-            </a:solidFill>
-            <a:prstDash val="solid"/>
-          </a:ln>
-        </p:spPr>
+          <a:ln/>
+        </p:spPr>
+      </p:sp>
+      <p:sp>
+        <p:nvSpPr>
+          <p:cNvPr id="9" name="Text 6"/>
+          <p:cNvSpPr/>
+          <p:nvPr/>
+        </p:nvSpPr>
+        <p:spPr>
+          <a:xfrm>
+            <a:off x="5742432" y="1911096"/>
+            <a:ext cx="457200" cy="457200"/>
+          </a:xfrm>
+          <a:prstGeom prst="rect">
+            <a:avLst/>
+          </a:prstGeom>
+          <a:noFill/>
+          <a:ln/>
+        </p:spPr>
+        <p:txBody>
+          <a:bodyPr wrap="square" lIns="0" tIns="0" rIns="0" bIns="0" rtlCol="0" anchor="ctr"/>
+          <a:lstStyle/>
+          <a:p>
+            <a:pPr algn="ctr" indent="0" marL="0">
+              <a:buNone/>
+            </a:pPr>
+            <a:r>
+              <a:rPr lang="en-US" sz="1800" b="1" dirty="0">
+                <a:solidFill>
+                  <a:srgbClr val="FFFFFF"/>
+                </a:solidFill>
+                <a:latin typeface="Yu Gothic" pitchFamily="34" charset="0"/>
+                <a:ea typeface="Yu Gothic" pitchFamily="34" charset="-122"/>
+                <a:cs typeface="Yu Gothic" pitchFamily="34" charset="-120"/>
+              </a:rPr>
+              <a:t>1</a:t>
+            </a:r>
+            <a:endParaRPr lang="en-US" sz="1800" dirty="0"/>
+          </a:p>
+        </p:txBody>
       </p:sp>
       <p:sp>
         <p:nvSpPr>
@@ -3768,8 +5045,8 @@
         </p:nvSpPr>
         <p:spPr>
           <a:xfrm>
-            <a:off x="1880006" y="2743200"/>
-            <a:ext cx="402336" cy="402336"/>
+            <a:off x="6382512" y="1783080"/>
+            <a:ext cx="4654296" cy="731520"/>
           </a:xfrm>
           <a:prstGeom prst="rect">
             <a:avLst/>
@@ -3781,21 +5058,21 @@
           <a:bodyPr wrap="square" lIns="0" tIns="0" rIns="0" bIns="0" rtlCol="0" anchor="ctr"/>
           <a:lstStyle/>
           <a:p>
-            <a:pPr algn="ctr" indent="0" marL="0">
-              <a:buNone/>
-            </a:pPr>
-            <a:r>
-              <a:rPr lang="en-US" sz="1600" b="1" dirty="0">
-                <a:solidFill>
-                  <a:srgbClr val="FFFFFF"/>
-                </a:solidFill>
-                <a:latin typeface="Yu Gothic" pitchFamily="34" charset="0"/>
-                <a:ea typeface="Yu Gothic" pitchFamily="34" charset="-122"/>
-                <a:cs typeface="Yu Gothic" pitchFamily="34" charset="-120"/>
-              </a:rPr>
-              <a:t>1</a:t>
-            </a:r>
-            <a:endParaRPr lang="en-US" sz="1600" dirty="0"/>
+            <a:pPr indent="0" marL="0">
+              <a:buNone/>
+            </a:pPr>
+            <a:r>
+              <a:rPr lang="en-US" sz="1900" dirty="0">
+                <a:solidFill>
+                  <a:srgbClr val="334155"/>
+                </a:solidFill>
+                <a:latin typeface="Yu Gothic" pitchFamily="34" charset="0"/>
+                <a:ea typeface="Yu Gothic" pitchFamily="34" charset="-122"/>
+                <a:cs typeface="Yu Gothic" pitchFamily="34" charset="-120"/>
+              </a:rPr>
+              <a:t>判断の理由や段取りが、ベテランの頭の中にしかない</a:t>
+            </a:r>
+            <a:endParaRPr lang="en-US" sz="1900" dirty="0"/>
           </a:p>
         </p:txBody>
       </p:sp>
@@ -3807,89 +5084,8 @@
         </p:nvSpPr>
         <p:spPr>
           <a:xfrm>
-            <a:off x="3238805" y="1783080"/>
-            <a:ext cx="1730045" cy="1051560"/>
-          </a:xfrm>
-          <a:prstGeom prst="roundRect">
-            <a:avLst>
-              <a:gd name="adj" fmla="val 6957"/>
-            </a:avLst>
-          </a:prstGeom>
-          <a:solidFill>
-            <a:srgbClr val="002060"/>
-          </a:solidFill>
-          <a:ln/>
-        </p:spPr>
-      </p:sp>
-      <p:sp>
-        <p:nvSpPr>
-          <p:cNvPr id="12" name="Text 9"/>
-          <p:cNvSpPr/>
-          <p:nvPr/>
-        </p:nvSpPr>
-        <p:spPr>
-          <a:xfrm>
-            <a:off x="3238805" y="1783080"/>
-            <a:ext cx="1730045" cy="1051560"/>
-          </a:xfrm>
-          <a:prstGeom prst="rect">
-            <a:avLst/>
-          </a:prstGeom>
-          <a:noFill/>
-          <a:ln/>
-        </p:spPr>
-        <p:txBody>
-          <a:bodyPr wrap="square" lIns="0" tIns="0" rIns="0" bIns="0" rtlCol="0" anchor="ctr"/>
-          <a:lstStyle/>
-          <a:p>
-            <a:pPr algn="ctr" indent="0" marL="0">
-              <a:buNone/>
-            </a:pPr>
-            <a:r>
-              <a:rPr lang="en-US" sz="1700" b="1" dirty="0">
-                <a:solidFill>
-                  <a:srgbClr val="FFFFFF"/>
-                </a:solidFill>
-                <a:latin typeface="Yu Gothic" pitchFamily="34" charset="0"/>
-                <a:ea typeface="Yu Gothic" pitchFamily="34" charset="-122"/>
-                <a:cs typeface="Yu Gothic" pitchFamily="34" charset="-120"/>
-              </a:rPr>
-              <a:t>見積比較</a:t>
-            </a:r>
-            <a:endParaRPr lang="en-US" sz="1700" dirty="0"/>
-          </a:p>
-        </p:txBody>
-      </p:sp>
-      <p:sp>
-        <p:nvSpPr>
-          <p:cNvPr id="13" name="Shape 10"/>
-          <p:cNvSpPr/>
-          <p:nvPr/>
-        </p:nvSpPr>
-        <p:spPr>
-          <a:xfrm>
-            <a:off x="5014570" y="2180844"/>
-            <a:ext cx="201168" cy="256032"/>
-          </a:xfrm>
-          <a:prstGeom prst="rightArrow">
-            <a:avLst/>
-          </a:prstGeom>
-          <a:solidFill>
-            <a:srgbClr val="64748B"/>
-          </a:solidFill>
-          <a:ln/>
-        </p:spPr>
-      </p:sp>
-      <p:sp>
-        <p:nvSpPr>
-          <p:cNvPr id="14" name="Shape 11"/>
-          <p:cNvSpPr/>
-          <p:nvPr/>
-        </p:nvSpPr>
-        <p:spPr>
-          <a:xfrm>
-            <a:off x="3902659" y="2743200"/>
-            <a:ext cx="402336" cy="402336"/>
+            <a:off x="5742432" y="2935224"/>
+            <a:ext cx="457200" cy="457200"/>
           </a:xfrm>
           <a:prstGeom prst="ellipse">
             <a:avLst/>
@@ -3897,24 +5093,19 @@
           <a:solidFill>
             <a:srgbClr val="EB6311"/>
           </a:solidFill>
-          <a:ln w="19050">
-            <a:solidFill>
-              <a:srgbClr val="FFFFFF"/>
-            </a:solidFill>
-            <a:prstDash val="solid"/>
-          </a:ln>
-        </p:spPr>
-      </p:sp>
-      <p:sp>
-        <p:nvSpPr>
-          <p:cNvPr id="15" name="Text 12"/>
-          <p:cNvSpPr/>
-          <p:nvPr/>
-        </p:nvSpPr>
-        <p:spPr>
-          <a:xfrm>
-            <a:off x="3902659" y="2743200"/>
-            <a:ext cx="402336" cy="402336"/>
+          <a:ln/>
+        </p:spPr>
+      </p:sp>
+      <p:sp>
+        <p:nvSpPr>
+          <p:cNvPr id="12" name="Text 9"/>
+          <p:cNvSpPr/>
+          <p:nvPr/>
+        </p:nvSpPr>
+        <p:spPr>
+          <a:xfrm>
+            <a:off x="5742432" y="2935224"/>
+            <a:ext cx="457200" cy="457200"/>
           </a:xfrm>
           <a:prstGeom prst="rect">
             <a:avLst/>
@@ -3930,7 +5121,7 @@
               <a:buNone/>
             </a:pPr>
             <a:r>
-              <a:rPr lang="en-US" sz="1600" b="1" dirty="0">
+              <a:rPr lang="en-US" sz="1800" b="1" dirty="0">
                 <a:solidFill>
                   <a:srgbClr val="FFFFFF"/>
                 </a:solidFill>
@@ -3940,42 +5131,20 @@
               </a:rPr>
               <a:t>2</a:t>
             </a:r>
-            <a:endParaRPr lang="en-US" sz="1600" dirty="0"/>
-          </a:p>
-        </p:txBody>
-      </p:sp>
-      <p:sp>
-        <p:nvSpPr>
-          <p:cNvPr id="16" name="Shape 13"/>
-          <p:cNvSpPr/>
-          <p:nvPr/>
-        </p:nvSpPr>
-        <p:spPr>
-          <a:xfrm>
-            <a:off x="5261458" y="1783080"/>
-            <a:ext cx="1730045" cy="1051560"/>
-          </a:xfrm>
-          <a:prstGeom prst="roundRect">
-            <a:avLst>
-              <a:gd name="adj" fmla="val 6957"/>
-            </a:avLst>
-          </a:prstGeom>
-          <a:solidFill>
-            <a:srgbClr val="002060"/>
-          </a:solidFill>
-          <a:ln/>
-        </p:spPr>
-      </p:sp>
-      <p:sp>
-        <p:nvSpPr>
-          <p:cNvPr id="17" name="Text 14"/>
-          <p:cNvSpPr/>
-          <p:nvPr/>
-        </p:nvSpPr>
-        <p:spPr>
-          <a:xfrm>
-            <a:off x="5261458" y="1783080"/>
-            <a:ext cx="1730045" cy="1051560"/>
+            <a:endParaRPr lang="en-US" sz="1800" dirty="0"/>
+          </a:p>
+        </p:txBody>
+      </p:sp>
+      <p:sp>
+        <p:nvSpPr>
+          <p:cNvPr id="13" name="Text 10"/>
+          <p:cNvSpPr/>
+          <p:nvPr/>
+        </p:nvSpPr>
+        <p:spPr>
+          <a:xfrm>
+            <a:off x="6382512" y="2807208"/>
+            <a:ext cx="4654296" cy="731520"/>
           </a:xfrm>
           <a:prstGeom prst="rect">
             <a:avLst/>
@@ -3987,54 +5156,34 @@
           <a:bodyPr wrap="square" lIns="0" tIns="0" rIns="0" bIns="0" rtlCol="0" anchor="ctr"/>
           <a:lstStyle/>
           <a:p>
-            <a:pPr algn="ctr" indent="0" marL="0">
-              <a:buNone/>
-            </a:pPr>
-            <a:r>
-              <a:rPr lang="en-US" sz="1700" b="1" dirty="0">
-                <a:solidFill>
-                  <a:srgbClr val="FFFFFF"/>
-                </a:solidFill>
-                <a:latin typeface="Yu Gothic" pitchFamily="34" charset="0"/>
-                <a:ea typeface="Yu Gothic" pitchFamily="34" charset="-122"/>
-                <a:cs typeface="Yu Gothic" pitchFamily="34" charset="-120"/>
-              </a:rPr>
-              <a:t>発注</a:t>
-            </a:r>
-            <a:endParaRPr lang="en-US" sz="1700" dirty="0"/>
-          </a:p>
-        </p:txBody>
-      </p:sp>
-      <p:sp>
-        <p:nvSpPr>
-          <p:cNvPr id="18" name="Shape 15"/>
-          <p:cNvSpPr/>
-          <p:nvPr/>
-        </p:nvSpPr>
-        <p:spPr>
-          <a:xfrm>
-            <a:off x="7037222" y="2180844"/>
-            <a:ext cx="201168" cy="256032"/>
-          </a:xfrm>
-          <a:prstGeom prst="rightArrow">
-            <a:avLst/>
-          </a:prstGeom>
-          <a:solidFill>
-            <a:srgbClr val="64748B"/>
-          </a:solidFill>
-          <a:ln/>
-        </p:spPr>
-      </p:sp>
-      <p:sp>
-        <p:nvSpPr>
-          <p:cNvPr id="19" name="Shape 16"/>
-          <p:cNvSpPr/>
-          <p:nvPr/>
-        </p:nvSpPr>
-        <p:spPr>
-          <a:xfrm>
-            <a:off x="5925312" y="2743200"/>
-            <a:ext cx="402336" cy="402336"/>
+            <a:pPr indent="0" marL="0">
+              <a:buNone/>
+            </a:pPr>
+            <a:r>
+              <a:rPr lang="en-US" sz="1900" dirty="0">
+                <a:solidFill>
+                  <a:srgbClr val="334155"/>
+                </a:solidFill>
+                <a:latin typeface="Yu Gothic" pitchFamily="34" charset="0"/>
+                <a:ea typeface="Yu Gothic" pitchFamily="34" charset="-122"/>
+                <a:cs typeface="Yu Gothic" pitchFamily="34" charset="-120"/>
+              </a:rPr>
+              <a:t>若手からの確認が特定の人に集中し、その方の手が止まる</a:t>
+            </a:r>
+            <a:endParaRPr lang="en-US" sz="1900" dirty="0"/>
+          </a:p>
+        </p:txBody>
+      </p:sp>
+      <p:sp>
+        <p:nvSpPr>
+          <p:cNvPr id="14" name="Shape 11"/>
+          <p:cNvSpPr/>
+          <p:nvPr/>
+        </p:nvSpPr>
+        <p:spPr>
+          <a:xfrm>
+            <a:off x="5742432" y="3959352"/>
+            <a:ext cx="457200" cy="457200"/>
           </a:xfrm>
           <a:prstGeom prst="ellipse">
             <a:avLst/>
@@ -4042,24 +5191,19 @@
           <a:solidFill>
             <a:srgbClr val="EB6311"/>
           </a:solidFill>
-          <a:ln w="19050">
-            <a:solidFill>
-              <a:srgbClr val="FFFFFF"/>
-            </a:solidFill>
-            <a:prstDash val="solid"/>
-          </a:ln>
-        </p:spPr>
-      </p:sp>
-      <p:sp>
-        <p:nvSpPr>
-          <p:cNvPr id="20" name="Text 17"/>
-          <p:cNvSpPr/>
-          <p:nvPr/>
-        </p:nvSpPr>
-        <p:spPr>
-          <a:xfrm>
-            <a:off x="5925312" y="2743200"/>
-            <a:ext cx="402336" cy="402336"/>
+          <a:ln/>
+        </p:spPr>
+      </p:sp>
+      <p:sp>
+        <p:nvSpPr>
+          <p:cNvPr id="15" name="Text 12"/>
+          <p:cNvSpPr/>
+          <p:nvPr/>
+        </p:nvSpPr>
+        <p:spPr>
+          <a:xfrm>
+            <a:off x="5742432" y="3959352"/>
+            <a:ext cx="457200" cy="457200"/>
           </a:xfrm>
           <a:prstGeom prst="rect">
             <a:avLst/>
@@ -4075,7 +5219,7 @@
               <a:buNone/>
             </a:pPr>
             <a:r>
-              <a:rPr lang="en-US" sz="1600" b="1" dirty="0">
+              <a:rPr lang="en-US" sz="1800" b="1" dirty="0">
                 <a:solidFill>
                   <a:srgbClr val="FFFFFF"/>
                 </a:solidFill>
@@ -4085,42 +5229,20 @@
               </a:rPr>
               <a:t>3</a:t>
             </a:r>
-            <a:endParaRPr lang="en-US" sz="1600" dirty="0"/>
-          </a:p>
-        </p:txBody>
-      </p:sp>
-      <p:sp>
-        <p:nvSpPr>
-          <p:cNvPr id="21" name="Shape 18"/>
-          <p:cNvSpPr/>
-          <p:nvPr/>
-        </p:nvSpPr>
-        <p:spPr>
-          <a:xfrm>
-            <a:off x="7284110" y="1783080"/>
-            <a:ext cx="1730045" cy="1051560"/>
-          </a:xfrm>
-          <a:prstGeom prst="roundRect">
-            <a:avLst>
-              <a:gd name="adj" fmla="val 6957"/>
-            </a:avLst>
-          </a:prstGeom>
-          <a:solidFill>
-            <a:srgbClr val="002060"/>
-          </a:solidFill>
-          <a:ln/>
-        </p:spPr>
-      </p:sp>
-      <p:sp>
-        <p:nvSpPr>
-          <p:cNvPr id="22" name="Text 19"/>
-          <p:cNvSpPr/>
-          <p:nvPr/>
-        </p:nvSpPr>
-        <p:spPr>
-          <a:xfrm>
-            <a:off x="7284110" y="1783080"/>
-            <a:ext cx="1730045" cy="1051560"/>
+            <a:endParaRPr lang="en-US" sz="1800" dirty="0"/>
+          </a:p>
+        </p:txBody>
+      </p:sp>
+      <p:sp>
+        <p:nvSpPr>
+          <p:cNvPr id="16" name="Text 13"/>
+          <p:cNvSpPr/>
+          <p:nvPr/>
+        </p:nvSpPr>
+        <p:spPr>
+          <a:xfrm>
+            <a:off x="6382512" y="3831336"/>
+            <a:ext cx="4654296" cy="731520"/>
           </a:xfrm>
           <a:prstGeom prst="rect">
             <a:avLst/>
@@ -4132,604 +5254,50 @@
           <a:bodyPr wrap="square" lIns="0" tIns="0" rIns="0" bIns="0" rtlCol="0" anchor="ctr"/>
           <a:lstStyle/>
           <a:p>
+            <a:pPr indent="0" marL="0">
+              <a:buNone/>
+            </a:pPr>
+            <a:r>
+              <a:rPr lang="en-US" sz="1900" dirty="0">
+                <a:solidFill>
+                  <a:srgbClr val="334155"/>
+                </a:solidFill>
+                <a:latin typeface="Yu Gothic" pitchFamily="34" charset="0"/>
+                <a:ea typeface="Yu Gothic" pitchFamily="34" charset="-122"/>
+                <a:cs typeface="Yu Gothic" pitchFamily="34" charset="-120"/>
+              </a:rPr>
+              <a:t>経験者が異動・退職すると、同じ仕事が回らなくなる</a:t>
+            </a:r>
+            <a:endParaRPr lang="en-US" sz="1900" dirty="0"/>
+          </a:p>
+        </p:txBody>
+      </p:sp>
+      <p:sp>
+        <p:nvSpPr>
+          <p:cNvPr id="17" name="Text 14"/>
+          <p:cNvSpPr/>
+          <p:nvPr/>
+        </p:nvSpPr>
+        <p:spPr>
+          <a:xfrm>
+            <a:off x="1216152" y="5166360"/>
+            <a:ext cx="9820656" cy="502920"/>
+          </a:xfrm>
+          <a:prstGeom prst="rect">
+            <a:avLst/>
+          </a:prstGeom>
+          <a:noFill/>
+          <a:ln/>
+        </p:spPr>
+        <p:txBody>
+          <a:bodyPr wrap="square" lIns="0" tIns="0" rIns="0" bIns="0" rtlCol="0" anchor="ctr"/>
+          <a:lstStyle/>
+          <a:p>
             <a:pPr algn="ctr" indent="0" marL="0">
               <a:buNone/>
             </a:pPr>
             <a:r>
-              <a:rPr lang="en-US" sz="1700" b="1" dirty="0">
-                <a:solidFill>
-                  <a:srgbClr val="FFFFFF"/>
-                </a:solidFill>
-                <a:latin typeface="Yu Gothic" pitchFamily="34" charset="0"/>
-                <a:ea typeface="Yu Gothic" pitchFamily="34" charset="-122"/>
-                <a:cs typeface="Yu Gothic" pitchFamily="34" charset="-120"/>
-              </a:rPr>
-              <a:t>納期・</a:t>
-            </a:r>
-            <a:endParaRPr lang="en-US" sz="1700" dirty="0"/>
-          </a:p>
-          <a:p>
-            <a:pPr algn="ctr" indent="0" marL="0">
-              <a:buNone/>
-            </a:pPr>
-            <a:r>
-              <a:rPr lang="en-US" sz="1700" b="1" dirty="0">
-                <a:solidFill>
-                  <a:srgbClr val="FFFFFF"/>
-                </a:solidFill>
-                <a:latin typeface="Yu Gothic" pitchFamily="34" charset="0"/>
-                <a:ea typeface="Yu Gothic" pitchFamily="34" charset="-122"/>
-                <a:cs typeface="Yu Gothic" pitchFamily="34" charset="-120"/>
-              </a:rPr>
-              <a:t>手配状況の管理</a:t>
-            </a:r>
-            <a:endParaRPr lang="en-US" sz="1700" dirty="0"/>
-          </a:p>
-        </p:txBody>
-      </p:sp>
-      <p:sp>
-        <p:nvSpPr>
-          <p:cNvPr id="23" name="Shape 20"/>
-          <p:cNvSpPr/>
-          <p:nvPr/>
-        </p:nvSpPr>
-        <p:spPr>
-          <a:xfrm>
-            <a:off x="9059875" y="2180844"/>
-            <a:ext cx="201168" cy="256032"/>
-          </a:xfrm>
-          <a:prstGeom prst="rightArrow">
-            <a:avLst/>
-          </a:prstGeom>
-          <a:solidFill>
-            <a:srgbClr val="64748B"/>
-          </a:solidFill>
-          <a:ln/>
-        </p:spPr>
-      </p:sp>
-      <p:sp>
-        <p:nvSpPr>
-          <p:cNvPr id="24" name="Shape 21"/>
-          <p:cNvSpPr/>
-          <p:nvPr/>
-        </p:nvSpPr>
-        <p:spPr>
-          <a:xfrm>
-            <a:off x="7947965" y="2743200"/>
-            <a:ext cx="402336" cy="402336"/>
-          </a:xfrm>
-          <a:prstGeom prst="ellipse">
-            <a:avLst/>
-          </a:prstGeom>
-          <a:solidFill>
-            <a:srgbClr val="EB6311"/>
-          </a:solidFill>
-          <a:ln w="19050">
-            <a:solidFill>
-              <a:srgbClr val="FFFFFF"/>
-            </a:solidFill>
-            <a:prstDash val="solid"/>
-          </a:ln>
-        </p:spPr>
-      </p:sp>
-      <p:sp>
-        <p:nvSpPr>
-          <p:cNvPr id="25" name="Text 22"/>
-          <p:cNvSpPr/>
-          <p:nvPr/>
-        </p:nvSpPr>
-        <p:spPr>
-          <a:xfrm>
-            <a:off x="7947965" y="2743200"/>
-            <a:ext cx="402336" cy="402336"/>
-          </a:xfrm>
-          <a:prstGeom prst="rect">
-            <a:avLst/>
-          </a:prstGeom>
-          <a:noFill/>
-          <a:ln/>
-        </p:spPr>
-        <p:txBody>
-          <a:bodyPr wrap="square" lIns="0" tIns="0" rIns="0" bIns="0" rtlCol="0" anchor="ctr"/>
-          <a:lstStyle/>
-          <a:p>
-            <a:pPr algn="ctr" indent="0" marL="0">
-              <a:buNone/>
-            </a:pPr>
-            <a:r>
-              <a:rPr lang="en-US" sz="1600" b="1" dirty="0">
-                <a:solidFill>
-                  <a:srgbClr val="FFFFFF"/>
-                </a:solidFill>
-                <a:latin typeface="Yu Gothic" pitchFamily="34" charset="0"/>
-                <a:ea typeface="Yu Gothic" pitchFamily="34" charset="-122"/>
-                <a:cs typeface="Yu Gothic" pitchFamily="34" charset="-120"/>
-              </a:rPr>
-              <a:t>4</a:t>
-            </a:r>
-            <a:endParaRPr lang="en-US" sz="1600" dirty="0"/>
-          </a:p>
-        </p:txBody>
-      </p:sp>
-      <p:sp>
-        <p:nvSpPr>
-          <p:cNvPr id="26" name="Shape 23"/>
-          <p:cNvSpPr/>
-          <p:nvPr/>
-        </p:nvSpPr>
-        <p:spPr>
-          <a:xfrm>
-            <a:off x="9306763" y="1783080"/>
-            <a:ext cx="1730045" cy="1051560"/>
-          </a:xfrm>
-          <a:prstGeom prst="roundRect">
-            <a:avLst>
-              <a:gd name="adj" fmla="val 6957"/>
-            </a:avLst>
-          </a:prstGeom>
-          <a:solidFill>
-            <a:srgbClr val="002060"/>
-          </a:solidFill>
-          <a:ln/>
-        </p:spPr>
-      </p:sp>
-      <p:sp>
-        <p:nvSpPr>
-          <p:cNvPr id="27" name="Text 24"/>
-          <p:cNvSpPr/>
-          <p:nvPr/>
-        </p:nvSpPr>
-        <p:spPr>
-          <a:xfrm>
-            <a:off x="9306763" y="1783080"/>
-            <a:ext cx="1730045" cy="1051560"/>
-          </a:xfrm>
-          <a:prstGeom prst="rect">
-            <a:avLst/>
-          </a:prstGeom>
-          <a:noFill/>
-          <a:ln/>
-        </p:spPr>
-        <p:txBody>
-          <a:bodyPr wrap="square" lIns="0" tIns="0" rIns="0" bIns="0" rtlCol="0" anchor="ctr"/>
-          <a:lstStyle/>
-          <a:p>
-            <a:pPr algn="ctr" indent="0" marL="0">
-              <a:buNone/>
-            </a:pPr>
-            <a:r>
-              <a:rPr lang="en-US" sz="1700" b="1" dirty="0">
-                <a:solidFill>
-                  <a:srgbClr val="FFFFFF"/>
-                </a:solidFill>
-                <a:latin typeface="Yu Gothic" pitchFamily="34" charset="0"/>
-                <a:ea typeface="Yu Gothic" pitchFamily="34" charset="-122"/>
-                <a:cs typeface="Yu Gothic" pitchFamily="34" charset="-120"/>
-              </a:rPr>
-              <a:t>検収・支払</a:t>
-            </a:r>
-            <a:endParaRPr lang="en-US" sz="1700" dirty="0"/>
-          </a:p>
-        </p:txBody>
-      </p:sp>
-      <p:sp>
-        <p:nvSpPr>
-          <p:cNvPr id="28" name="Shape 25"/>
-          <p:cNvSpPr/>
-          <p:nvPr/>
-        </p:nvSpPr>
-        <p:spPr>
-          <a:xfrm>
-            <a:off x="1216152" y="3547872"/>
-            <a:ext cx="402336" cy="402336"/>
-          </a:xfrm>
-          <a:prstGeom prst="ellipse">
-            <a:avLst/>
-          </a:prstGeom>
-          <a:solidFill>
-            <a:srgbClr val="EB6311"/>
-          </a:solidFill>
-          <a:ln/>
-        </p:spPr>
-      </p:sp>
-      <p:sp>
-        <p:nvSpPr>
-          <p:cNvPr id="29" name="Text 26"/>
-          <p:cNvSpPr/>
-          <p:nvPr/>
-        </p:nvSpPr>
-        <p:spPr>
-          <a:xfrm>
-            <a:off x="1216152" y="3547872"/>
-            <a:ext cx="402336" cy="402336"/>
-          </a:xfrm>
-          <a:prstGeom prst="rect">
-            <a:avLst/>
-          </a:prstGeom>
-          <a:noFill/>
-          <a:ln/>
-        </p:spPr>
-        <p:txBody>
-          <a:bodyPr wrap="square" lIns="0" tIns="0" rIns="0" bIns="0" rtlCol="0" anchor="ctr"/>
-          <a:lstStyle/>
-          <a:p>
-            <a:pPr algn="ctr" indent="0" marL="0">
-              <a:buNone/>
-            </a:pPr>
-            <a:r>
-              <a:rPr lang="en-US" sz="1600" b="1" dirty="0">
-                <a:solidFill>
-                  <a:srgbClr val="FFFFFF"/>
-                </a:solidFill>
-                <a:latin typeface="Yu Gothic" pitchFamily="34" charset="0"/>
-                <a:ea typeface="Yu Gothic" pitchFamily="34" charset="-122"/>
-                <a:cs typeface="Yu Gothic" pitchFamily="34" charset="-120"/>
-              </a:rPr>
-              <a:t>1</a:t>
-            </a:r>
-            <a:endParaRPr lang="en-US" sz="1600" dirty="0"/>
-          </a:p>
-        </p:txBody>
-      </p:sp>
-      <p:sp>
-        <p:nvSpPr>
-          <p:cNvPr id="30" name="Text 27"/>
-          <p:cNvSpPr/>
-          <p:nvPr/>
-        </p:nvSpPr>
-        <p:spPr>
-          <a:xfrm>
-            <a:off x="1764792" y="3429000"/>
-            <a:ext cx="4133088" cy="640080"/>
-          </a:xfrm>
-          <a:prstGeom prst="rect">
-            <a:avLst/>
-          </a:prstGeom>
-          <a:noFill/>
-          <a:ln/>
-        </p:spPr>
-        <p:txBody>
-          <a:bodyPr wrap="square" lIns="0" tIns="0" rIns="0" bIns="0" rtlCol="0" anchor="ctr"/>
-          <a:lstStyle/>
-          <a:p>
-            <a:pPr indent="0" marL="0">
-              <a:buNone/>
-            </a:pPr>
-            <a:r>
-              <a:rPr lang="en-US" sz="1700" dirty="0">
-                <a:solidFill>
-                  <a:srgbClr val="334155"/>
-                </a:solidFill>
-                <a:latin typeface="Yu Gothic" pitchFamily="34" charset="0"/>
-                <a:ea typeface="Yu Gothic" pitchFamily="34" charset="-122"/>
-                <a:cs typeface="Yu Gothic" pitchFamily="34" charset="-120"/>
-              </a:rPr>
-              <a:t>取引先の経営状況の確認が、新規取引時の一度きりになっている</a:t>
-            </a:r>
-            <a:endParaRPr lang="en-US" sz="1700" dirty="0"/>
-          </a:p>
-        </p:txBody>
-      </p:sp>
-      <p:sp>
-        <p:nvSpPr>
-          <p:cNvPr id="31" name="Shape 28"/>
-          <p:cNvSpPr/>
-          <p:nvPr/>
-        </p:nvSpPr>
-        <p:spPr>
-          <a:xfrm>
-            <a:off x="6126480" y="3547872"/>
-            <a:ext cx="402336" cy="402336"/>
-          </a:xfrm>
-          <a:prstGeom prst="ellipse">
-            <a:avLst/>
-          </a:prstGeom>
-          <a:solidFill>
-            <a:srgbClr val="EB6311"/>
-          </a:solidFill>
-          <a:ln/>
-        </p:spPr>
-      </p:sp>
-      <p:sp>
-        <p:nvSpPr>
-          <p:cNvPr id="32" name="Text 29"/>
-          <p:cNvSpPr/>
-          <p:nvPr/>
-        </p:nvSpPr>
-        <p:spPr>
-          <a:xfrm>
-            <a:off x="6126480" y="3547872"/>
-            <a:ext cx="402336" cy="402336"/>
-          </a:xfrm>
-          <a:prstGeom prst="rect">
-            <a:avLst/>
-          </a:prstGeom>
-          <a:noFill/>
-          <a:ln/>
-        </p:spPr>
-        <p:txBody>
-          <a:bodyPr wrap="square" lIns="0" tIns="0" rIns="0" bIns="0" rtlCol="0" anchor="ctr"/>
-          <a:lstStyle/>
-          <a:p>
-            <a:pPr algn="ctr" indent="0" marL="0">
-              <a:buNone/>
-            </a:pPr>
-            <a:r>
-              <a:rPr lang="en-US" sz="1600" b="1" dirty="0">
-                <a:solidFill>
-                  <a:srgbClr val="FFFFFF"/>
-                </a:solidFill>
-                <a:latin typeface="Yu Gothic" pitchFamily="34" charset="0"/>
-                <a:ea typeface="Yu Gothic" pitchFamily="34" charset="-122"/>
-                <a:cs typeface="Yu Gothic" pitchFamily="34" charset="-120"/>
-              </a:rPr>
-              <a:t>2</a:t>
-            </a:r>
-            <a:endParaRPr lang="en-US" sz="1600" dirty="0"/>
-          </a:p>
-        </p:txBody>
-      </p:sp>
-      <p:sp>
-        <p:nvSpPr>
-          <p:cNvPr id="33" name="Text 30"/>
-          <p:cNvSpPr/>
-          <p:nvPr/>
-        </p:nvSpPr>
-        <p:spPr>
-          <a:xfrm>
-            <a:off x="6675120" y="3429000"/>
-            <a:ext cx="4133088" cy="640080"/>
-          </a:xfrm>
-          <a:prstGeom prst="rect">
-            <a:avLst/>
-          </a:prstGeom>
-          <a:noFill/>
-          <a:ln/>
-        </p:spPr>
-        <p:txBody>
-          <a:bodyPr wrap="square" lIns="0" tIns="0" rIns="0" bIns="0" rtlCol="0" anchor="ctr"/>
-          <a:lstStyle/>
-          <a:p>
-            <a:pPr indent="0" marL="0">
-              <a:buNone/>
-            </a:pPr>
-            <a:r>
-              <a:rPr lang="en-US" sz="1700" dirty="0">
-                <a:solidFill>
-                  <a:srgbClr val="334155"/>
-                </a:solidFill>
-                <a:latin typeface="Yu Gothic" pitchFamily="34" charset="0"/>
-                <a:ea typeface="Yu Gothic" pitchFamily="34" charset="-122"/>
-                <a:cs typeface="Yu Gothic" pitchFamily="34" charset="-120"/>
-              </a:rPr>
-              <a:t>複数業者の見積（PDF・紙・Excel）を、比較表へ手で転記している</a:t>
-            </a:r>
-            <a:endParaRPr lang="en-US" sz="1700" dirty="0"/>
-          </a:p>
-        </p:txBody>
-      </p:sp>
-      <p:sp>
-        <p:nvSpPr>
-          <p:cNvPr id="34" name="Shape 31"/>
-          <p:cNvSpPr/>
-          <p:nvPr/>
-        </p:nvSpPr>
-        <p:spPr>
-          <a:xfrm>
-            <a:off x="1216152" y="4462272"/>
-            <a:ext cx="402336" cy="402336"/>
-          </a:xfrm>
-          <a:prstGeom prst="ellipse">
-            <a:avLst/>
-          </a:prstGeom>
-          <a:solidFill>
-            <a:srgbClr val="EB6311"/>
-          </a:solidFill>
-          <a:ln/>
-        </p:spPr>
-      </p:sp>
-      <p:sp>
-        <p:nvSpPr>
-          <p:cNvPr id="35" name="Text 32"/>
-          <p:cNvSpPr/>
-          <p:nvPr/>
-        </p:nvSpPr>
-        <p:spPr>
-          <a:xfrm>
-            <a:off x="1216152" y="4462272"/>
-            <a:ext cx="402336" cy="402336"/>
-          </a:xfrm>
-          <a:prstGeom prst="rect">
-            <a:avLst/>
-          </a:prstGeom>
-          <a:noFill/>
-          <a:ln/>
-        </p:spPr>
-        <p:txBody>
-          <a:bodyPr wrap="square" lIns="0" tIns="0" rIns="0" bIns="0" rtlCol="0" anchor="ctr"/>
-          <a:lstStyle/>
-          <a:p>
-            <a:pPr algn="ctr" indent="0" marL="0">
-              <a:buNone/>
-            </a:pPr>
-            <a:r>
-              <a:rPr lang="en-US" sz="1600" b="1" dirty="0">
-                <a:solidFill>
-                  <a:srgbClr val="FFFFFF"/>
-                </a:solidFill>
-                <a:latin typeface="Yu Gothic" pitchFamily="34" charset="0"/>
-                <a:ea typeface="Yu Gothic" pitchFamily="34" charset="-122"/>
-                <a:cs typeface="Yu Gothic" pitchFamily="34" charset="-120"/>
-              </a:rPr>
-              <a:t>3</a:t>
-            </a:r>
-            <a:endParaRPr lang="en-US" sz="1600" dirty="0"/>
-          </a:p>
-        </p:txBody>
-      </p:sp>
-      <p:sp>
-        <p:nvSpPr>
-          <p:cNvPr id="36" name="Text 33"/>
-          <p:cNvSpPr/>
-          <p:nvPr/>
-        </p:nvSpPr>
-        <p:spPr>
-          <a:xfrm>
-            <a:off x="1764792" y="4343400"/>
-            <a:ext cx="4133088" cy="640080"/>
-          </a:xfrm>
-          <a:prstGeom prst="rect">
-            <a:avLst/>
-          </a:prstGeom>
-          <a:noFill/>
-          <a:ln/>
-        </p:spPr>
-        <p:txBody>
-          <a:bodyPr wrap="square" lIns="0" tIns="0" rIns="0" bIns="0" rtlCol="0" anchor="ctr"/>
-          <a:lstStyle/>
-          <a:p>
-            <a:pPr indent="0" marL="0">
-              <a:buNone/>
-            </a:pPr>
-            <a:r>
-              <a:rPr lang="en-US" sz="1700" dirty="0">
-                <a:solidFill>
-                  <a:srgbClr val="334155"/>
-                </a:solidFill>
-                <a:latin typeface="Yu Gothic" pitchFamily="34" charset="0"/>
-                <a:ea typeface="Yu Gothic" pitchFamily="34" charset="-122"/>
-                <a:cs typeface="Yu Gothic" pitchFamily="34" charset="-120"/>
-              </a:rPr>
-              <a:t>発注書を作り、基幹システムにも同じ内容を入力している</a:t>
-            </a:r>
-            <a:endParaRPr lang="en-US" sz="1700" dirty="0"/>
-          </a:p>
-        </p:txBody>
-      </p:sp>
-      <p:sp>
-        <p:nvSpPr>
-          <p:cNvPr id="37" name="Shape 34"/>
-          <p:cNvSpPr/>
-          <p:nvPr/>
-        </p:nvSpPr>
-        <p:spPr>
-          <a:xfrm>
-            <a:off x="6126480" y="4462272"/>
-            <a:ext cx="402336" cy="402336"/>
-          </a:xfrm>
-          <a:prstGeom prst="ellipse">
-            <a:avLst/>
-          </a:prstGeom>
-          <a:solidFill>
-            <a:srgbClr val="EB6311"/>
-          </a:solidFill>
-          <a:ln/>
-        </p:spPr>
-      </p:sp>
-      <p:sp>
-        <p:nvSpPr>
-          <p:cNvPr id="38" name="Text 35"/>
-          <p:cNvSpPr/>
-          <p:nvPr/>
-        </p:nvSpPr>
-        <p:spPr>
-          <a:xfrm>
-            <a:off x="6126480" y="4462272"/>
-            <a:ext cx="402336" cy="402336"/>
-          </a:xfrm>
-          <a:prstGeom prst="rect">
-            <a:avLst/>
-          </a:prstGeom>
-          <a:noFill/>
-          <a:ln/>
-        </p:spPr>
-        <p:txBody>
-          <a:bodyPr wrap="square" lIns="0" tIns="0" rIns="0" bIns="0" rtlCol="0" anchor="ctr"/>
-          <a:lstStyle/>
-          <a:p>
-            <a:pPr algn="ctr" indent="0" marL="0">
-              <a:buNone/>
-            </a:pPr>
-            <a:r>
-              <a:rPr lang="en-US" sz="1600" b="1" dirty="0">
-                <a:solidFill>
-                  <a:srgbClr val="FFFFFF"/>
-                </a:solidFill>
-                <a:latin typeface="Yu Gothic" pitchFamily="34" charset="0"/>
-                <a:ea typeface="Yu Gothic" pitchFamily="34" charset="-122"/>
-                <a:cs typeface="Yu Gothic" pitchFamily="34" charset="-120"/>
-              </a:rPr>
-              <a:t>4</a:t>
-            </a:r>
-            <a:endParaRPr lang="en-US" sz="1600" dirty="0"/>
-          </a:p>
-        </p:txBody>
-      </p:sp>
-      <p:sp>
-        <p:nvSpPr>
-          <p:cNvPr id="39" name="Text 36"/>
-          <p:cNvSpPr/>
-          <p:nvPr/>
-        </p:nvSpPr>
-        <p:spPr>
-          <a:xfrm>
-            <a:off x="6675120" y="4343400"/>
-            <a:ext cx="4133088" cy="640080"/>
-          </a:xfrm>
-          <a:prstGeom prst="rect">
-            <a:avLst/>
-          </a:prstGeom>
-          <a:noFill/>
-          <a:ln/>
-        </p:spPr>
-        <p:txBody>
-          <a:bodyPr wrap="square" lIns="0" tIns="0" rIns="0" bIns="0" rtlCol="0" anchor="ctr"/>
-          <a:lstStyle/>
-          <a:p>
-            <a:pPr indent="0" marL="0">
-              <a:buNone/>
-            </a:pPr>
-            <a:r>
-              <a:rPr lang="en-US" sz="1700" dirty="0">
-                <a:solidFill>
-                  <a:srgbClr val="334155"/>
-                </a:solidFill>
-                <a:latin typeface="Yu Gothic" pitchFamily="34" charset="0"/>
-                <a:ea typeface="Yu Gothic" pitchFamily="34" charset="-122"/>
-                <a:cs typeface="Yu Gothic" pitchFamily="34" charset="-120"/>
-              </a:rPr>
-              <a:t>現場ごとの手配状況が、担当者のExcelやメールに分散している</a:t>
-            </a:r>
-            <a:endParaRPr lang="en-US" sz="1700" dirty="0"/>
-          </a:p>
-        </p:txBody>
-      </p:sp>
-      <p:sp>
-        <p:nvSpPr>
-          <p:cNvPr id="40" name="Text 37"/>
-          <p:cNvSpPr/>
-          <p:nvPr/>
-        </p:nvSpPr>
-        <p:spPr>
-          <a:xfrm>
-            <a:off x="1216152" y="5440680"/>
-            <a:ext cx="9820656" cy="502920"/>
-          </a:xfrm>
-          <a:prstGeom prst="rect">
-            <a:avLst/>
-          </a:prstGeom>
-          <a:noFill/>
-          <a:ln/>
-        </p:spPr>
-        <p:txBody>
-          <a:bodyPr wrap="square" lIns="0" tIns="0" rIns="0" bIns="0" rtlCol="0" anchor="ctr"/>
-          <a:lstStyle/>
-          <a:p>
-            <a:pPr algn="ctr" indent="0" marL="0">
-              <a:buNone/>
-            </a:pPr>
-            <a:r>
-              <a:rPr lang="en-US" sz="1800" b="1" dirty="0">
+              <a:rPr lang="en-US" sz="2200" b="1" dirty="0">
                 <a:solidFill>
                   <a:srgbClr val="002060"/>
                 </a:solidFill>
@@ -4737,9 +5305,9 @@
                 <a:ea typeface="Yu Gothic" pitchFamily="34" charset="-122"/>
                 <a:cs typeface="Yu Gothic" pitchFamily="34" charset="-120"/>
               </a:rPr>
-              <a:t>当てはまるもの・当てはまらないもの、ほかのお困りごとをお聞かせください</a:t>
-            </a:r>
-            <a:endParaRPr lang="en-US" sz="1800" dirty="0"/>
+              <a:t>貴社では、いかがでしょうか</a:t>
+            </a:r>
+            <a:endParaRPr lang="en-US" sz="2200" dirty="0"/>
           </a:p>
         </p:txBody>
       </p:sp>
@@ -4808,7 +5376,7 @@
                 <a:ea typeface="Yu Gothic" pitchFamily="34" charset="-122"/>
                 <a:cs typeface="Yu Gothic" pitchFamily="34" charset="-120"/>
               </a:rPr>
-              <a:t>お手伝いできることの例</a:t>
+              <a:t>話すだけで貯まる、御社専用のナレッジベース</a:t>
             </a:r>
             <a:endParaRPr lang="en-US" sz="2800" dirty="0"/>
           </a:p>
@@ -4870,7 +5438,7 @@
                 <a:ea typeface="Yu Gothic" pitchFamily="34" charset="-122"/>
                 <a:cs typeface="Yu Gothic" pitchFamily="34" charset="-120"/>
               </a:rPr>
-              <a:t>前ページの手間ごとに、考えられる対応です</a:t>
+              <a:t>会議や打ち合わせで話した内容が、そのまま社内の知恵として残り、必要なときに引き出せます</a:t>
             </a:r>
             <a:endParaRPr lang="en-US" sz="1500" dirty="0"/>
           </a:p>
@@ -4900,9 +5468,2782 @@
           </a:prstGeom>
         </p:spPr>
       </p:pic>
+      <p:sp>
+        <p:nvSpPr>
+          <p:cNvPr id="6" name="Shape 3"/>
+          <p:cNvSpPr/>
+          <p:nvPr/>
+        </p:nvSpPr>
+        <p:spPr>
+          <a:xfrm>
+            <a:off x="1216152" y="1783080"/>
+            <a:ext cx="2249424" cy="640080"/>
+          </a:xfrm>
+          <a:prstGeom prst="roundRect">
+            <a:avLst>
+              <a:gd name="adj" fmla="val 11429"/>
+            </a:avLst>
+          </a:prstGeom>
+          <a:solidFill>
+            <a:srgbClr val="002060"/>
+          </a:solidFill>
+          <a:ln/>
+        </p:spPr>
+      </p:sp>
+      <p:sp>
+        <p:nvSpPr>
+          <p:cNvPr id="7" name="Text 4"/>
+          <p:cNvSpPr/>
+          <p:nvPr/>
+        </p:nvSpPr>
+        <p:spPr>
+          <a:xfrm>
+            <a:off x="1216152" y="1783080"/>
+            <a:ext cx="2249424" cy="640080"/>
+          </a:xfrm>
+          <a:prstGeom prst="rect">
+            <a:avLst/>
+          </a:prstGeom>
+          <a:noFill/>
+          <a:ln/>
+        </p:spPr>
+        <p:txBody>
+          <a:bodyPr wrap="square" lIns="0" tIns="0" rIns="0" bIns="0" rtlCol="0" anchor="ctr"/>
+          <a:lstStyle/>
+          <a:p>
+            <a:pPr algn="ctr" indent="0" marL="0">
+              <a:buNone/>
+            </a:pPr>
+            <a:r>
+              <a:rPr lang="en-US" sz="1900" b="1" dirty="0">
+                <a:solidFill>
+                  <a:srgbClr val="FFFFFF"/>
+                </a:solidFill>
+                <a:latin typeface="Yu Gothic" pitchFamily="34" charset="0"/>
+                <a:ea typeface="Yu Gothic" pitchFamily="34" charset="-122"/>
+                <a:cs typeface="Yu Gothic" pitchFamily="34" charset="-120"/>
+              </a:rPr>
+              <a:t>話す</a:t>
+            </a:r>
+            <a:endParaRPr lang="en-US" sz="1900" dirty="0"/>
+          </a:p>
+        </p:txBody>
+      </p:sp>
+      <p:sp>
+        <p:nvSpPr>
+          <p:cNvPr id="8" name="Text 5"/>
+          <p:cNvSpPr/>
+          <p:nvPr/>
+        </p:nvSpPr>
+        <p:spPr>
+          <a:xfrm>
+            <a:off x="1216152" y="2514600"/>
+            <a:ext cx="2249424" cy="731520"/>
+          </a:xfrm>
+          <a:prstGeom prst="rect">
+            <a:avLst/>
+          </a:prstGeom>
+          <a:noFill/>
+          <a:ln/>
+        </p:spPr>
+        <p:txBody>
+          <a:bodyPr wrap="square" lIns="0" tIns="0" rIns="0" bIns="0" rtlCol="0" anchor="t"/>
+          <a:lstStyle/>
+          <a:p>
+            <a:pPr algn="ctr" indent="0" marL="0">
+              <a:buNone/>
+            </a:pPr>
+            <a:r>
+              <a:rPr lang="en-US" sz="1500" dirty="0">
+                <a:solidFill>
+                  <a:srgbClr val="334155"/>
+                </a:solidFill>
+                <a:latin typeface="Yu Gothic" pitchFamily="34" charset="0"/>
+                <a:ea typeface="Yu Gothic" pitchFamily="34" charset="-122"/>
+                <a:cs typeface="Yu Gothic" pitchFamily="34" charset="-120"/>
+              </a:rPr>
+              <a:t>会議・打ち合わせ・</a:t>
+            </a:r>
+            <a:endParaRPr lang="en-US" sz="1500" dirty="0"/>
+          </a:p>
+          <a:p>
+            <a:pPr algn="ctr" indent="0" marL="0">
+              <a:buNone/>
+            </a:pPr>
+            <a:r>
+              <a:rPr lang="en-US" sz="1500" dirty="0">
+                <a:solidFill>
+                  <a:srgbClr val="334155"/>
+                </a:solidFill>
+                <a:latin typeface="Yu Gothic" pitchFamily="34" charset="0"/>
+                <a:ea typeface="Yu Gothic" pitchFamily="34" charset="-122"/>
+                <a:cs typeface="Yu Gothic" pitchFamily="34" charset="-120"/>
+              </a:rPr>
+              <a:t>引き継ぎの会話</a:t>
+            </a:r>
+            <a:endParaRPr lang="en-US" sz="1500" dirty="0"/>
+          </a:p>
+        </p:txBody>
+      </p:sp>
+      <p:sp>
+        <p:nvSpPr>
+          <p:cNvPr id="9" name="Shape 6"/>
+          <p:cNvSpPr/>
+          <p:nvPr/>
+        </p:nvSpPr>
+        <p:spPr>
+          <a:xfrm>
+            <a:off x="3511296" y="1975104"/>
+            <a:ext cx="182880" cy="256032"/>
+          </a:xfrm>
+          <a:prstGeom prst="rightArrow">
+            <a:avLst/>
+          </a:prstGeom>
+          <a:solidFill>
+            <a:srgbClr val="64748B"/>
+          </a:solidFill>
+          <a:ln/>
+        </p:spPr>
+      </p:sp>
+      <p:sp>
+        <p:nvSpPr>
+          <p:cNvPr id="10" name="Shape 7"/>
+          <p:cNvSpPr/>
+          <p:nvPr/>
+        </p:nvSpPr>
+        <p:spPr>
+          <a:xfrm>
+            <a:off x="3739896" y="1783080"/>
+            <a:ext cx="2249424" cy="640080"/>
+          </a:xfrm>
+          <a:prstGeom prst="roundRect">
+            <a:avLst>
+              <a:gd name="adj" fmla="val 11429"/>
+            </a:avLst>
+          </a:prstGeom>
+          <a:solidFill>
+            <a:srgbClr val="002060"/>
+          </a:solidFill>
+          <a:ln/>
+        </p:spPr>
+      </p:sp>
+      <p:sp>
+        <p:nvSpPr>
+          <p:cNvPr id="11" name="Text 8"/>
+          <p:cNvSpPr/>
+          <p:nvPr/>
+        </p:nvSpPr>
+        <p:spPr>
+          <a:xfrm>
+            <a:off x="3739896" y="1783080"/>
+            <a:ext cx="2249424" cy="640080"/>
+          </a:xfrm>
+          <a:prstGeom prst="rect">
+            <a:avLst/>
+          </a:prstGeom>
+          <a:noFill/>
+          <a:ln/>
+        </p:spPr>
+        <p:txBody>
+          <a:bodyPr wrap="square" lIns="0" tIns="0" rIns="0" bIns="0" rtlCol="0" anchor="ctr"/>
+          <a:lstStyle/>
+          <a:p>
+            <a:pPr algn="ctr" indent="0" marL="0">
+              <a:buNone/>
+            </a:pPr>
+            <a:r>
+              <a:rPr lang="en-US" sz="1900" b="1" dirty="0">
+                <a:solidFill>
+                  <a:srgbClr val="FFFFFF"/>
+                </a:solidFill>
+                <a:latin typeface="Yu Gothic" pitchFamily="34" charset="0"/>
+                <a:ea typeface="Yu Gothic" pitchFamily="34" charset="-122"/>
+                <a:cs typeface="Yu Gothic" pitchFamily="34" charset="-120"/>
+              </a:rPr>
+              <a:t>文字にする</a:t>
+            </a:r>
+            <a:endParaRPr lang="en-US" sz="1900" dirty="0"/>
+          </a:p>
+        </p:txBody>
+      </p:sp>
+      <p:sp>
+        <p:nvSpPr>
+          <p:cNvPr id="12" name="Text 9"/>
+          <p:cNvSpPr/>
+          <p:nvPr/>
+        </p:nvSpPr>
+        <p:spPr>
+          <a:xfrm>
+            <a:off x="3739896" y="2514600"/>
+            <a:ext cx="2249424" cy="731520"/>
+          </a:xfrm>
+          <a:prstGeom prst="rect">
+            <a:avLst/>
+          </a:prstGeom>
+          <a:noFill/>
+          <a:ln/>
+        </p:spPr>
+        <p:txBody>
+          <a:bodyPr wrap="square" lIns="0" tIns="0" rIns="0" bIns="0" rtlCol="0" anchor="t"/>
+          <a:lstStyle/>
+          <a:p>
+            <a:pPr algn="ctr" indent="0" marL="0">
+              <a:buNone/>
+            </a:pPr>
+            <a:r>
+              <a:rPr lang="en-US" sz="1500" dirty="0">
+                <a:solidFill>
+                  <a:srgbClr val="334155"/>
+                </a:solidFill>
+                <a:latin typeface="Yu Gothic" pitchFamily="34" charset="0"/>
+                <a:ea typeface="Yu Gothic" pitchFamily="34" charset="-122"/>
+                <a:cs typeface="Yu Gothic" pitchFamily="34" charset="-120"/>
+              </a:rPr>
+              <a:t>録音から文字起こしと</a:t>
+            </a:r>
+            <a:endParaRPr lang="en-US" sz="1500" dirty="0"/>
+          </a:p>
+          <a:p>
+            <a:pPr algn="ctr" indent="0" marL="0">
+              <a:buNone/>
+            </a:pPr>
+            <a:r>
+              <a:rPr lang="en-US" sz="1500" dirty="0">
+                <a:solidFill>
+                  <a:srgbClr val="334155"/>
+                </a:solidFill>
+                <a:latin typeface="Yu Gothic" pitchFamily="34" charset="0"/>
+                <a:ea typeface="Yu Gothic" pitchFamily="34" charset="-122"/>
+                <a:cs typeface="Yu Gothic" pitchFamily="34" charset="-120"/>
+              </a:rPr>
+              <a:t>要約を自動で作成</a:t>
+            </a:r>
+            <a:endParaRPr lang="en-US" sz="1500" dirty="0"/>
+          </a:p>
+        </p:txBody>
+      </p:sp>
+      <p:sp>
+        <p:nvSpPr>
+          <p:cNvPr id="13" name="Shape 10"/>
+          <p:cNvSpPr/>
+          <p:nvPr/>
+        </p:nvSpPr>
+        <p:spPr>
+          <a:xfrm>
+            <a:off x="6035040" y="1975104"/>
+            <a:ext cx="182880" cy="256032"/>
+          </a:xfrm>
+          <a:prstGeom prst="rightArrow">
+            <a:avLst/>
+          </a:prstGeom>
+          <a:solidFill>
+            <a:srgbClr val="64748B"/>
+          </a:solidFill>
+          <a:ln/>
+        </p:spPr>
+      </p:sp>
+      <p:sp>
+        <p:nvSpPr>
+          <p:cNvPr id="14" name="Shape 11"/>
+          <p:cNvSpPr/>
+          <p:nvPr/>
+        </p:nvSpPr>
+        <p:spPr>
+          <a:xfrm>
+            <a:off x="6263640" y="1783080"/>
+            <a:ext cx="2249424" cy="640080"/>
+          </a:xfrm>
+          <a:prstGeom prst="roundRect">
+            <a:avLst>
+              <a:gd name="adj" fmla="val 11429"/>
+            </a:avLst>
+          </a:prstGeom>
+          <a:solidFill>
+            <a:srgbClr val="002060"/>
+          </a:solidFill>
+          <a:ln/>
+        </p:spPr>
+      </p:sp>
+      <p:sp>
+        <p:nvSpPr>
+          <p:cNvPr id="15" name="Text 12"/>
+          <p:cNvSpPr/>
+          <p:nvPr/>
+        </p:nvSpPr>
+        <p:spPr>
+          <a:xfrm>
+            <a:off x="6263640" y="1783080"/>
+            <a:ext cx="2249424" cy="640080"/>
+          </a:xfrm>
+          <a:prstGeom prst="rect">
+            <a:avLst/>
+          </a:prstGeom>
+          <a:noFill/>
+          <a:ln/>
+        </p:spPr>
+        <p:txBody>
+          <a:bodyPr wrap="square" lIns="0" tIns="0" rIns="0" bIns="0" rtlCol="0" anchor="ctr"/>
+          <a:lstStyle/>
+          <a:p>
+            <a:pPr algn="ctr" indent="0" marL="0">
+              <a:buNone/>
+            </a:pPr>
+            <a:r>
+              <a:rPr lang="en-US" sz="1900" b="1" dirty="0">
+                <a:solidFill>
+                  <a:srgbClr val="FFFFFF"/>
+                </a:solidFill>
+                <a:latin typeface="Yu Gothic" pitchFamily="34" charset="0"/>
+                <a:ea typeface="Yu Gothic" pitchFamily="34" charset="-122"/>
+                <a:cs typeface="Yu Gothic" pitchFamily="34" charset="-120"/>
+              </a:rPr>
+              <a:t>整理して貯める</a:t>
+            </a:r>
+            <a:endParaRPr lang="en-US" sz="1900" dirty="0"/>
+          </a:p>
+        </p:txBody>
+      </p:sp>
+      <p:sp>
+        <p:nvSpPr>
+          <p:cNvPr id="16" name="Text 13"/>
+          <p:cNvSpPr/>
+          <p:nvPr/>
+        </p:nvSpPr>
+        <p:spPr>
+          <a:xfrm>
+            <a:off x="6263640" y="2514600"/>
+            <a:ext cx="2249424" cy="731520"/>
+          </a:xfrm>
+          <a:prstGeom prst="rect">
+            <a:avLst/>
+          </a:prstGeom>
+          <a:noFill/>
+          <a:ln/>
+        </p:spPr>
+        <p:txBody>
+          <a:bodyPr wrap="square" lIns="0" tIns="0" rIns="0" bIns="0" rtlCol="0" anchor="t"/>
+          <a:lstStyle/>
+          <a:p>
+            <a:pPr algn="ctr" indent="0" marL="0">
+              <a:buNone/>
+            </a:pPr>
+            <a:r>
+              <a:rPr lang="en-US" sz="1500" dirty="0">
+                <a:solidFill>
+                  <a:srgbClr val="334155"/>
+                </a:solidFill>
+                <a:latin typeface="Yu Gothic" pitchFamily="34" charset="0"/>
+                <a:ea typeface="Yu Gothic" pitchFamily="34" charset="-122"/>
+                <a:cs typeface="Yu Gothic" pitchFamily="34" charset="-120"/>
+              </a:rPr>
+              <a:t>テーマ・現場・取引先</a:t>
+            </a:r>
+            <a:endParaRPr lang="en-US" sz="1500" dirty="0"/>
+          </a:p>
+          <a:p>
+            <a:pPr algn="ctr" indent="0" marL="0">
+              <a:buNone/>
+            </a:pPr>
+            <a:r>
+              <a:rPr lang="en-US" sz="1500" dirty="0">
+                <a:solidFill>
+                  <a:srgbClr val="334155"/>
+                </a:solidFill>
+                <a:latin typeface="Yu Gothic" pitchFamily="34" charset="0"/>
+                <a:ea typeface="Yu Gothic" pitchFamily="34" charset="-122"/>
+                <a:cs typeface="Yu Gothic" pitchFamily="34" charset="-120"/>
+              </a:rPr>
+              <a:t>ごとに整理</a:t>
+            </a:r>
+            <a:endParaRPr lang="en-US" sz="1500" dirty="0"/>
+          </a:p>
+        </p:txBody>
+      </p:sp>
+      <p:sp>
+        <p:nvSpPr>
+          <p:cNvPr id="17" name="Shape 14"/>
+          <p:cNvSpPr/>
+          <p:nvPr/>
+        </p:nvSpPr>
+        <p:spPr>
+          <a:xfrm>
+            <a:off x="8558784" y="1975104"/>
+            <a:ext cx="182880" cy="256032"/>
+          </a:xfrm>
+          <a:prstGeom prst="rightArrow">
+            <a:avLst/>
+          </a:prstGeom>
+          <a:solidFill>
+            <a:srgbClr val="64748B"/>
+          </a:solidFill>
+          <a:ln/>
+        </p:spPr>
+      </p:sp>
+      <p:sp>
+        <p:nvSpPr>
+          <p:cNvPr id="18" name="Shape 15"/>
+          <p:cNvSpPr/>
+          <p:nvPr/>
+        </p:nvSpPr>
+        <p:spPr>
+          <a:xfrm>
+            <a:off x="8787384" y="1783080"/>
+            <a:ext cx="2249424" cy="640080"/>
+          </a:xfrm>
+          <a:prstGeom prst="roundRect">
+            <a:avLst>
+              <a:gd name="adj" fmla="val 11429"/>
+            </a:avLst>
+          </a:prstGeom>
+          <a:solidFill>
+            <a:srgbClr val="EB6311"/>
+          </a:solidFill>
+          <a:ln/>
+        </p:spPr>
+      </p:sp>
+      <p:sp>
+        <p:nvSpPr>
+          <p:cNvPr id="19" name="Text 16"/>
+          <p:cNvSpPr/>
+          <p:nvPr/>
+        </p:nvSpPr>
+        <p:spPr>
+          <a:xfrm>
+            <a:off x="8787384" y="1783080"/>
+            <a:ext cx="2249424" cy="640080"/>
+          </a:xfrm>
+          <a:prstGeom prst="rect">
+            <a:avLst/>
+          </a:prstGeom>
+          <a:noFill/>
+          <a:ln/>
+        </p:spPr>
+        <p:txBody>
+          <a:bodyPr wrap="square" lIns="0" tIns="0" rIns="0" bIns="0" rtlCol="0" anchor="ctr"/>
+          <a:lstStyle/>
+          <a:p>
+            <a:pPr algn="ctr" indent="0" marL="0">
+              <a:buNone/>
+            </a:pPr>
+            <a:r>
+              <a:rPr lang="en-US" sz="1900" b="1" dirty="0">
+                <a:solidFill>
+                  <a:srgbClr val="FFFFFF"/>
+                </a:solidFill>
+                <a:latin typeface="Yu Gothic" pitchFamily="34" charset="0"/>
+                <a:ea typeface="Yu Gothic" pitchFamily="34" charset="-122"/>
+                <a:cs typeface="Yu Gothic" pitchFamily="34" charset="-120"/>
+              </a:rPr>
+              <a:t>質問して引き出す</a:t>
+            </a:r>
+            <a:endParaRPr lang="en-US" sz="1900" dirty="0"/>
+          </a:p>
+        </p:txBody>
+      </p:sp>
+      <p:sp>
+        <p:nvSpPr>
+          <p:cNvPr id="20" name="Text 17"/>
+          <p:cNvSpPr/>
+          <p:nvPr/>
+        </p:nvSpPr>
+        <p:spPr>
+          <a:xfrm>
+            <a:off x="8787384" y="2514600"/>
+            <a:ext cx="2249424" cy="731520"/>
+          </a:xfrm>
+          <a:prstGeom prst="rect">
+            <a:avLst/>
+          </a:prstGeom>
+          <a:noFill/>
+          <a:ln/>
+        </p:spPr>
+        <p:txBody>
+          <a:bodyPr wrap="square" lIns="0" tIns="0" rIns="0" bIns="0" rtlCol="0" anchor="t"/>
+          <a:lstStyle/>
+          <a:p>
+            <a:pPr algn="ctr" indent="0" marL="0">
+              <a:buNone/>
+            </a:pPr>
+            <a:r>
+              <a:rPr lang="en-US" sz="1500" dirty="0">
+                <a:solidFill>
+                  <a:srgbClr val="334155"/>
+                </a:solidFill>
+                <a:latin typeface="Yu Gothic" pitchFamily="34" charset="0"/>
+                <a:ea typeface="Yu Gothic" pitchFamily="34" charset="-122"/>
+                <a:cs typeface="Yu Gothic" pitchFamily="34" charset="-120"/>
+              </a:rPr>
+              <a:t>必要なときに、</a:t>
+            </a:r>
+            <a:endParaRPr lang="en-US" sz="1500" dirty="0"/>
+          </a:p>
+          <a:p>
+            <a:pPr algn="ctr" indent="0" marL="0">
+              <a:buNone/>
+            </a:pPr>
+            <a:r>
+              <a:rPr lang="en-US" sz="1500" dirty="0">
+                <a:solidFill>
+                  <a:srgbClr val="334155"/>
+                </a:solidFill>
+                <a:latin typeface="Yu Gothic" pitchFamily="34" charset="0"/>
+                <a:ea typeface="Yu Gothic" pitchFamily="34" charset="-122"/>
+                <a:cs typeface="Yu Gothic" pitchFamily="34" charset="-120"/>
+              </a:rPr>
+              <a:t>言葉で聞いて答えを得る</a:t>
+            </a:r>
+            <a:endParaRPr lang="en-US" sz="1500" dirty="0"/>
+          </a:p>
+        </p:txBody>
+      </p:sp>
+      <p:sp>
+        <p:nvSpPr>
+          <p:cNvPr id="21" name="Shape 18"/>
+          <p:cNvSpPr/>
+          <p:nvPr/>
+        </p:nvSpPr>
+        <p:spPr>
+          <a:xfrm>
+            <a:off x="1216152" y="3429000"/>
+            <a:ext cx="3840480" cy="2377440"/>
+          </a:xfrm>
+          <a:prstGeom prst="rect">
+            <a:avLst/>
+          </a:prstGeom>
+          <a:solidFill>
+            <a:srgbClr val="F8FAFC"/>
+          </a:solidFill>
+          <a:ln w="12700">
+            <a:solidFill>
+              <a:srgbClr val="64748B"/>
+            </a:solidFill>
+            <a:prstDash val="dash"/>
+          </a:ln>
+        </p:spPr>
+      </p:sp>
+      <p:sp>
+        <p:nvSpPr>
+          <p:cNvPr id="22" name="Text 19"/>
+          <p:cNvSpPr/>
+          <p:nvPr/>
+        </p:nvSpPr>
+        <p:spPr>
+          <a:xfrm>
+            <a:off x="1216152" y="3429000"/>
+            <a:ext cx="3840480" cy="2377440"/>
+          </a:xfrm>
+          <a:prstGeom prst="rect">
+            <a:avLst/>
+          </a:prstGeom>
+          <a:noFill/>
+          <a:ln/>
+        </p:spPr>
+        <p:txBody>
+          <a:bodyPr wrap="square" lIns="0" tIns="0" rIns="0" bIns="0" rtlCol="0" anchor="ctr"/>
+          <a:lstStyle/>
+          <a:p>
+            <a:pPr algn="ctr" indent="0" marL="0">
+              <a:buNone/>
+            </a:pPr>
+            <a:r>
+              <a:rPr lang="en-US" sz="1400" dirty="0">
+                <a:solidFill>
+                  <a:srgbClr val="64748B"/>
+                </a:solidFill>
+                <a:latin typeface="Yu Gothic" pitchFamily="34" charset="0"/>
+                <a:ea typeface="Yu Gothic" pitchFamily="34" charset="-122"/>
+                <a:cs typeface="Yu Gothic" pitchFamily="34" charset="-120"/>
+              </a:rPr>
+              <a:t>IMG-02（イラスト作成待ち）</a:t>
+            </a:r>
+            <a:endParaRPr lang="en-US" sz="1400" dirty="0"/>
+          </a:p>
+        </p:txBody>
+      </p:sp>
+      <p:sp>
+        <p:nvSpPr>
+          <p:cNvPr id="23" name="Text 20"/>
+          <p:cNvSpPr/>
+          <p:nvPr/>
+        </p:nvSpPr>
+        <p:spPr>
+          <a:xfrm>
+            <a:off x="5330952" y="3474720"/>
+            <a:ext cx="5705856" cy="1920240"/>
+          </a:xfrm>
+          <a:prstGeom prst="rect">
+            <a:avLst/>
+          </a:prstGeom>
+          <a:noFill/>
+          <a:ln/>
+        </p:spPr>
+        <p:txBody>
+          <a:bodyPr wrap="square" lIns="0" tIns="0" rIns="0" bIns="0" rtlCol="0" anchor="t"/>
+          <a:lstStyle/>
+          <a:p>
+            <a:pPr indent="0" marL="0">
+              <a:buNone/>
+            </a:pPr>
+            <a:r>
+              <a:rPr lang="en-US" sz="1800" b="1" dirty="0">
+                <a:solidFill>
+                  <a:srgbClr val="002060"/>
+                </a:solidFill>
+                <a:latin typeface="Yu Gothic" pitchFamily="34" charset="0"/>
+                <a:ea typeface="Yu Gothic" pitchFamily="34" charset="-122"/>
+                <a:cs typeface="Yu Gothic" pitchFamily="34" charset="-120"/>
+              </a:rPr>
+              <a:t>キーボード入力は不要</a:t>
+            </a:r>
+            <a:endParaRPr lang="en-US" sz="1800" dirty="0"/>
+          </a:p>
+          <a:p>
+            <a:pPr indent="0" marL="0">
+              <a:buNone/>
+            </a:pPr>
+            <a:r>
+              <a:rPr lang="en-US" sz="1500" dirty="0">
+                <a:solidFill>
+                  <a:srgbClr val="334155"/>
+                </a:solidFill>
+                <a:latin typeface="Yu Gothic" pitchFamily="34" charset="0"/>
+                <a:ea typeface="Yu Gothic" pitchFamily="34" charset="-122"/>
+                <a:cs typeface="Yu Gothic" pitchFamily="34" charset="-120"/>
+              </a:rPr>
+              <a:t>話した内容が材料になるので、書く手間を増やしません</a:t>
+            </a:r>
+            <a:endParaRPr lang="en-US" sz="1800" dirty="0"/>
+          </a:p>
+          <a:p>
+            <a:pPr indent="0" marL="0">
+              <a:buNone/>
+            </a:pPr>
+            <a:r>
+              <a:rPr lang="en-US" sz="800" dirty="0">
+                <a:solidFill>
+                  <a:srgbClr val="334155"/>
+                </a:solidFill>
+                <a:latin typeface="Yu Gothic" pitchFamily="34" charset="0"/>
+                <a:ea typeface="Yu Gothic" pitchFamily="34" charset="-122"/>
+                <a:cs typeface="Yu Gothic" pitchFamily="34" charset="-120"/>
+              </a:rPr>
+              <a:t> </a:t>
+            </a:r>
+            <a:endParaRPr lang="en-US" sz="1800" dirty="0"/>
+          </a:p>
+          <a:p>
+            <a:pPr indent="0" marL="0">
+              <a:buNone/>
+            </a:pPr>
+            <a:r>
+              <a:rPr lang="en-US" sz="1800" b="1" dirty="0">
+                <a:solidFill>
+                  <a:srgbClr val="002060"/>
+                </a:solidFill>
+                <a:latin typeface="Yu Gothic" pitchFamily="34" charset="0"/>
+                <a:ea typeface="Yu Gothic" pitchFamily="34" charset="-122"/>
+                <a:cs typeface="Yu Gothic" pitchFamily="34" charset="-120"/>
+              </a:rPr>
+              <a:t>貯めるだけでなく、引き出せる形に</a:t>
+            </a:r>
+            <a:endParaRPr lang="en-US" sz="1800" dirty="0"/>
+          </a:p>
+          <a:p>
+            <a:pPr indent="0" marL="0">
+              <a:buNone/>
+            </a:pPr>
+            <a:r>
+              <a:rPr lang="en-US" sz="1500" dirty="0">
+                <a:solidFill>
+                  <a:srgbClr val="334155"/>
+                </a:solidFill>
+                <a:latin typeface="Yu Gothic" pitchFamily="34" charset="0"/>
+                <a:ea typeface="Yu Gothic" pitchFamily="34" charset="-122"/>
+                <a:cs typeface="Yu Gothic" pitchFamily="34" charset="-120"/>
+              </a:rPr>
+              <a:t>若手が使える整理の仕方を、業務を伺いながら一緒に設計します</a:t>
+            </a:r>
+            <a:endParaRPr lang="en-US" sz="1800" dirty="0"/>
+          </a:p>
+        </p:txBody>
+      </p:sp>
+      <p:sp>
+        <p:nvSpPr>
+          <p:cNvPr id="24" name="Text 21"/>
+          <p:cNvSpPr/>
+          <p:nvPr/>
+        </p:nvSpPr>
+        <p:spPr>
+          <a:xfrm>
+            <a:off x="1216152" y="5897880"/>
+            <a:ext cx="9820656" cy="320040"/>
+          </a:xfrm>
+          <a:prstGeom prst="rect">
+            <a:avLst/>
+          </a:prstGeom>
+          <a:noFill/>
+          <a:ln/>
+        </p:spPr>
+        <p:txBody>
+          <a:bodyPr wrap="square" lIns="0" tIns="0" rIns="0" bIns="0" rtlCol="0" anchor="ctr"/>
+          <a:lstStyle/>
+          <a:p>
+            <a:pPr indent="0" marL="0">
+              <a:buNone/>
+            </a:pPr>
+            <a:r>
+              <a:rPr lang="en-US" sz="1300" dirty="0">
+                <a:solidFill>
+                  <a:srgbClr val="64748B"/>
+                </a:solidFill>
+                <a:latin typeface="Yu Gothic" pitchFamily="34" charset="0"/>
+                <a:ea typeface="Yu Gothic" pitchFamily="34" charset="-122"/>
+                <a:cs typeface="Yu Gothic" pitchFamily="34" charset="-120"/>
+              </a:rPr>
+              <a:t>※ データの置き場所や使う道具は、貴社の環境とルールを確認したうえでご提案します</a:t>
+            </a:r>
+            <a:endParaRPr lang="en-US" sz="1300" dirty="0"/>
+          </a:p>
+        </p:txBody>
+      </p:sp>
+    </p:spTree>
+  </p:cSld>
+  <p:clrMapOvr>
+    <a:masterClrMapping/>
+  </p:clrMapOvr>
+</p:sld>
+</file>
+
+<file path=ppt/slides/slide6.xml><?xml version="1.0" encoding="utf-8"?>
+<p:sld xmlns:a="http://schemas.openxmlformats.org/drawingml/2006/main" xmlns:r="http://schemas.openxmlformats.org/officeDocument/2006/relationships" xmlns:p="http://schemas.openxmlformats.org/presentationml/2006/main">
+  <p:cSld name="Slide 6">
+    <p:bg>
+      <p:bgPr>
+        <a:solidFill>
+          <a:srgbClr val="FFFFFF"/>
+        </a:solidFill>
+      </p:bgPr>
+    </p:bg>
+    <p:spTree>
+      <p:nvGrpSpPr>
+        <p:cNvPr id="1" name=""/>
+        <p:cNvGrpSpPr/>
+        <p:nvPr/>
+      </p:nvGrpSpPr>
+      <p:grpSpPr>
+        <a:xfrm>
+          <a:off x="0" y="0"/>
+          <a:ext cx="0" cy="0"/>
+          <a:chOff x="0" y="0"/>
+          <a:chExt cx="0" cy="0"/>
+        </a:xfrm>
+      </p:grpSpPr>
+      <p:sp>
+        <p:nvSpPr>
+          <p:cNvPr id="2" name="Text 0"/>
+          <p:cNvSpPr/>
+          <p:nvPr/>
+        </p:nvSpPr>
+        <p:spPr>
+          <a:xfrm>
+            <a:off x="1216152" y="411480"/>
+            <a:ext cx="9820656" cy="548640"/>
+          </a:xfrm>
+          <a:prstGeom prst="rect">
+            <a:avLst/>
+          </a:prstGeom>
+          <a:noFill/>
+          <a:ln/>
+        </p:spPr>
+        <p:txBody>
+          <a:bodyPr wrap="square" lIns="0" tIns="0" rIns="0" bIns="0" rtlCol="0" anchor="ctr"/>
+          <a:lstStyle/>
+          <a:p>
+            <a:pPr indent="0" marL="0">
+              <a:buNone/>
+            </a:pPr>
+            <a:r>
+              <a:rPr lang="en-US" sz="2800" b="1" dirty="0">
+                <a:solidFill>
+                  <a:srgbClr val="002060"/>
+                </a:solidFill>
+                <a:latin typeface="Yu Gothic" pitchFamily="34" charset="0"/>
+                <a:ea typeface="Yu Gothic" pitchFamily="34" charset="-122"/>
+                <a:cs typeface="Yu Gothic" pitchFamily="34" charset="-120"/>
+              </a:rPr>
+              <a:t>たとえば調達業務なら</a:t>
+            </a:r>
+            <a:endParaRPr lang="en-US" sz="2800" dirty="0"/>
+          </a:p>
+        </p:txBody>
+      </p:sp>
+      <p:sp>
+        <p:nvSpPr>
+          <p:cNvPr id="3" name="Shape 1"/>
+          <p:cNvSpPr/>
+          <p:nvPr/>
+        </p:nvSpPr>
+        <p:spPr>
+          <a:xfrm>
+            <a:off x="1216152" y="1024128"/>
+            <a:ext cx="1097280" cy="0"/>
+          </a:xfrm>
+          <a:prstGeom prst="line">
+            <a:avLst/>
+          </a:prstGeom>
+          <a:noFill/>
+          <a:ln w="31750">
+            <a:solidFill>
+              <a:srgbClr val="EB6311"/>
+            </a:solidFill>
+            <a:prstDash val="solid"/>
+          </a:ln>
+        </p:spPr>
+      </p:sp>
+      <p:sp>
+        <p:nvSpPr>
+          <p:cNvPr id="4" name="Text 2"/>
+          <p:cNvSpPr/>
+          <p:nvPr/>
+        </p:nvSpPr>
+        <p:spPr>
+          <a:xfrm>
+            <a:off x="1216152" y="1115568"/>
+            <a:ext cx="9820656" cy="365760"/>
+          </a:xfrm>
+          <a:prstGeom prst="rect">
+            <a:avLst/>
+          </a:prstGeom>
+          <a:noFill/>
+          <a:ln/>
+        </p:spPr>
+        <p:txBody>
+          <a:bodyPr wrap="square" lIns="0" tIns="0" rIns="0" bIns="0" rtlCol="0" anchor="ctr"/>
+          <a:lstStyle/>
+          <a:p>
+            <a:pPr indent="0" marL="0">
+              <a:buNone/>
+            </a:pPr>
+            <a:r>
+              <a:rPr lang="en-US" sz="1500" dirty="0">
+                <a:solidFill>
+                  <a:srgbClr val="64748B"/>
+                </a:solidFill>
+                <a:latin typeface="Yu Gothic" pitchFamily="34" charset="0"/>
+                <a:ea typeface="Yu Gothic" pitchFamily="34" charset="-122"/>
+                <a:cs typeface="Yu Gothic" pitchFamily="34" charset="-120"/>
+              </a:rPr>
+              <a:t>ナレッジベースに聞けば、ベテランに確認しなくても次の一手が分かるようになります</a:t>
+            </a:r>
+            <a:endParaRPr lang="en-US" sz="1500" dirty="0"/>
+          </a:p>
+        </p:txBody>
+      </p:sp>
+      <p:pic>
+        <p:nvPicPr>
+          <p:cNvPr id="5" name="Image 0" descr="/home/user/-/tak-evac/src/assets/logo_t.png">    </p:cNvPr>
+          <p:cNvPicPr>
+            <a:picLocks noChangeAspect="1"/>
+          </p:cNvPicPr>
+          <p:nvPr/>
+        </p:nvPicPr>
+        <p:blipFill>
+          <a:blip r:embed="rId1"/>
+          <a:stretch>
+            <a:fillRect/>
+          </a:stretch>
+        </p:blipFill>
+        <p:spPr>
+          <a:xfrm>
+            <a:off x="228600" y="6199632"/>
+            <a:ext cx="457200" cy="457200"/>
+          </a:xfrm>
+          <a:prstGeom prst="rect">
+            <a:avLst/>
+          </a:prstGeom>
+        </p:spPr>
+      </p:pic>
+      <p:sp>
+        <p:nvSpPr>
+          <p:cNvPr id="6" name="Shape 3"/>
+          <p:cNvSpPr/>
+          <p:nvPr/>
+        </p:nvSpPr>
+        <p:spPr>
+          <a:xfrm>
+            <a:off x="7196328" y="1691640"/>
+            <a:ext cx="3840480" cy="3108960"/>
+          </a:xfrm>
+          <a:prstGeom prst="rect">
+            <a:avLst/>
+          </a:prstGeom>
+          <a:solidFill>
+            <a:srgbClr val="F8FAFC"/>
+          </a:solidFill>
+          <a:ln w="12700">
+            <a:solidFill>
+              <a:srgbClr val="64748B"/>
+            </a:solidFill>
+            <a:prstDash val="dash"/>
+          </a:ln>
+        </p:spPr>
+      </p:sp>
+      <p:sp>
+        <p:nvSpPr>
+          <p:cNvPr id="7" name="Text 4"/>
+          <p:cNvSpPr/>
+          <p:nvPr/>
+        </p:nvSpPr>
+        <p:spPr>
+          <a:xfrm>
+            <a:off x="7196328" y="1691640"/>
+            <a:ext cx="3840480" cy="3108960"/>
+          </a:xfrm>
+          <a:prstGeom prst="rect">
+            <a:avLst/>
+          </a:prstGeom>
+          <a:noFill/>
+          <a:ln/>
+        </p:spPr>
+        <p:txBody>
+          <a:bodyPr wrap="square" lIns="0" tIns="0" rIns="0" bIns="0" rtlCol="0" anchor="ctr"/>
+          <a:lstStyle/>
+          <a:p>
+            <a:pPr algn="ctr" indent="0" marL="0">
+              <a:buNone/>
+            </a:pPr>
+            <a:r>
+              <a:rPr lang="en-US" sz="1400" dirty="0">
+                <a:solidFill>
+                  <a:srgbClr val="64748B"/>
+                </a:solidFill>
+                <a:latin typeface="Yu Gothic" pitchFamily="34" charset="0"/>
+                <a:ea typeface="Yu Gothic" pitchFamily="34" charset="-122"/>
+                <a:cs typeface="Yu Gothic" pitchFamily="34" charset="-120"/>
+              </a:rPr>
+              <a:t>IMG-03（イラスト作成待ち）</a:t>
+            </a:r>
+            <a:endParaRPr lang="en-US" sz="1400" dirty="0"/>
+          </a:p>
+        </p:txBody>
+      </p:sp>
+      <p:sp>
+        <p:nvSpPr>
+          <p:cNvPr id="8" name="Shape 5"/>
+          <p:cNvSpPr/>
+          <p:nvPr/>
+        </p:nvSpPr>
+        <p:spPr>
+          <a:xfrm>
+            <a:off x="1216152" y="1783080"/>
+            <a:ext cx="5669280" cy="777240"/>
+          </a:xfrm>
+          <a:prstGeom prst="roundRect">
+            <a:avLst>
+              <a:gd name="adj" fmla="val 11765"/>
+            </a:avLst>
+          </a:prstGeom>
+          <a:solidFill>
+            <a:srgbClr val="FFF7ED"/>
+          </a:solidFill>
+          <a:ln w="12700">
+            <a:solidFill>
+              <a:srgbClr val="EB6311"/>
+            </a:solidFill>
+            <a:prstDash val="solid"/>
+          </a:ln>
+        </p:spPr>
+      </p:sp>
+      <p:sp>
+        <p:nvSpPr>
+          <p:cNvPr id="9" name="Text 6"/>
+          <p:cNvSpPr/>
+          <p:nvPr/>
+        </p:nvSpPr>
+        <p:spPr>
+          <a:xfrm>
+            <a:off x="1353312" y="1783080"/>
+            <a:ext cx="457200" cy="777240"/>
+          </a:xfrm>
+          <a:prstGeom prst="rect">
+            <a:avLst/>
+          </a:prstGeom>
+          <a:noFill/>
+          <a:ln/>
+        </p:spPr>
+        <p:txBody>
+          <a:bodyPr wrap="square" lIns="0" tIns="0" rIns="0" bIns="0" rtlCol="0" anchor="ctr"/>
+          <a:lstStyle/>
+          <a:p>
+            <a:pPr indent="0" marL="0">
+              <a:buNone/>
+            </a:pPr>
+            <a:r>
+              <a:rPr lang="en-US" sz="2200" b="1" dirty="0">
+                <a:solidFill>
+                  <a:srgbClr val="EB6311"/>
+                </a:solidFill>
+                <a:latin typeface="Yu Gothic" pitchFamily="34" charset="0"/>
+                <a:ea typeface="Yu Gothic" pitchFamily="34" charset="-122"/>
+                <a:cs typeface="Yu Gothic" pitchFamily="34" charset="-120"/>
+              </a:rPr>
+              <a:t>Q</a:t>
+            </a:r>
+            <a:endParaRPr lang="en-US" sz="2200" dirty="0"/>
+          </a:p>
+        </p:txBody>
+      </p:sp>
+      <p:sp>
+        <p:nvSpPr>
+          <p:cNvPr id="10" name="Text 7"/>
+          <p:cNvSpPr/>
+          <p:nvPr/>
+        </p:nvSpPr>
+        <p:spPr>
+          <a:xfrm>
+            <a:off x="1810512" y="1783080"/>
+            <a:ext cx="4937760" cy="777240"/>
+          </a:xfrm>
+          <a:prstGeom prst="rect">
+            <a:avLst/>
+          </a:prstGeom>
+          <a:noFill/>
+          <a:ln/>
+        </p:spPr>
+        <p:txBody>
+          <a:bodyPr wrap="square" lIns="0" tIns="0" rIns="0" bIns="0" rtlCol="0" anchor="ctr"/>
+          <a:lstStyle/>
+          <a:p>
+            <a:pPr indent="0" marL="0">
+              <a:buNone/>
+            </a:pPr>
+            <a:r>
+              <a:rPr lang="en-US" sz="1700" dirty="0">
+                <a:solidFill>
+                  <a:srgbClr val="002060"/>
+                </a:solidFill>
+                <a:latin typeface="Yu Gothic" pitchFamily="34" charset="0"/>
+                <a:ea typeface="Yu Gothic" pitchFamily="34" charset="-122"/>
+                <a:cs typeface="Yu Gothic" pitchFamily="34" charset="-120"/>
+              </a:rPr>
+              <a:t>この業者に前回お願いしたとき、気をつけた点は？</a:t>
+            </a:r>
+            <a:endParaRPr lang="en-US" sz="1700" dirty="0"/>
+          </a:p>
+        </p:txBody>
+      </p:sp>
+      <p:sp>
+        <p:nvSpPr>
+          <p:cNvPr id="11" name="Shape 8"/>
+          <p:cNvSpPr/>
+          <p:nvPr/>
+        </p:nvSpPr>
+        <p:spPr>
+          <a:xfrm>
+            <a:off x="1216152" y="2788920"/>
+            <a:ext cx="5669280" cy="777240"/>
+          </a:xfrm>
+          <a:prstGeom prst="roundRect">
+            <a:avLst>
+              <a:gd name="adj" fmla="val 11765"/>
+            </a:avLst>
+          </a:prstGeom>
+          <a:solidFill>
+            <a:srgbClr val="FFF7ED"/>
+          </a:solidFill>
+          <a:ln w="12700">
+            <a:solidFill>
+              <a:srgbClr val="EB6311"/>
+            </a:solidFill>
+            <a:prstDash val="solid"/>
+          </a:ln>
+        </p:spPr>
+      </p:sp>
+      <p:sp>
+        <p:nvSpPr>
+          <p:cNvPr id="12" name="Text 9"/>
+          <p:cNvSpPr/>
+          <p:nvPr/>
+        </p:nvSpPr>
+        <p:spPr>
+          <a:xfrm>
+            <a:off x="1353312" y="2788920"/>
+            <a:ext cx="457200" cy="777240"/>
+          </a:xfrm>
+          <a:prstGeom prst="rect">
+            <a:avLst/>
+          </a:prstGeom>
+          <a:noFill/>
+          <a:ln/>
+        </p:spPr>
+        <p:txBody>
+          <a:bodyPr wrap="square" lIns="0" tIns="0" rIns="0" bIns="0" rtlCol="0" anchor="ctr"/>
+          <a:lstStyle/>
+          <a:p>
+            <a:pPr indent="0" marL="0">
+              <a:buNone/>
+            </a:pPr>
+            <a:r>
+              <a:rPr lang="en-US" sz="2200" b="1" dirty="0">
+                <a:solidFill>
+                  <a:srgbClr val="EB6311"/>
+                </a:solidFill>
+                <a:latin typeface="Yu Gothic" pitchFamily="34" charset="0"/>
+                <a:ea typeface="Yu Gothic" pitchFamily="34" charset="-122"/>
+                <a:cs typeface="Yu Gothic" pitchFamily="34" charset="-120"/>
+              </a:rPr>
+              <a:t>Q</a:t>
+            </a:r>
+            <a:endParaRPr lang="en-US" sz="2200" dirty="0"/>
+          </a:p>
+        </p:txBody>
+      </p:sp>
+      <p:sp>
+        <p:nvSpPr>
+          <p:cNvPr id="13" name="Text 10"/>
+          <p:cNvSpPr/>
+          <p:nvPr/>
+        </p:nvSpPr>
+        <p:spPr>
+          <a:xfrm>
+            <a:off x="1810512" y="2788920"/>
+            <a:ext cx="4937760" cy="777240"/>
+          </a:xfrm>
+          <a:prstGeom prst="rect">
+            <a:avLst/>
+          </a:prstGeom>
+          <a:noFill/>
+          <a:ln/>
+        </p:spPr>
+        <p:txBody>
+          <a:bodyPr wrap="square" lIns="0" tIns="0" rIns="0" bIns="0" rtlCol="0" anchor="ctr"/>
+          <a:lstStyle/>
+          <a:p>
+            <a:pPr indent="0" marL="0">
+              <a:buNone/>
+            </a:pPr>
+            <a:r>
+              <a:rPr lang="en-US" sz="1700" dirty="0">
+                <a:solidFill>
+                  <a:srgbClr val="002060"/>
+                </a:solidFill>
+                <a:latin typeface="Yu Gothic" pitchFamily="34" charset="0"/>
+                <a:ea typeface="Yu Gothic" pitchFamily="34" charset="-122"/>
+                <a:cs typeface="Yu Gothic" pitchFamily="34" charset="-120"/>
+              </a:rPr>
+              <a:t>この資材の見積で、必ず確認すべき項目は？</a:t>
+            </a:r>
+            <a:endParaRPr lang="en-US" sz="1700" dirty="0"/>
+          </a:p>
+        </p:txBody>
+      </p:sp>
+      <p:sp>
+        <p:nvSpPr>
+          <p:cNvPr id="14" name="Shape 11"/>
+          <p:cNvSpPr/>
+          <p:nvPr/>
+        </p:nvSpPr>
+        <p:spPr>
+          <a:xfrm>
+            <a:off x="1216152" y="3794760"/>
+            <a:ext cx="5669280" cy="777240"/>
+          </a:xfrm>
+          <a:prstGeom prst="roundRect">
+            <a:avLst>
+              <a:gd name="adj" fmla="val 11765"/>
+            </a:avLst>
+          </a:prstGeom>
+          <a:solidFill>
+            <a:srgbClr val="FFF7ED"/>
+          </a:solidFill>
+          <a:ln w="12700">
+            <a:solidFill>
+              <a:srgbClr val="EB6311"/>
+            </a:solidFill>
+            <a:prstDash val="solid"/>
+          </a:ln>
+        </p:spPr>
+      </p:sp>
+      <p:sp>
+        <p:nvSpPr>
+          <p:cNvPr id="15" name="Text 12"/>
+          <p:cNvSpPr/>
+          <p:nvPr/>
+        </p:nvSpPr>
+        <p:spPr>
+          <a:xfrm>
+            <a:off x="1353312" y="3794760"/>
+            <a:ext cx="457200" cy="777240"/>
+          </a:xfrm>
+          <a:prstGeom prst="rect">
+            <a:avLst/>
+          </a:prstGeom>
+          <a:noFill/>
+          <a:ln/>
+        </p:spPr>
+        <p:txBody>
+          <a:bodyPr wrap="square" lIns="0" tIns="0" rIns="0" bIns="0" rtlCol="0" anchor="ctr"/>
+          <a:lstStyle/>
+          <a:p>
+            <a:pPr indent="0" marL="0">
+              <a:buNone/>
+            </a:pPr>
+            <a:r>
+              <a:rPr lang="en-US" sz="2200" b="1" dirty="0">
+                <a:solidFill>
+                  <a:srgbClr val="EB6311"/>
+                </a:solidFill>
+                <a:latin typeface="Yu Gothic" pitchFamily="34" charset="0"/>
+                <a:ea typeface="Yu Gothic" pitchFamily="34" charset="-122"/>
+                <a:cs typeface="Yu Gothic" pitchFamily="34" charset="-120"/>
+              </a:rPr>
+              <a:t>Q</a:t>
+            </a:r>
+            <a:endParaRPr lang="en-US" sz="2200" dirty="0"/>
+          </a:p>
+        </p:txBody>
+      </p:sp>
+      <p:sp>
+        <p:nvSpPr>
+          <p:cNvPr id="16" name="Text 13"/>
+          <p:cNvSpPr/>
+          <p:nvPr/>
+        </p:nvSpPr>
+        <p:spPr>
+          <a:xfrm>
+            <a:off x="1810512" y="3794760"/>
+            <a:ext cx="4937760" cy="777240"/>
+          </a:xfrm>
+          <a:prstGeom prst="rect">
+            <a:avLst/>
+          </a:prstGeom>
+          <a:noFill/>
+          <a:ln/>
+        </p:spPr>
+        <p:txBody>
+          <a:bodyPr wrap="square" lIns="0" tIns="0" rIns="0" bIns="0" rtlCol="0" anchor="ctr"/>
+          <a:lstStyle/>
+          <a:p>
+            <a:pPr indent="0" marL="0">
+              <a:buNone/>
+            </a:pPr>
+            <a:r>
+              <a:rPr lang="en-US" sz="1700" dirty="0">
+                <a:solidFill>
+                  <a:srgbClr val="002060"/>
+                </a:solidFill>
+                <a:latin typeface="Yu Gothic" pitchFamily="34" charset="0"/>
+                <a:ea typeface="Yu Gothic" pitchFamily="34" charset="-122"/>
+                <a:cs typeface="Yu Gothic" pitchFamily="34" charset="-120"/>
+              </a:rPr>
+              <a:t>急ぎの手配のとき、誰に何を確認すればよい？</a:t>
+            </a:r>
+            <a:endParaRPr lang="en-US" sz="1700" dirty="0"/>
+          </a:p>
+        </p:txBody>
+      </p:sp>
+      <p:sp>
+        <p:nvSpPr>
+          <p:cNvPr id="17" name="Shape 14"/>
+          <p:cNvSpPr/>
+          <p:nvPr/>
+        </p:nvSpPr>
+        <p:spPr>
+          <a:xfrm>
+            <a:off x="1216152" y="5074920"/>
+            <a:ext cx="9820656" cy="0"/>
+          </a:xfrm>
+          <a:prstGeom prst="line">
+            <a:avLst/>
+          </a:prstGeom>
+          <a:noFill/>
+          <a:ln w="12700">
+            <a:solidFill>
+              <a:srgbClr val="E2E8F0"/>
+            </a:solidFill>
+            <a:prstDash val="solid"/>
+          </a:ln>
+        </p:spPr>
+      </p:sp>
+      <p:sp>
+        <p:nvSpPr>
+          <p:cNvPr id="18" name="Text 15"/>
+          <p:cNvSpPr/>
+          <p:nvPr/>
+        </p:nvSpPr>
+        <p:spPr>
+          <a:xfrm>
+            <a:off x="1216152" y="5166360"/>
+            <a:ext cx="9820656" cy="822960"/>
+          </a:xfrm>
+          <a:prstGeom prst="rect">
+            <a:avLst/>
+          </a:prstGeom>
+          <a:noFill/>
+          <a:ln/>
+        </p:spPr>
+        <p:txBody>
+          <a:bodyPr wrap="square" lIns="0" tIns="0" rIns="0" bIns="0" rtlCol="0" anchor="ctr"/>
+          <a:lstStyle/>
+          <a:p>
+            <a:pPr algn="ctr" indent="0" marL="0">
+              <a:buNone/>
+            </a:pPr>
+            <a:r>
+              <a:rPr lang="en-US" sz="1800" dirty="0">
+                <a:solidFill>
+                  <a:srgbClr val="334155"/>
+                </a:solidFill>
+                <a:latin typeface="Yu Gothic" pitchFamily="34" charset="0"/>
+                <a:ea typeface="Yu Gothic" pitchFamily="34" charset="-122"/>
+                <a:cs typeface="Yu Gothic" pitchFamily="34" charset="-120"/>
+              </a:rPr>
+              <a:t>さらに、見積の転記や発注書の作成など</a:t>
+            </a:r>
+            <a:endParaRPr lang="en-US" sz="1800" dirty="0"/>
+          </a:p>
+          <a:p>
+            <a:pPr algn="ctr" indent="0" marL="0">
+              <a:buNone/>
+            </a:pPr>
+            <a:r>
+              <a:rPr lang="en-US" sz="1800" b="1" dirty="0">
+                <a:solidFill>
+                  <a:srgbClr val="002060"/>
+                </a:solidFill>
+                <a:latin typeface="Yu Gothic" pitchFamily="34" charset="0"/>
+                <a:ea typeface="Yu Gothic" pitchFamily="34" charset="-122"/>
+                <a:cs typeface="Yu Gothic" pitchFamily="34" charset="-120"/>
+              </a:rPr>
+              <a:t>手作業そのものも、仕組みで減らせます</a:t>
+            </a:r>
+            <a:endParaRPr lang="en-US" sz="1800" dirty="0"/>
+          </a:p>
+        </p:txBody>
+      </p:sp>
+    </p:spTree>
+  </p:cSld>
+  <p:clrMapOvr>
+    <a:masterClrMapping/>
+  </p:clrMapOvr>
+</p:sld>
+</file>
+
+<file path=ppt/slides/slide7.xml><?xml version="1.0" encoding="utf-8"?>
+<p:sld xmlns:a="http://schemas.openxmlformats.org/drawingml/2006/main" xmlns:r="http://schemas.openxmlformats.org/officeDocument/2006/relationships" xmlns:p="http://schemas.openxmlformats.org/presentationml/2006/main">
+  <p:cSld name="Slide 7">
+    <p:bg>
+      <p:bgPr>
+        <a:solidFill>
+          <a:srgbClr val="FFFFFF"/>
+        </a:solidFill>
+      </p:bgPr>
+    </p:bg>
+    <p:spTree>
+      <p:nvGrpSpPr>
+        <p:cNvPr id="1" name=""/>
+        <p:cNvGrpSpPr/>
+        <p:nvPr/>
+      </p:nvGrpSpPr>
+      <p:grpSpPr>
+        <a:xfrm>
+          <a:off x="0" y="0"/>
+          <a:ext cx="0" cy="0"/>
+          <a:chOff x="0" y="0"/>
+          <a:chExt cx="0" cy="0"/>
+        </a:xfrm>
+      </p:grpSpPr>
+      <p:sp>
+        <p:nvSpPr>
+          <p:cNvPr id="2" name="Text 0"/>
+          <p:cNvSpPr/>
+          <p:nvPr/>
+        </p:nvSpPr>
+        <p:spPr>
+          <a:xfrm>
+            <a:off x="1216152" y="411480"/>
+            <a:ext cx="9820656" cy="548640"/>
+          </a:xfrm>
+          <a:prstGeom prst="rect">
+            <a:avLst/>
+          </a:prstGeom>
+          <a:noFill/>
+          <a:ln/>
+        </p:spPr>
+        <p:txBody>
+          <a:bodyPr wrap="square" lIns="0" tIns="0" rIns="0" bIns="0" rtlCol="0" anchor="ctr"/>
+          <a:lstStyle/>
+          <a:p>
+            <a:pPr indent="0" marL="0">
+              <a:buNone/>
+            </a:pPr>
+            <a:r>
+              <a:rPr lang="en-US" sz="2800" b="1" dirty="0">
+                <a:solidFill>
+                  <a:srgbClr val="002060"/>
+                </a:solidFill>
+                <a:latin typeface="Yu Gothic" pitchFamily="34" charset="0"/>
+                <a:ea typeface="Yu Gothic" pitchFamily="34" charset="-122"/>
+                <a:cs typeface="Yu Gothic" pitchFamily="34" charset="-120"/>
+              </a:rPr>
+              <a:t>調達業務で手間が生まれやすいところ</a:t>
+            </a:r>
+            <a:endParaRPr lang="en-US" sz="2800" dirty="0"/>
+          </a:p>
+        </p:txBody>
+      </p:sp>
+      <p:sp>
+        <p:nvSpPr>
+          <p:cNvPr id="3" name="Shape 1"/>
+          <p:cNvSpPr/>
+          <p:nvPr/>
+        </p:nvSpPr>
+        <p:spPr>
+          <a:xfrm>
+            <a:off x="1216152" y="1024128"/>
+            <a:ext cx="1097280" cy="0"/>
+          </a:xfrm>
+          <a:prstGeom prst="line">
+            <a:avLst/>
+          </a:prstGeom>
+          <a:noFill/>
+          <a:ln w="31750">
+            <a:solidFill>
+              <a:srgbClr val="EB6311"/>
+            </a:solidFill>
+            <a:prstDash val="solid"/>
+          </a:ln>
+        </p:spPr>
+      </p:sp>
+      <p:sp>
+        <p:nvSpPr>
+          <p:cNvPr id="4" name="Text 2"/>
+          <p:cNvSpPr/>
+          <p:nvPr/>
+        </p:nvSpPr>
+        <p:spPr>
+          <a:xfrm>
+            <a:off x="1216152" y="1115568"/>
+            <a:ext cx="9820656" cy="365760"/>
+          </a:xfrm>
+          <a:prstGeom prst="rect">
+            <a:avLst/>
+          </a:prstGeom>
+          <a:noFill/>
+          <a:ln/>
+        </p:spPr>
+        <p:txBody>
+          <a:bodyPr wrap="square" lIns="0" tIns="0" rIns="0" bIns="0" rtlCol="0" anchor="ctr"/>
+          <a:lstStyle/>
+          <a:p>
+            <a:pPr indent="0" marL="0">
+              <a:buNone/>
+            </a:pPr>
+            <a:r>
+              <a:rPr lang="en-US" sz="1500" dirty="0">
+                <a:solidFill>
+                  <a:srgbClr val="64748B"/>
+                </a:solidFill>
+                <a:latin typeface="Yu Gothic" pitchFamily="34" charset="0"/>
+                <a:ea typeface="Yu Gothic" pitchFamily="34" charset="-122"/>
+                <a:cs typeface="Yu Gothic" pitchFamily="34" charset="-120"/>
+              </a:rPr>
+              <a:t>設備工事業で一般的に見られる例です。貴社の実際のご状況を本日お伺いさせてください</a:t>
+            </a:r>
+            <a:endParaRPr lang="en-US" sz="1500" dirty="0"/>
+          </a:p>
+        </p:txBody>
+      </p:sp>
+      <p:pic>
+        <p:nvPicPr>
+          <p:cNvPr id="5" name="Image 0" descr="/home/user/-/tak-evac/src/assets/logo_t.png">    </p:cNvPr>
+          <p:cNvPicPr>
+            <a:picLocks noChangeAspect="1"/>
+          </p:cNvPicPr>
+          <p:nvPr/>
+        </p:nvPicPr>
+        <p:blipFill>
+          <a:blip r:embed="rId1"/>
+          <a:stretch>
+            <a:fillRect/>
+          </a:stretch>
+        </p:blipFill>
+        <p:spPr>
+          <a:xfrm>
+            <a:off x="228600" y="6199632"/>
+            <a:ext cx="457200" cy="457200"/>
+          </a:xfrm>
+          <a:prstGeom prst="rect">
+            <a:avLst/>
+          </a:prstGeom>
+        </p:spPr>
+      </p:pic>
+      <p:sp>
+        <p:nvSpPr>
+          <p:cNvPr id="6" name="Shape 3"/>
+          <p:cNvSpPr/>
+          <p:nvPr/>
+        </p:nvSpPr>
+        <p:spPr>
+          <a:xfrm>
+            <a:off x="1216152" y="1783080"/>
+            <a:ext cx="1730045" cy="1051560"/>
+          </a:xfrm>
+          <a:prstGeom prst="roundRect">
+            <a:avLst>
+              <a:gd name="adj" fmla="val 6957"/>
+            </a:avLst>
+          </a:prstGeom>
+          <a:solidFill>
+            <a:srgbClr val="002060"/>
+          </a:solidFill>
+          <a:ln/>
+        </p:spPr>
+      </p:sp>
+      <p:sp>
+        <p:nvSpPr>
+          <p:cNvPr id="7" name="Text 4"/>
+          <p:cNvSpPr/>
+          <p:nvPr/>
+        </p:nvSpPr>
+        <p:spPr>
+          <a:xfrm>
+            <a:off x="1216152" y="1783080"/>
+            <a:ext cx="1730045" cy="1051560"/>
+          </a:xfrm>
+          <a:prstGeom prst="rect">
+            <a:avLst/>
+          </a:prstGeom>
+          <a:noFill/>
+          <a:ln/>
+        </p:spPr>
+        <p:txBody>
+          <a:bodyPr wrap="square" lIns="0" tIns="0" rIns="0" bIns="0" rtlCol="0" anchor="ctr"/>
+          <a:lstStyle/>
+          <a:p>
+            <a:pPr algn="ctr" indent="0" marL="0">
+              <a:buNone/>
+            </a:pPr>
+            <a:r>
+              <a:rPr lang="en-US" sz="1700" b="1" dirty="0">
+                <a:solidFill>
+                  <a:srgbClr val="FFFFFF"/>
+                </a:solidFill>
+                <a:latin typeface="Yu Gothic" pitchFamily="34" charset="0"/>
+                <a:ea typeface="Yu Gothic" pitchFamily="34" charset="-122"/>
+                <a:cs typeface="Yu Gothic" pitchFamily="34" charset="-120"/>
+              </a:rPr>
+              <a:t>業者選定・</a:t>
+            </a:r>
+            <a:endParaRPr lang="en-US" sz="1700" dirty="0"/>
+          </a:p>
+          <a:p>
+            <a:pPr algn="ctr" indent="0" marL="0">
+              <a:buNone/>
+            </a:pPr>
+            <a:r>
+              <a:rPr lang="en-US" sz="1700" b="1" dirty="0">
+                <a:solidFill>
+                  <a:srgbClr val="FFFFFF"/>
+                </a:solidFill>
+                <a:latin typeface="Yu Gothic" pitchFamily="34" charset="0"/>
+                <a:ea typeface="Yu Gothic" pitchFamily="34" charset="-122"/>
+                <a:cs typeface="Yu Gothic" pitchFamily="34" charset="-120"/>
+              </a:rPr>
+              <a:t>見積依頼</a:t>
+            </a:r>
+            <a:endParaRPr lang="en-US" sz="1700" dirty="0"/>
+          </a:p>
+        </p:txBody>
+      </p:sp>
+      <p:sp>
+        <p:nvSpPr>
+          <p:cNvPr id="8" name="Shape 5"/>
+          <p:cNvSpPr/>
+          <p:nvPr/>
+        </p:nvSpPr>
+        <p:spPr>
+          <a:xfrm>
+            <a:off x="2991917" y="2180844"/>
+            <a:ext cx="201168" cy="256032"/>
+          </a:xfrm>
+          <a:prstGeom prst="rightArrow">
+            <a:avLst/>
+          </a:prstGeom>
+          <a:solidFill>
+            <a:srgbClr val="64748B"/>
+          </a:solidFill>
+          <a:ln/>
+        </p:spPr>
+      </p:sp>
+      <p:sp>
+        <p:nvSpPr>
+          <p:cNvPr id="9" name="Shape 6"/>
+          <p:cNvSpPr/>
+          <p:nvPr/>
+        </p:nvSpPr>
+        <p:spPr>
+          <a:xfrm>
+            <a:off x="1880006" y="2743200"/>
+            <a:ext cx="402336" cy="402336"/>
+          </a:xfrm>
+          <a:prstGeom prst="ellipse">
+            <a:avLst/>
+          </a:prstGeom>
+          <a:solidFill>
+            <a:srgbClr val="EB6311"/>
+          </a:solidFill>
+          <a:ln w="19050">
+            <a:solidFill>
+              <a:srgbClr val="FFFFFF"/>
+            </a:solidFill>
+            <a:prstDash val="solid"/>
+          </a:ln>
+        </p:spPr>
+      </p:sp>
+      <p:sp>
+        <p:nvSpPr>
+          <p:cNvPr id="10" name="Text 7"/>
+          <p:cNvSpPr/>
+          <p:nvPr/>
+        </p:nvSpPr>
+        <p:spPr>
+          <a:xfrm>
+            <a:off x="1880006" y="2743200"/>
+            <a:ext cx="402336" cy="402336"/>
+          </a:xfrm>
+          <a:prstGeom prst="rect">
+            <a:avLst/>
+          </a:prstGeom>
+          <a:noFill/>
+          <a:ln/>
+        </p:spPr>
+        <p:txBody>
+          <a:bodyPr wrap="square" lIns="0" tIns="0" rIns="0" bIns="0" rtlCol="0" anchor="ctr"/>
+          <a:lstStyle/>
+          <a:p>
+            <a:pPr algn="ctr" indent="0" marL="0">
+              <a:buNone/>
+            </a:pPr>
+            <a:r>
+              <a:rPr lang="en-US" sz="1600" b="1" dirty="0">
+                <a:solidFill>
+                  <a:srgbClr val="FFFFFF"/>
+                </a:solidFill>
+                <a:latin typeface="Yu Gothic" pitchFamily="34" charset="0"/>
+                <a:ea typeface="Yu Gothic" pitchFamily="34" charset="-122"/>
+                <a:cs typeface="Yu Gothic" pitchFamily="34" charset="-120"/>
+              </a:rPr>
+              <a:t>1</a:t>
+            </a:r>
+            <a:endParaRPr lang="en-US" sz="1600" dirty="0"/>
+          </a:p>
+        </p:txBody>
+      </p:sp>
+      <p:sp>
+        <p:nvSpPr>
+          <p:cNvPr id="11" name="Shape 8"/>
+          <p:cNvSpPr/>
+          <p:nvPr/>
+        </p:nvSpPr>
+        <p:spPr>
+          <a:xfrm>
+            <a:off x="3238805" y="1783080"/>
+            <a:ext cx="1730045" cy="1051560"/>
+          </a:xfrm>
+          <a:prstGeom prst="roundRect">
+            <a:avLst>
+              <a:gd name="adj" fmla="val 6957"/>
+            </a:avLst>
+          </a:prstGeom>
+          <a:solidFill>
+            <a:srgbClr val="002060"/>
+          </a:solidFill>
+          <a:ln/>
+        </p:spPr>
+      </p:sp>
+      <p:sp>
+        <p:nvSpPr>
+          <p:cNvPr id="12" name="Text 9"/>
+          <p:cNvSpPr/>
+          <p:nvPr/>
+        </p:nvSpPr>
+        <p:spPr>
+          <a:xfrm>
+            <a:off x="3238805" y="1783080"/>
+            <a:ext cx="1730045" cy="1051560"/>
+          </a:xfrm>
+          <a:prstGeom prst="rect">
+            <a:avLst/>
+          </a:prstGeom>
+          <a:noFill/>
+          <a:ln/>
+        </p:spPr>
+        <p:txBody>
+          <a:bodyPr wrap="square" lIns="0" tIns="0" rIns="0" bIns="0" rtlCol="0" anchor="ctr"/>
+          <a:lstStyle/>
+          <a:p>
+            <a:pPr algn="ctr" indent="0" marL="0">
+              <a:buNone/>
+            </a:pPr>
+            <a:r>
+              <a:rPr lang="en-US" sz="1700" b="1" dirty="0">
+                <a:solidFill>
+                  <a:srgbClr val="FFFFFF"/>
+                </a:solidFill>
+                <a:latin typeface="Yu Gothic" pitchFamily="34" charset="0"/>
+                <a:ea typeface="Yu Gothic" pitchFamily="34" charset="-122"/>
+                <a:cs typeface="Yu Gothic" pitchFamily="34" charset="-120"/>
+              </a:rPr>
+              <a:t>見積比較</a:t>
+            </a:r>
+            <a:endParaRPr lang="en-US" sz="1700" dirty="0"/>
+          </a:p>
+        </p:txBody>
+      </p:sp>
+      <p:sp>
+        <p:nvSpPr>
+          <p:cNvPr id="13" name="Shape 10"/>
+          <p:cNvSpPr/>
+          <p:nvPr/>
+        </p:nvSpPr>
+        <p:spPr>
+          <a:xfrm>
+            <a:off x="5014570" y="2180844"/>
+            <a:ext cx="201168" cy="256032"/>
+          </a:xfrm>
+          <a:prstGeom prst="rightArrow">
+            <a:avLst/>
+          </a:prstGeom>
+          <a:solidFill>
+            <a:srgbClr val="64748B"/>
+          </a:solidFill>
+          <a:ln/>
+        </p:spPr>
+      </p:sp>
+      <p:sp>
+        <p:nvSpPr>
+          <p:cNvPr id="14" name="Shape 11"/>
+          <p:cNvSpPr/>
+          <p:nvPr/>
+        </p:nvSpPr>
+        <p:spPr>
+          <a:xfrm>
+            <a:off x="3902659" y="2743200"/>
+            <a:ext cx="402336" cy="402336"/>
+          </a:xfrm>
+          <a:prstGeom prst="ellipse">
+            <a:avLst/>
+          </a:prstGeom>
+          <a:solidFill>
+            <a:srgbClr val="EB6311"/>
+          </a:solidFill>
+          <a:ln w="19050">
+            <a:solidFill>
+              <a:srgbClr val="FFFFFF"/>
+            </a:solidFill>
+            <a:prstDash val="solid"/>
+          </a:ln>
+        </p:spPr>
+      </p:sp>
+      <p:sp>
+        <p:nvSpPr>
+          <p:cNvPr id="15" name="Text 12"/>
+          <p:cNvSpPr/>
+          <p:nvPr/>
+        </p:nvSpPr>
+        <p:spPr>
+          <a:xfrm>
+            <a:off x="3902659" y="2743200"/>
+            <a:ext cx="402336" cy="402336"/>
+          </a:xfrm>
+          <a:prstGeom prst="rect">
+            <a:avLst/>
+          </a:prstGeom>
+          <a:noFill/>
+          <a:ln/>
+        </p:spPr>
+        <p:txBody>
+          <a:bodyPr wrap="square" lIns="0" tIns="0" rIns="0" bIns="0" rtlCol="0" anchor="ctr"/>
+          <a:lstStyle/>
+          <a:p>
+            <a:pPr algn="ctr" indent="0" marL="0">
+              <a:buNone/>
+            </a:pPr>
+            <a:r>
+              <a:rPr lang="en-US" sz="1600" b="1" dirty="0">
+                <a:solidFill>
+                  <a:srgbClr val="FFFFFF"/>
+                </a:solidFill>
+                <a:latin typeface="Yu Gothic" pitchFamily="34" charset="0"/>
+                <a:ea typeface="Yu Gothic" pitchFamily="34" charset="-122"/>
+                <a:cs typeface="Yu Gothic" pitchFamily="34" charset="-120"/>
+              </a:rPr>
+              <a:t>2</a:t>
+            </a:r>
+            <a:endParaRPr lang="en-US" sz="1600" dirty="0"/>
+          </a:p>
+        </p:txBody>
+      </p:sp>
+      <p:sp>
+        <p:nvSpPr>
+          <p:cNvPr id="16" name="Shape 13"/>
+          <p:cNvSpPr/>
+          <p:nvPr/>
+        </p:nvSpPr>
+        <p:spPr>
+          <a:xfrm>
+            <a:off x="5261458" y="1783080"/>
+            <a:ext cx="1730045" cy="1051560"/>
+          </a:xfrm>
+          <a:prstGeom prst="roundRect">
+            <a:avLst>
+              <a:gd name="adj" fmla="val 6957"/>
+            </a:avLst>
+          </a:prstGeom>
+          <a:solidFill>
+            <a:srgbClr val="002060"/>
+          </a:solidFill>
+          <a:ln/>
+        </p:spPr>
+      </p:sp>
+      <p:sp>
+        <p:nvSpPr>
+          <p:cNvPr id="17" name="Text 14"/>
+          <p:cNvSpPr/>
+          <p:nvPr/>
+        </p:nvSpPr>
+        <p:spPr>
+          <a:xfrm>
+            <a:off x="5261458" y="1783080"/>
+            <a:ext cx="1730045" cy="1051560"/>
+          </a:xfrm>
+          <a:prstGeom prst="rect">
+            <a:avLst/>
+          </a:prstGeom>
+          <a:noFill/>
+          <a:ln/>
+        </p:spPr>
+        <p:txBody>
+          <a:bodyPr wrap="square" lIns="0" tIns="0" rIns="0" bIns="0" rtlCol="0" anchor="ctr"/>
+          <a:lstStyle/>
+          <a:p>
+            <a:pPr algn="ctr" indent="0" marL="0">
+              <a:buNone/>
+            </a:pPr>
+            <a:r>
+              <a:rPr lang="en-US" sz="1700" b="1" dirty="0">
+                <a:solidFill>
+                  <a:srgbClr val="FFFFFF"/>
+                </a:solidFill>
+                <a:latin typeface="Yu Gothic" pitchFamily="34" charset="0"/>
+                <a:ea typeface="Yu Gothic" pitchFamily="34" charset="-122"/>
+                <a:cs typeface="Yu Gothic" pitchFamily="34" charset="-120"/>
+              </a:rPr>
+              <a:t>発注</a:t>
+            </a:r>
+            <a:endParaRPr lang="en-US" sz="1700" dirty="0"/>
+          </a:p>
+        </p:txBody>
+      </p:sp>
+      <p:sp>
+        <p:nvSpPr>
+          <p:cNvPr id="18" name="Shape 15"/>
+          <p:cNvSpPr/>
+          <p:nvPr/>
+        </p:nvSpPr>
+        <p:spPr>
+          <a:xfrm>
+            <a:off x="7037222" y="2180844"/>
+            <a:ext cx="201168" cy="256032"/>
+          </a:xfrm>
+          <a:prstGeom prst="rightArrow">
+            <a:avLst/>
+          </a:prstGeom>
+          <a:solidFill>
+            <a:srgbClr val="64748B"/>
+          </a:solidFill>
+          <a:ln/>
+        </p:spPr>
+      </p:sp>
+      <p:sp>
+        <p:nvSpPr>
+          <p:cNvPr id="19" name="Shape 16"/>
+          <p:cNvSpPr/>
+          <p:nvPr/>
+        </p:nvSpPr>
+        <p:spPr>
+          <a:xfrm>
+            <a:off x="5925312" y="2743200"/>
+            <a:ext cx="402336" cy="402336"/>
+          </a:xfrm>
+          <a:prstGeom prst="ellipse">
+            <a:avLst/>
+          </a:prstGeom>
+          <a:solidFill>
+            <a:srgbClr val="EB6311"/>
+          </a:solidFill>
+          <a:ln w="19050">
+            <a:solidFill>
+              <a:srgbClr val="FFFFFF"/>
+            </a:solidFill>
+            <a:prstDash val="solid"/>
+          </a:ln>
+        </p:spPr>
+      </p:sp>
+      <p:sp>
+        <p:nvSpPr>
+          <p:cNvPr id="20" name="Text 17"/>
+          <p:cNvSpPr/>
+          <p:nvPr/>
+        </p:nvSpPr>
+        <p:spPr>
+          <a:xfrm>
+            <a:off x="5925312" y="2743200"/>
+            <a:ext cx="402336" cy="402336"/>
+          </a:xfrm>
+          <a:prstGeom prst="rect">
+            <a:avLst/>
+          </a:prstGeom>
+          <a:noFill/>
+          <a:ln/>
+        </p:spPr>
+        <p:txBody>
+          <a:bodyPr wrap="square" lIns="0" tIns="0" rIns="0" bIns="0" rtlCol="0" anchor="ctr"/>
+          <a:lstStyle/>
+          <a:p>
+            <a:pPr algn="ctr" indent="0" marL="0">
+              <a:buNone/>
+            </a:pPr>
+            <a:r>
+              <a:rPr lang="en-US" sz="1600" b="1" dirty="0">
+                <a:solidFill>
+                  <a:srgbClr val="FFFFFF"/>
+                </a:solidFill>
+                <a:latin typeface="Yu Gothic" pitchFamily="34" charset="0"/>
+                <a:ea typeface="Yu Gothic" pitchFamily="34" charset="-122"/>
+                <a:cs typeface="Yu Gothic" pitchFamily="34" charset="-120"/>
+              </a:rPr>
+              <a:t>3</a:t>
+            </a:r>
+            <a:endParaRPr lang="en-US" sz="1600" dirty="0"/>
+          </a:p>
+        </p:txBody>
+      </p:sp>
+      <p:sp>
+        <p:nvSpPr>
+          <p:cNvPr id="21" name="Shape 18"/>
+          <p:cNvSpPr/>
+          <p:nvPr/>
+        </p:nvSpPr>
+        <p:spPr>
+          <a:xfrm>
+            <a:off x="7284110" y="1783080"/>
+            <a:ext cx="1730045" cy="1051560"/>
+          </a:xfrm>
+          <a:prstGeom prst="roundRect">
+            <a:avLst>
+              <a:gd name="adj" fmla="val 6957"/>
+            </a:avLst>
+          </a:prstGeom>
+          <a:solidFill>
+            <a:srgbClr val="002060"/>
+          </a:solidFill>
+          <a:ln/>
+        </p:spPr>
+      </p:sp>
+      <p:sp>
+        <p:nvSpPr>
+          <p:cNvPr id="22" name="Text 19"/>
+          <p:cNvSpPr/>
+          <p:nvPr/>
+        </p:nvSpPr>
+        <p:spPr>
+          <a:xfrm>
+            <a:off x="7284110" y="1783080"/>
+            <a:ext cx="1730045" cy="1051560"/>
+          </a:xfrm>
+          <a:prstGeom prst="rect">
+            <a:avLst/>
+          </a:prstGeom>
+          <a:noFill/>
+          <a:ln/>
+        </p:spPr>
+        <p:txBody>
+          <a:bodyPr wrap="square" lIns="0" tIns="0" rIns="0" bIns="0" rtlCol="0" anchor="ctr"/>
+          <a:lstStyle/>
+          <a:p>
+            <a:pPr algn="ctr" indent="0" marL="0">
+              <a:buNone/>
+            </a:pPr>
+            <a:r>
+              <a:rPr lang="en-US" sz="1700" b="1" dirty="0">
+                <a:solidFill>
+                  <a:srgbClr val="FFFFFF"/>
+                </a:solidFill>
+                <a:latin typeface="Yu Gothic" pitchFamily="34" charset="0"/>
+                <a:ea typeface="Yu Gothic" pitchFamily="34" charset="-122"/>
+                <a:cs typeface="Yu Gothic" pitchFamily="34" charset="-120"/>
+              </a:rPr>
+              <a:t>納期・</a:t>
+            </a:r>
+            <a:endParaRPr lang="en-US" sz="1700" dirty="0"/>
+          </a:p>
+          <a:p>
+            <a:pPr algn="ctr" indent="0" marL="0">
+              <a:buNone/>
+            </a:pPr>
+            <a:r>
+              <a:rPr lang="en-US" sz="1700" b="1" dirty="0">
+                <a:solidFill>
+                  <a:srgbClr val="FFFFFF"/>
+                </a:solidFill>
+                <a:latin typeface="Yu Gothic" pitchFamily="34" charset="0"/>
+                <a:ea typeface="Yu Gothic" pitchFamily="34" charset="-122"/>
+                <a:cs typeface="Yu Gothic" pitchFamily="34" charset="-120"/>
+              </a:rPr>
+              <a:t>手配状況の管理</a:t>
+            </a:r>
+            <a:endParaRPr lang="en-US" sz="1700" dirty="0"/>
+          </a:p>
+        </p:txBody>
+      </p:sp>
+      <p:sp>
+        <p:nvSpPr>
+          <p:cNvPr id="23" name="Shape 20"/>
+          <p:cNvSpPr/>
+          <p:nvPr/>
+        </p:nvSpPr>
+        <p:spPr>
+          <a:xfrm>
+            <a:off x="9059875" y="2180844"/>
+            <a:ext cx="201168" cy="256032"/>
+          </a:xfrm>
+          <a:prstGeom prst="rightArrow">
+            <a:avLst/>
+          </a:prstGeom>
+          <a:solidFill>
+            <a:srgbClr val="64748B"/>
+          </a:solidFill>
+          <a:ln/>
+        </p:spPr>
+      </p:sp>
+      <p:sp>
+        <p:nvSpPr>
+          <p:cNvPr id="24" name="Shape 21"/>
+          <p:cNvSpPr/>
+          <p:nvPr/>
+        </p:nvSpPr>
+        <p:spPr>
+          <a:xfrm>
+            <a:off x="7947965" y="2743200"/>
+            <a:ext cx="402336" cy="402336"/>
+          </a:xfrm>
+          <a:prstGeom prst="ellipse">
+            <a:avLst/>
+          </a:prstGeom>
+          <a:solidFill>
+            <a:srgbClr val="EB6311"/>
+          </a:solidFill>
+          <a:ln w="19050">
+            <a:solidFill>
+              <a:srgbClr val="FFFFFF"/>
+            </a:solidFill>
+            <a:prstDash val="solid"/>
+          </a:ln>
+        </p:spPr>
+      </p:sp>
+      <p:sp>
+        <p:nvSpPr>
+          <p:cNvPr id="25" name="Text 22"/>
+          <p:cNvSpPr/>
+          <p:nvPr/>
+        </p:nvSpPr>
+        <p:spPr>
+          <a:xfrm>
+            <a:off x="7947965" y="2743200"/>
+            <a:ext cx="402336" cy="402336"/>
+          </a:xfrm>
+          <a:prstGeom prst="rect">
+            <a:avLst/>
+          </a:prstGeom>
+          <a:noFill/>
+          <a:ln/>
+        </p:spPr>
+        <p:txBody>
+          <a:bodyPr wrap="square" lIns="0" tIns="0" rIns="0" bIns="0" rtlCol="0" anchor="ctr"/>
+          <a:lstStyle/>
+          <a:p>
+            <a:pPr algn="ctr" indent="0" marL="0">
+              <a:buNone/>
+            </a:pPr>
+            <a:r>
+              <a:rPr lang="en-US" sz="1600" b="1" dirty="0">
+                <a:solidFill>
+                  <a:srgbClr val="FFFFFF"/>
+                </a:solidFill>
+                <a:latin typeface="Yu Gothic" pitchFamily="34" charset="0"/>
+                <a:ea typeface="Yu Gothic" pitchFamily="34" charset="-122"/>
+                <a:cs typeface="Yu Gothic" pitchFamily="34" charset="-120"/>
+              </a:rPr>
+              <a:t>4</a:t>
+            </a:r>
+            <a:endParaRPr lang="en-US" sz="1600" dirty="0"/>
+          </a:p>
+        </p:txBody>
+      </p:sp>
+      <p:sp>
+        <p:nvSpPr>
+          <p:cNvPr id="26" name="Shape 23"/>
+          <p:cNvSpPr/>
+          <p:nvPr/>
+        </p:nvSpPr>
+        <p:spPr>
+          <a:xfrm>
+            <a:off x="9306763" y="1783080"/>
+            <a:ext cx="1730045" cy="1051560"/>
+          </a:xfrm>
+          <a:prstGeom prst="roundRect">
+            <a:avLst>
+              <a:gd name="adj" fmla="val 6957"/>
+            </a:avLst>
+          </a:prstGeom>
+          <a:solidFill>
+            <a:srgbClr val="002060"/>
+          </a:solidFill>
+          <a:ln/>
+        </p:spPr>
+      </p:sp>
+      <p:sp>
+        <p:nvSpPr>
+          <p:cNvPr id="27" name="Text 24"/>
+          <p:cNvSpPr/>
+          <p:nvPr/>
+        </p:nvSpPr>
+        <p:spPr>
+          <a:xfrm>
+            <a:off x="9306763" y="1783080"/>
+            <a:ext cx="1730045" cy="1051560"/>
+          </a:xfrm>
+          <a:prstGeom prst="rect">
+            <a:avLst/>
+          </a:prstGeom>
+          <a:noFill/>
+          <a:ln/>
+        </p:spPr>
+        <p:txBody>
+          <a:bodyPr wrap="square" lIns="0" tIns="0" rIns="0" bIns="0" rtlCol="0" anchor="ctr"/>
+          <a:lstStyle/>
+          <a:p>
+            <a:pPr algn="ctr" indent="0" marL="0">
+              <a:buNone/>
+            </a:pPr>
+            <a:r>
+              <a:rPr lang="en-US" sz="1700" b="1" dirty="0">
+                <a:solidFill>
+                  <a:srgbClr val="FFFFFF"/>
+                </a:solidFill>
+                <a:latin typeface="Yu Gothic" pitchFamily="34" charset="0"/>
+                <a:ea typeface="Yu Gothic" pitchFamily="34" charset="-122"/>
+                <a:cs typeface="Yu Gothic" pitchFamily="34" charset="-120"/>
+              </a:rPr>
+              <a:t>検収・支払</a:t>
+            </a:r>
+            <a:endParaRPr lang="en-US" sz="1700" dirty="0"/>
+          </a:p>
+        </p:txBody>
+      </p:sp>
+      <p:sp>
+        <p:nvSpPr>
+          <p:cNvPr id="28" name="Shape 25"/>
+          <p:cNvSpPr/>
+          <p:nvPr/>
+        </p:nvSpPr>
+        <p:spPr>
+          <a:xfrm>
+            <a:off x="1216152" y="3547872"/>
+            <a:ext cx="402336" cy="402336"/>
+          </a:xfrm>
+          <a:prstGeom prst="ellipse">
+            <a:avLst/>
+          </a:prstGeom>
+          <a:solidFill>
+            <a:srgbClr val="EB6311"/>
+          </a:solidFill>
+          <a:ln/>
+        </p:spPr>
+      </p:sp>
+      <p:sp>
+        <p:nvSpPr>
+          <p:cNvPr id="29" name="Text 26"/>
+          <p:cNvSpPr/>
+          <p:nvPr/>
+        </p:nvSpPr>
+        <p:spPr>
+          <a:xfrm>
+            <a:off x="1216152" y="3547872"/>
+            <a:ext cx="402336" cy="402336"/>
+          </a:xfrm>
+          <a:prstGeom prst="rect">
+            <a:avLst/>
+          </a:prstGeom>
+          <a:noFill/>
+          <a:ln/>
+        </p:spPr>
+        <p:txBody>
+          <a:bodyPr wrap="square" lIns="0" tIns="0" rIns="0" bIns="0" rtlCol="0" anchor="ctr"/>
+          <a:lstStyle/>
+          <a:p>
+            <a:pPr algn="ctr" indent="0" marL="0">
+              <a:buNone/>
+            </a:pPr>
+            <a:r>
+              <a:rPr lang="en-US" sz="1600" b="1" dirty="0">
+                <a:solidFill>
+                  <a:srgbClr val="FFFFFF"/>
+                </a:solidFill>
+                <a:latin typeface="Yu Gothic" pitchFamily="34" charset="0"/>
+                <a:ea typeface="Yu Gothic" pitchFamily="34" charset="-122"/>
+                <a:cs typeface="Yu Gothic" pitchFamily="34" charset="-120"/>
+              </a:rPr>
+              <a:t>1</a:t>
+            </a:r>
+            <a:endParaRPr lang="en-US" sz="1600" dirty="0"/>
+          </a:p>
+        </p:txBody>
+      </p:sp>
+      <p:sp>
+        <p:nvSpPr>
+          <p:cNvPr id="30" name="Text 27"/>
+          <p:cNvSpPr/>
+          <p:nvPr/>
+        </p:nvSpPr>
+        <p:spPr>
+          <a:xfrm>
+            <a:off x="1764792" y="3429000"/>
+            <a:ext cx="4133088" cy="640080"/>
+          </a:xfrm>
+          <a:prstGeom prst="rect">
+            <a:avLst/>
+          </a:prstGeom>
+          <a:noFill/>
+          <a:ln/>
+        </p:spPr>
+        <p:txBody>
+          <a:bodyPr wrap="square" lIns="0" tIns="0" rIns="0" bIns="0" rtlCol="0" anchor="ctr"/>
+          <a:lstStyle/>
+          <a:p>
+            <a:pPr indent="0" marL="0">
+              <a:buNone/>
+            </a:pPr>
+            <a:r>
+              <a:rPr lang="en-US" sz="1700" dirty="0">
+                <a:solidFill>
+                  <a:srgbClr val="334155"/>
+                </a:solidFill>
+                <a:latin typeface="Yu Gothic" pitchFamily="34" charset="0"/>
+                <a:ea typeface="Yu Gothic" pitchFamily="34" charset="-122"/>
+                <a:cs typeface="Yu Gothic" pitchFamily="34" charset="-120"/>
+              </a:rPr>
+              <a:t>取引先の経営状況の確認が、新規取引時の一度きりになっている</a:t>
+            </a:r>
+            <a:endParaRPr lang="en-US" sz="1700" dirty="0"/>
+          </a:p>
+        </p:txBody>
+      </p:sp>
+      <p:sp>
+        <p:nvSpPr>
+          <p:cNvPr id="31" name="Shape 28"/>
+          <p:cNvSpPr/>
+          <p:nvPr/>
+        </p:nvSpPr>
+        <p:spPr>
+          <a:xfrm>
+            <a:off x="6126480" y="3547872"/>
+            <a:ext cx="402336" cy="402336"/>
+          </a:xfrm>
+          <a:prstGeom prst="ellipse">
+            <a:avLst/>
+          </a:prstGeom>
+          <a:solidFill>
+            <a:srgbClr val="EB6311"/>
+          </a:solidFill>
+          <a:ln/>
+        </p:spPr>
+      </p:sp>
+      <p:sp>
+        <p:nvSpPr>
+          <p:cNvPr id="32" name="Text 29"/>
+          <p:cNvSpPr/>
+          <p:nvPr/>
+        </p:nvSpPr>
+        <p:spPr>
+          <a:xfrm>
+            <a:off x="6126480" y="3547872"/>
+            <a:ext cx="402336" cy="402336"/>
+          </a:xfrm>
+          <a:prstGeom prst="rect">
+            <a:avLst/>
+          </a:prstGeom>
+          <a:noFill/>
+          <a:ln/>
+        </p:spPr>
+        <p:txBody>
+          <a:bodyPr wrap="square" lIns="0" tIns="0" rIns="0" bIns="0" rtlCol="0" anchor="ctr"/>
+          <a:lstStyle/>
+          <a:p>
+            <a:pPr algn="ctr" indent="0" marL="0">
+              <a:buNone/>
+            </a:pPr>
+            <a:r>
+              <a:rPr lang="en-US" sz="1600" b="1" dirty="0">
+                <a:solidFill>
+                  <a:srgbClr val="FFFFFF"/>
+                </a:solidFill>
+                <a:latin typeface="Yu Gothic" pitchFamily="34" charset="0"/>
+                <a:ea typeface="Yu Gothic" pitchFamily="34" charset="-122"/>
+                <a:cs typeface="Yu Gothic" pitchFamily="34" charset="-120"/>
+              </a:rPr>
+              <a:t>2</a:t>
+            </a:r>
+            <a:endParaRPr lang="en-US" sz="1600" dirty="0"/>
+          </a:p>
+        </p:txBody>
+      </p:sp>
+      <p:sp>
+        <p:nvSpPr>
+          <p:cNvPr id="33" name="Text 30"/>
+          <p:cNvSpPr/>
+          <p:nvPr/>
+        </p:nvSpPr>
+        <p:spPr>
+          <a:xfrm>
+            <a:off x="6675120" y="3429000"/>
+            <a:ext cx="4133088" cy="640080"/>
+          </a:xfrm>
+          <a:prstGeom prst="rect">
+            <a:avLst/>
+          </a:prstGeom>
+          <a:noFill/>
+          <a:ln/>
+        </p:spPr>
+        <p:txBody>
+          <a:bodyPr wrap="square" lIns="0" tIns="0" rIns="0" bIns="0" rtlCol="0" anchor="ctr"/>
+          <a:lstStyle/>
+          <a:p>
+            <a:pPr indent="0" marL="0">
+              <a:buNone/>
+            </a:pPr>
+            <a:r>
+              <a:rPr lang="en-US" sz="1700" dirty="0">
+                <a:solidFill>
+                  <a:srgbClr val="334155"/>
+                </a:solidFill>
+                <a:latin typeface="Yu Gothic" pitchFamily="34" charset="0"/>
+                <a:ea typeface="Yu Gothic" pitchFamily="34" charset="-122"/>
+                <a:cs typeface="Yu Gothic" pitchFamily="34" charset="-120"/>
+              </a:rPr>
+              <a:t>複数業者の見積（PDF・紙・Excel）を、比較表へ手で転記している</a:t>
+            </a:r>
+            <a:endParaRPr lang="en-US" sz="1700" dirty="0"/>
+          </a:p>
+        </p:txBody>
+      </p:sp>
+      <p:sp>
+        <p:nvSpPr>
+          <p:cNvPr id="34" name="Shape 31"/>
+          <p:cNvSpPr/>
+          <p:nvPr/>
+        </p:nvSpPr>
+        <p:spPr>
+          <a:xfrm>
+            <a:off x="1216152" y="4462272"/>
+            <a:ext cx="402336" cy="402336"/>
+          </a:xfrm>
+          <a:prstGeom prst="ellipse">
+            <a:avLst/>
+          </a:prstGeom>
+          <a:solidFill>
+            <a:srgbClr val="EB6311"/>
+          </a:solidFill>
+          <a:ln/>
+        </p:spPr>
+      </p:sp>
+      <p:sp>
+        <p:nvSpPr>
+          <p:cNvPr id="35" name="Text 32"/>
+          <p:cNvSpPr/>
+          <p:nvPr/>
+        </p:nvSpPr>
+        <p:spPr>
+          <a:xfrm>
+            <a:off x="1216152" y="4462272"/>
+            <a:ext cx="402336" cy="402336"/>
+          </a:xfrm>
+          <a:prstGeom prst="rect">
+            <a:avLst/>
+          </a:prstGeom>
+          <a:noFill/>
+          <a:ln/>
+        </p:spPr>
+        <p:txBody>
+          <a:bodyPr wrap="square" lIns="0" tIns="0" rIns="0" bIns="0" rtlCol="0" anchor="ctr"/>
+          <a:lstStyle/>
+          <a:p>
+            <a:pPr algn="ctr" indent="0" marL="0">
+              <a:buNone/>
+            </a:pPr>
+            <a:r>
+              <a:rPr lang="en-US" sz="1600" b="1" dirty="0">
+                <a:solidFill>
+                  <a:srgbClr val="FFFFFF"/>
+                </a:solidFill>
+                <a:latin typeface="Yu Gothic" pitchFamily="34" charset="0"/>
+                <a:ea typeface="Yu Gothic" pitchFamily="34" charset="-122"/>
+                <a:cs typeface="Yu Gothic" pitchFamily="34" charset="-120"/>
+              </a:rPr>
+              <a:t>3</a:t>
+            </a:r>
+            <a:endParaRPr lang="en-US" sz="1600" dirty="0"/>
+          </a:p>
+        </p:txBody>
+      </p:sp>
+      <p:sp>
+        <p:nvSpPr>
+          <p:cNvPr id="36" name="Text 33"/>
+          <p:cNvSpPr/>
+          <p:nvPr/>
+        </p:nvSpPr>
+        <p:spPr>
+          <a:xfrm>
+            <a:off x="1764792" y="4343400"/>
+            <a:ext cx="4133088" cy="640080"/>
+          </a:xfrm>
+          <a:prstGeom prst="rect">
+            <a:avLst/>
+          </a:prstGeom>
+          <a:noFill/>
+          <a:ln/>
+        </p:spPr>
+        <p:txBody>
+          <a:bodyPr wrap="square" lIns="0" tIns="0" rIns="0" bIns="0" rtlCol="0" anchor="ctr"/>
+          <a:lstStyle/>
+          <a:p>
+            <a:pPr indent="0" marL="0">
+              <a:buNone/>
+            </a:pPr>
+            <a:r>
+              <a:rPr lang="en-US" sz="1700" dirty="0">
+                <a:solidFill>
+                  <a:srgbClr val="334155"/>
+                </a:solidFill>
+                <a:latin typeface="Yu Gothic" pitchFamily="34" charset="0"/>
+                <a:ea typeface="Yu Gothic" pitchFamily="34" charset="-122"/>
+                <a:cs typeface="Yu Gothic" pitchFamily="34" charset="-120"/>
+              </a:rPr>
+              <a:t>発注書を作り、基幹システムにも同じ内容を入力している</a:t>
+            </a:r>
+            <a:endParaRPr lang="en-US" sz="1700" dirty="0"/>
+          </a:p>
+        </p:txBody>
+      </p:sp>
+      <p:sp>
+        <p:nvSpPr>
+          <p:cNvPr id="37" name="Shape 34"/>
+          <p:cNvSpPr/>
+          <p:nvPr/>
+        </p:nvSpPr>
+        <p:spPr>
+          <a:xfrm>
+            <a:off x="6126480" y="4462272"/>
+            <a:ext cx="402336" cy="402336"/>
+          </a:xfrm>
+          <a:prstGeom prst="ellipse">
+            <a:avLst/>
+          </a:prstGeom>
+          <a:solidFill>
+            <a:srgbClr val="EB6311"/>
+          </a:solidFill>
+          <a:ln/>
+        </p:spPr>
+      </p:sp>
+      <p:sp>
+        <p:nvSpPr>
+          <p:cNvPr id="38" name="Text 35"/>
+          <p:cNvSpPr/>
+          <p:nvPr/>
+        </p:nvSpPr>
+        <p:spPr>
+          <a:xfrm>
+            <a:off x="6126480" y="4462272"/>
+            <a:ext cx="402336" cy="402336"/>
+          </a:xfrm>
+          <a:prstGeom prst="rect">
+            <a:avLst/>
+          </a:prstGeom>
+          <a:noFill/>
+          <a:ln/>
+        </p:spPr>
+        <p:txBody>
+          <a:bodyPr wrap="square" lIns="0" tIns="0" rIns="0" bIns="0" rtlCol="0" anchor="ctr"/>
+          <a:lstStyle/>
+          <a:p>
+            <a:pPr algn="ctr" indent="0" marL="0">
+              <a:buNone/>
+            </a:pPr>
+            <a:r>
+              <a:rPr lang="en-US" sz="1600" b="1" dirty="0">
+                <a:solidFill>
+                  <a:srgbClr val="FFFFFF"/>
+                </a:solidFill>
+                <a:latin typeface="Yu Gothic" pitchFamily="34" charset="0"/>
+                <a:ea typeface="Yu Gothic" pitchFamily="34" charset="-122"/>
+                <a:cs typeface="Yu Gothic" pitchFamily="34" charset="-120"/>
+              </a:rPr>
+              <a:t>4</a:t>
+            </a:r>
+            <a:endParaRPr lang="en-US" sz="1600" dirty="0"/>
+          </a:p>
+        </p:txBody>
+      </p:sp>
+      <p:sp>
+        <p:nvSpPr>
+          <p:cNvPr id="39" name="Text 36"/>
+          <p:cNvSpPr/>
+          <p:nvPr/>
+        </p:nvSpPr>
+        <p:spPr>
+          <a:xfrm>
+            <a:off x="6675120" y="4343400"/>
+            <a:ext cx="4133088" cy="640080"/>
+          </a:xfrm>
+          <a:prstGeom prst="rect">
+            <a:avLst/>
+          </a:prstGeom>
+          <a:noFill/>
+          <a:ln/>
+        </p:spPr>
+        <p:txBody>
+          <a:bodyPr wrap="square" lIns="0" tIns="0" rIns="0" bIns="0" rtlCol="0" anchor="ctr"/>
+          <a:lstStyle/>
+          <a:p>
+            <a:pPr indent="0" marL="0">
+              <a:buNone/>
+            </a:pPr>
+            <a:r>
+              <a:rPr lang="en-US" sz="1700" dirty="0">
+                <a:solidFill>
+                  <a:srgbClr val="334155"/>
+                </a:solidFill>
+                <a:latin typeface="Yu Gothic" pitchFamily="34" charset="0"/>
+                <a:ea typeface="Yu Gothic" pitchFamily="34" charset="-122"/>
+                <a:cs typeface="Yu Gothic" pitchFamily="34" charset="-120"/>
+              </a:rPr>
+              <a:t>現場ごとの手配状況が、担当者のExcelやメールに分散している</a:t>
+            </a:r>
+            <a:endParaRPr lang="en-US" sz="1700" dirty="0"/>
+          </a:p>
+        </p:txBody>
+      </p:sp>
+      <p:sp>
+        <p:nvSpPr>
+          <p:cNvPr id="40" name="Text 37"/>
+          <p:cNvSpPr/>
+          <p:nvPr/>
+        </p:nvSpPr>
+        <p:spPr>
+          <a:xfrm>
+            <a:off x="1216152" y="5440680"/>
+            <a:ext cx="9820656" cy="502920"/>
+          </a:xfrm>
+          <a:prstGeom prst="rect">
+            <a:avLst/>
+          </a:prstGeom>
+          <a:noFill/>
+          <a:ln/>
+        </p:spPr>
+        <p:txBody>
+          <a:bodyPr wrap="square" lIns="0" tIns="0" rIns="0" bIns="0" rtlCol="0" anchor="ctr"/>
+          <a:lstStyle/>
+          <a:p>
+            <a:pPr algn="ctr" indent="0" marL="0">
+              <a:buNone/>
+            </a:pPr>
+            <a:r>
+              <a:rPr lang="en-US" sz="1800" b="1" dirty="0">
+                <a:solidFill>
+                  <a:srgbClr val="002060"/>
+                </a:solidFill>
+                <a:latin typeface="Yu Gothic" pitchFamily="34" charset="0"/>
+                <a:ea typeface="Yu Gothic" pitchFamily="34" charset="-122"/>
+                <a:cs typeface="Yu Gothic" pitchFamily="34" charset="-120"/>
+              </a:rPr>
+              <a:t>当てはまるもの・当てはまらないもの、ほかのお困りごとをお聞かせください</a:t>
+            </a:r>
+            <a:endParaRPr lang="en-US" sz="1800" dirty="0"/>
+          </a:p>
+        </p:txBody>
+      </p:sp>
+    </p:spTree>
+  </p:cSld>
+  <p:clrMapOvr>
+    <a:masterClrMapping/>
+  </p:clrMapOvr>
+</p:sld>
+</file>
+
+<file path=ppt/slides/slide8.xml><?xml version="1.0" encoding="utf-8"?>
+<p:sld xmlns:a="http://schemas.openxmlformats.org/drawingml/2006/main" xmlns:r="http://schemas.openxmlformats.org/officeDocument/2006/relationships" xmlns:p="http://schemas.openxmlformats.org/presentationml/2006/main">
+  <p:cSld name="Slide 8">
+    <p:bg>
+      <p:bgPr>
+        <a:solidFill>
+          <a:srgbClr val="FFFFFF"/>
+        </a:solidFill>
+      </p:bgPr>
+    </p:bg>
+    <p:spTree>
+      <p:nvGrpSpPr>
+        <p:cNvPr id="1" name=""/>
+        <p:cNvGrpSpPr/>
+        <p:nvPr/>
+      </p:nvGrpSpPr>
+      <p:grpSpPr>
+        <a:xfrm>
+          <a:off x="0" y="0"/>
+          <a:ext cx="0" cy="0"/>
+          <a:chOff x="0" y="0"/>
+          <a:chExt cx="0" cy="0"/>
+        </a:xfrm>
+      </p:grpSpPr>
+      <p:sp>
+        <p:nvSpPr>
+          <p:cNvPr id="2" name="Text 0"/>
+          <p:cNvSpPr/>
+          <p:nvPr/>
+        </p:nvSpPr>
+        <p:spPr>
+          <a:xfrm>
+            <a:off x="1216152" y="411480"/>
+            <a:ext cx="9820656" cy="548640"/>
+          </a:xfrm>
+          <a:prstGeom prst="rect">
+            <a:avLst/>
+          </a:prstGeom>
+          <a:noFill/>
+          <a:ln/>
+        </p:spPr>
+        <p:txBody>
+          <a:bodyPr wrap="square" lIns="0" tIns="0" rIns="0" bIns="0" rtlCol="0" anchor="ctr"/>
+          <a:lstStyle/>
+          <a:p>
+            <a:pPr indent="0" marL="0">
+              <a:buNone/>
+            </a:pPr>
+            <a:r>
+              <a:rPr lang="en-US" sz="2800" b="1" dirty="0">
+                <a:solidFill>
+                  <a:srgbClr val="002060"/>
+                </a:solidFill>
+                <a:latin typeface="Yu Gothic" pitchFamily="34" charset="0"/>
+                <a:ea typeface="Yu Gothic" pitchFamily="34" charset="-122"/>
+                <a:cs typeface="Yu Gothic" pitchFamily="34" charset="-120"/>
+              </a:rPr>
+              <a:t>お手伝いできることの例</a:t>
+            </a:r>
+            <a:endParaRPr lang="en-US" sz="2800" dirty="0"/>
+          </a:p>
+        </p:txBody>
+      </p:sp>
+      <p:sp>
+        <p:nvSpPr>
+          <p:cNvPr id="3" name="Shape 1"/>
+          <p:cNvSpPr/>
+          <p:nvPr/>
+        </p:nvSpPr>
+        <p:spPr>
+          <a:xfrm>
+            <a:off x="1216152" y="1024128"/>
+            <a:ext cx="1097280" cy="0"/>
+          </a:xfrm>
+          <a:prstGeom prst="line">
+            <a:avLst/>
+          </a:prstGeom>
+          <a:noFill/>
+          <a:ln w="31750">
+            <a:solidFill>
+              <a:srgbClr val="EB6311"/>
+            </a:solidFill>
+            <a:prstDash val="solid"/>
+          </a:ln>
+        </p:spPr>
+      </p:sp>
+      <p:sp>
+        <p:nvSpPr>
+          <p:cNvPr id="4" name="Text 2"/>
+          <p:cNvSpPr/>
+          <p:nvPr/>
+        </p:nvSpPr>
+        <p:spPr>
+          <a:xfrm>
+            <a:off x="1216152" y="1115568"/>
+            <a:ext cx="9820656" cy="365760"/>
+          </a:xfrm>
+          <a:prstGeom prst="rect">
+            <a:avLst/>
+          </a:prstGeom>
+          <a:noFill/>
+          <a:ln/>
+        </p:spPr>
+        <p:txBody>
+          <a:bodyPr wrap="square" lIns="0" tIns="0" rIns="0" bIns="0" rtlCol="0" anchor="ctr"/>
+          <a:lstStyle/>
+          <a:p>
+            <a:pPr indent="0" marL="0">
+              <a:buNone/>
+            </a:pPr>
+            <a:r>
+              <a:rPr lang="en-US" sz="1500" dirty="0">
+                <a:solidFill>
+                  <a:srgbClr val="64748B"/>
+                </a:solidFill>
+                <a:latin typeface="Yu Gothic" pitchFamily="34" charset="0"/>
+                <a:ea typeface="Yu Gothic" pitchFamily="34" charset="-122"/>
+                <a:cs typeface="Yu Gothic" pitchFamily="34" charset="-120"/>
+              </a:rPr>
+              <a:t>伺ったお困りごとに合わせて、大きな仕組みと小さな改善を組み合わせます</a:t>
+            </a:r>
+            <a:endParaRPr lang="en-US" sz="1500" dirty="0"/>
+          </a:p>
+        </p:txBody>
+      </p:sp>
+      <p:pic>
+        <p:nvPicPr>
+          <p:cNvPr id="5" name="Image 0" descr="/home/user/-/tak-evac/src/assets/logo_t.png">    </p:cNvPr>
+          <p:cNvPicPr>
+            <a:picLocks noChangeAspect="1"/>
+          </p:cNvPicPr>
+          <p:nvPr/>
+        </p:nvPicPr>
+        <p:blipFill>
+          <a:blip r:embed="rId1"/>
+          <a:stretch>
+            <a:fillRect/>
+          </a:stretch>
+        </p:blipFill>
+        <p:spPr>
+          <a:xfrm>
+            <a:off x="228600" y="6199632"/>
+            <a:ext cx="457200" cy="457200"/>
+          </a:xfrm>
+          <a:prstGeom prst="rect">
+            <a:avLst/>
+          </a:prstGeom>
+        </p:spPr>
+      </p:pic>
       <p:graphicFrame>
         <p:nvGraphicFramePr>
-          <p:cNvPr id="6" name="Table 0"/>
+          <p:cNvPr id="9" name="Table 0"/>
           <p:cNvGraphicFramePr>
             <a:graphicFrameLocks noGrp="1"/>
           </p:cNvGraphicFramePr>
@@ -4915,7 +8256,7 @@
           </p:nvPr>
         </p:nvGraphicFramePr>
         <p:xfrm>
-          <a:off x="1216152" y="1691640"/>
+          <a:off x="1216152" y="1645920"/>
           <a:ext cx="9820656" cy="914400"/>
         </p:xfrm>
         <a:graphic>
@@ -4923,11 +8264,11 @@
             <a:tbl>
               <a:tblPr/>
               <a:tblGrid>
-                <a:gridCol w="2514600"/>
-                <a:gridCol w="5020056"/>
+                <a:gridCol w="2606040"/>
+                <a:gridCol w="4928616"/>
                 <a:gridCol w="2286000"/>
               </a:tblGrid>
-              <a:tr h="804672">
+              <a:tr h="713232">
                 <a:tc>
                   <a:txBody>
                     <a:bodyPr/>
@@ -4945,7 +8286,7 @@
                           <a:ea typeface="Yu Gothic" pitchFamily="34" charset="-122"/>
                           <a:cs typeface="Yu Gothic" pitchFamily="34" charset="-120"/>
                         </a:rPr>
-                        <a:t>手間の例</a:t>
+                        <a:t>お困りごとの例</a:t>
                       </a:r>
                       <a:endParaRPr lang="en-US" sz="1600" dirty="0">
                         <a:latin typeface="Yu Gothic" charset="0"/>
@@ -4954,7 +8295,7 @@
                       </a:endParaRPr>
                     </a:p>
                   </a:txBody>
-                  <a:tcPr marL="137160" marR="137160" marT="54864" marB="54864" anchor="ctr">
+                  <a:tcPr marL="137160" marR="137160" marT="45720" marB="45720" anchor="ctr">
                     <a:lnL w="9525" cap="flat" cmpd="sng" algn="ctr">
                       <a:solidFill>
                         <a:srgbClr val="E2E8F0"/>
@@ -5022,7 +8363,7 @@
                       </a:endParaRPr>
                     </a:p>
                   </a:txBody>
-                  <a:tcPr marL="137160" marR="137160" marT="54864" marB="54864" anchor="ctr">
+                  <a:tcPr marL="137160" marR="137160" marT="45720" marB="45720" anchor="ctr">
                     <a:lnL w="9525" cap="flat" cmpd="sng" algn="ctr">
                       <a:solidFill>
                         <a:srgbClr val="E2E8F0"/>
@@ -5090,7 +8431,7 @@
                       </a:endParaRPr>
                     </a:p>
                   </a:txBody>
-                  <a:tcPr marL="137160" marR="137160" marT="54864" marB="54864" anchor="ctr">
+                  <a:tcPr marL="137160" marR="137160" marT="45720" marB="45720" anchor="ctr">
                     <a:lnL w="9525" cap="flat" cmpd="sng" algn="ctr">
                       <a:solidFill>
                         <a:srgbClr val="E2E8F0"/>
@@ -5133,7 +8474,7 @@
                   </a:tcPr>
                 </a:tc>
               </a:tr>
-              <a:tr h="804672">
+              <a:tr h="713232">
                 <a:tc>
                   <a:txBody>
                     <a:bodyPr/>
@@ -5143,24 +8484,24 @@
                         <a:buNone/>
                       </a:pPr>
                       <a:r>
-                        <a:rPr lang="en-US" sz="1600" b="1" dirty="0">
+                        <a:rPr lang="en-US" sz="1500" b="1" dirty="0">
                           <a:solidFill>
-                            <a:srgbClr val="002060"/>
+                            <a:srgbClr val="EB6311"/>
                           </a:solidFill>
                           <a:latin typeface="Yu Gothic" pitchFamily="34" charset="0"/>
                           <a:ea typeface="Yu Gothic" pitchFamily="34" charset="-122"/>
                           <a:cs typeface="Yu Gothic" pitchFamily="34" charset="-120"/>
                         </a:rPr>
-                        <a:t>① 取引先の与信確認</a:t>
+                        <a:t>ベテランへの確認の集中</a:t>
                       </a:r>
-                      <a:endParaRPr lang="en-US" sz="1600" dirty="0">
+                      <a:endParaRPr lang="en-US" sz="1500" dirty="0">
                         <a:latin typeface="Yu Gothic" charset="0"/>
                         <a:ea typeface="Yu Gothic" charset="0"/>
                         <a:cs typeface="Yu Gothic" charset="0"/>
                       </a:endParaRPr>
                     </a:p>
                   </a:txBody>
-                  <a:tcPr marL="137160" marR="137160" marT="54864" marB="54864" anchor="ctr">
+                  <a:tcPr marL="137160" marR="137160" marT="45720" marB="45720" anchor="ctr">
                     <a:lnL w="9525" cap="flat" cmpd="sng" algn="ctr">
                       <a:solidFill>
                         <a:srgbClr val="E2E8F0"/>
@@ -5208,7 +8549,7 @@
                         <a:buNone/>
                       </a:pPr>
                       <a:r>
-                        <a:rPr lang="en-US" sz="1600" dirty="0">
+                        <a:rPr lang="en-US" sz="1500" dirty="0">
                           <a:solidFill>
                             <a:srgbClr val="334155"/>
                           </a:solidFill>
@@ -5216,16 +8557,16 @@
                           <a:ea typeface="Yu Gothic" pitchFamily="34" charset="-122"/>
                           <a:cs typeface="Yu Gothic" pitchFamily="34" charset="-120"/>
                         </a:rPr>
-                        <a:t>与信情報を定期的に取得し、変化があれば担当者へ通知する</a:t>
+                        <a:t>会話から知恵を貯め、若手が質問して引き出せるようにする</a:t>
                       </a:r>
-                      <a:endParaRPr lang="en-US" sz="1600" dirty="0">
+                      <a:endParaRPr lang="en-US" sz="1500" dirty="0">
                         <a:latin typeface="Yu Gothic" charset="0"/>
                         <a:ea typeface="Yu Gothic" charset="0"/>
                         <a:cs typeface="Yu Gothic" charset="0"/>
                       </a:endParaRPr>
                     </a:p>
                   </a:txBody>
-                  <a:tcPr marL="137160" marR="137160" marT="54864" marB="54864" anchor="ctr">
+                  <a:tcPr marL="137160" marR="137160" marT="45720" marB="45720" anchor="ctr">
                     <a:lnL w="9525" cap="flat" cmpd="sng" algn="ctr">
                       <a:solidFill>
                         <a:srgbClr val="E2E8F0"/>
@@ -5273,7 +8614,7 @@
                         <a:buNone/>
                       </a:pPr>
                       <a:r>
-                        <a:rPr lang="en-US" sz="1600" dirty="0">
+                        <a:rPr lang="en-US" sz="1500" dirty="0">
                           <a:solidFill>
                             <a:srgbClr val="64748B"/>
                           </a:solidFill>
@@ -5281,16 +8622,16 @@
                           <a:ea typeface="Yu Gothic" pitchFamily="34" charset="-122"/>
                           <a:cs typeface="Yu Gothic" pitchFamily="34" charset="-120"/>
                         </a:rPr>
-                        <a:t>与信管理DX</a:t>
+                        <a:t>議事録AI・AIデータ統合</a:t>
                       </a:r>
-                      <a:endParaRPr lang="en-US" sz="1600" dirty="0">
+                      <a:endParaRPr lang="en-US" sz="1500" dirty="0">
                         <a:latin typeface="Yu Gothic" charset="0"/>
                         <a:ea typeface="Yu Gothic" charset="0"/>
                         <a:cs typeface="Yu Gothic" charset="0"/>
                       </a:endParaRPr>
                     </a:p>
                   </a:txBody>
-                  <a:tcPr marL="137160" marR="137160" marT="54864" marB="54864" anchor="ctr">
+                  <a:tcPr marL="137160" marR="137160" marT="45720" marB="45720" anchor="ctr">
                     <a:lnL w="9525" cap="flat" cmpd="sng" algn="ctr">
                       <a:solidFill>
                         <a:srgbClr val="E2E8F0"/>
@@ -5330,7 +8671,7 @@
                   </a:tcPr>
                 </a:tc>
               </a:tr>
-              <a:tr h="804672">
+              <a:tr h="713232">
                 <a:tc>
                   <a:txBody>
                     <a:bodyPr/>
@@ -5340,7 +8681,7 @@
                         <a:buNone/>
                       </a:pPr>
                       <a:r>
-                        <a:rPr lang="en-US" sz="1600" b="1" dirty="0">
+                        <a:rPr lang="en-US" sz="1500" b="1" dirty="0">
                           <a:solidFill>
                             <a:srgbClr val="002060"/>
                           </a:solidFill>
@@ -5348,16 +8689,16 @@
                           <a:ea typeface="Yu Gothic" pitchFamily="34" charset="-122"/>
                           <a:cs typeface="Yu Gothic" pitchFamily="34" charset="-120"/>
                         </a:rPr>
-                        <a:t>② 見積の比較</a:t>
+                        <a:t>① 取引先の与信確認</a:t>
                       </a:r>
-                      <a:endParaRPr lang="en-US" sz="1600" dirty="0">
+                      <a:endParaRPr lang="en-US" sz="1500" dirty="0">
                         <a:latin typeface="Yu Gothic" charset="0"/>
                         <a:ea typeface="Yu Gothic" charset="0"/>
                         <a:cs typeface="Yu Gothic" charset="0"/>
                       </a:endParaRPr>
                     </a:p>
                   </a:txBody>
-                  <a:tcPr marL="137160" marR="137160" marT="54864" marB="54864" anchor="ctr">
+                  <a:tcPr marL="137160" marR="137160" marT="45720" marB="45720" anchor="ctr">
                     <a:lnL w="9525" cap="flat" cmpd="sng" algn="ctr">
                       <a:solidFill>
                         <a:srgbClr val="E2E8F0"/>
@@ -5405,7 +8746,7 @@
                         <a:buNone/>
                       </a:pPr>
                       <a:r>
-                        <a:rPr lang="en-US" sz="1600" dirty="0">
+                        <a:rPr lang="en-US" sz="1500" dirty="0">
                           <a:solidFill>
                             <a:srgbClr val="334155"/>
                           </a:solidFill>
@@ -5413,16 +8754,16 @@
                           <a:ea typeface="Yu Gothic" pitchFamily="34" charset="-122"/>
                           <a:cs typeface="Yu Gothic" pitchFamily="34" charset="-120"/>
                         </a:rPr>
-                        <a:t>見積書の内容を読み取り、比較表へ自動で反映する</a:t>
+                        <a:t>与信情報を定期的に取得し、変化があれば担当者へ通知する</a:t>
                       </a:r>
-                      <a:endParaRPr lang="en-US" sz="1600" dirty="0">
+                      <a:endParaRPr lang="en-US" sz="1500" dirty="0">
                         <a:latin typeface="Yu Gothic" charset="0"/>
                         <a:ea typeface="Yu Gothic" charset="0"/>
                         <a:cs typeface="Yu Gothic" charset="0"/>
                       </a:endParaRPr>
                     </a:p>
                   </a:txBody>
-                  <a:tcPr marL="137160" marR="137160" marT="54864" marB="54864" anchor="ctr">
+                  <a:tcPr marL="137160" marR="137160" marT="45720" marB="45720" anchor="ctr">
                     <a:lnL w="9525" cap="flat" cmpd="sng" algn="ctr">
                       <a:solidFill>
                         <a:srgbClr val="E2E8F0"/>
@@ -5470,7 +8811,7 @@
                         <a:buNone/>
                       </a:pPr>
                       <a:r>
-                        <a:rPr lang="en-US" sz="1600" dirty="0">
+                        <a:rPr lang="en-US" sz="1500" dirty="0">
                           <a:solidFill>
                             <a:srgbClr val="64748B"/>
                           </a:solidFill>
@@ -5478,16 +8819,16 @@
                           <a:ea typeface="Yu Gothic" pitchFamily="34" charset="-122"/>
                           <a:cs typeface="Yu Gothic" pitchFamily="34" charset="-120"/>
                         </a:rPr>
-                        <a:t>RPA・AI</a:t>
+                        <a:t>与信管理DX</a:t>
                       </a:r>
-                      <a:endParaRPr lang="en-US" sz="1600" dirty="0">
+                      <a:endParaRPr lang="en-US" sz="1500" dirty="0">
                         <a:latin typeface="Yu Gothic" charset="0"/>
                         <a:ea typeface="Yu Gothic" charset="0"/>
                         <a:cs typeface="Yu Gothic" charset="0"/>
                       </a:endParaRPr>
                     </a:p>
                   </a:txBody>
-                  <a:tcPr marL="137160" marR="137160" marT="54864" marB="54864" anchor="ctr">
+                  <a:tcPr marL="137160" marR="137160" marT="45720" marB="45720" anchor="ctr">
                     <a:lnL w="9525" cap="flat" cmpd="sng" algn="ctr">
                       <a:solidFill>
                         <a:srgbClr val="E2E8F0"/>
@@ -5527,7 +8868,7 @@
                   </a:tcPr>
                 </a:tc>
               </a:tr>
-              <a:tr h="804672">
+              <a:tr h="713232">
                 <a:tc>
                   <a:txBody>
                     <a:bodyPr/>
@@ -5537,7 +8878,7 @@
                         <a:buNone/>
                       </a:pPr>
                       <a:r>
-                        <a:rPr lang="en-US" sz="1600" b="1" dirty="0">
+                        <a:rPr lang="en-US" sz="1500" b="1" dirty="0">
                           <a:solidFill>
                             <a:srgbClr val="002060"/>
                           </a:solidFill>
@@ -5545,16 +8886,16 @@
                           <a:ea typeface="Yu Gothic" pitchFamily="34" charset="-122"/>
                           <a:cs typeface="Yu Gothic" pitchFamily="34" charset="-120"/>
                         </a:rPr>
-                        <a:t>③ 発注書の作成・入力</a:t>
+                        <a:t>② 見積の比較</a:t>
                       </a:r>
-                      <a:endParaRPr lang="en-US" sz="1600" dirty="0">
+                      <a:endParaRPr lang="en-US" sz="1500" dirty="0">
                         <a:latin typeface="Yu Gothic" charset="0"/>
                         <a:ea typeface="Yu Gothic" charset="0"/>
                         <a:cs typeface="Yu Gothic" charset="0"/>
                       </a:endParaRPr>
                     </a:p>
                   </a:txBody>
-                  <a:tcPr marL="137160" marR="137160" marT="54864" marB="54864" anchor="ctr">
+                  <a:tcPr marL="137160" marR="137160" marT="45720" marB="45720" anchor="ctr">
                     <a:lnL w="9525" cap="flat" cmpd="sng" algn="ctr">
                       <a:solidFill>
                         <a:srgbClr val="E2E8F0"/>
@@ -5602,7 +8943,7 @@
                         <a:buNone/>
                       </a:pPr>
                       <a:r>
-                        <a:rPr lang="en-US" sz="1600" dirty="0">
+                        <a:rPr lang="en-US" sz="1500" dirty="0">
                           <a:solidFill>
                             <a:srgbClr val="334155"/>
                           </a:solidFill>
@@ -5610,16 +8951,16 @@
                           <a:ea typeface="Yu Gothic" pitchFamily="34" charset="-122"/>
                           <a:cs typeface="Yu Gothic" pitchFamily="34" charset="-120"/>
                         </a:rPr>
-                        <a:t>決まった手順の作成・転記・システム入力をロボットが代行する</a:t>
+                        <a:t>見積書の内容を読み取り、比較表へ自動で反映する</a:t>
                       </a:r>
-                      <a:endParaRPr lang="en-US" sz="1600" dirty="0">
+                      <a:endParaRPr lang="en-US" sz="1500" dirty="0">
                         <a:latin typeface="Yu Gothic" charset="0"/>
                         <a:ea typeface="Yu Gothic" charset="0"/>
                         <a:cs typeface="Yu Gothic" charset="0"/>
                       </a:endParaRPr>
                     </a:p>
                   </a:txBody>
-                  <a:tcPr marL="137160" marR="137160" marT="54864" marB="54864" anchor="ctr">
+                  <a:tcPr marL="137160" marR="137160" marT="45720" marB="45720" anchor="ctr">
                     <a:lnL w="9525" cap="flat" cmpd="sng" algn="ctr">
                       <a:solidFill>
                         <a:srgbClr val="E2E8F0"/>
@@ -5667,7 +9008,7 @@
                         <a:buNone/>
                       </a:pPr>
                       <a:r>
-                        <a:rPr lang="en-US" sz="1600" dirty="0">
+                        <a:rPr lang="en-US" sz="1500" dirty="0">
                           <a:solidFill>
                             <a:srgbClr val="64748B"/>
                           </a:solidFill>
@@ -5675,16 +9016,16 @@
                           <a:ea typeface="Yu Gothic" pitchFamily="34" charset="-122"/>
                           <a:cs typeface="Yu Gothic" pitchFamily="34" charset="-120"/>
                         </a:rPr>
-                        <a:t>RPA</a:t>
+                        <a:t>RPA・AI</a:t>
                       </a:r>
-                      <a:endParaRPr lang="en-US" sz="1600" dirty="0">
+                      <a:endParaRPr lang="en-US" sz="1500" dirty="0">
                         <a:latin typeface="Yu Gothic" charset="0"/>
                         <a:ea typeface="Yu Gothic" charset="0"/>
                         <a:cs typeface="Yu Gothic" charset="0"/>
                       </a:endParaRPr>
                     </a:p>
                   </a:txBody>
-                  <a:tcPr marL="137160" marR="137160" marT="54864" marB="54864" anchor="ctr">
+                  <a:tcPr marL="137160" marR="137160" marT="45720" marB="45720" anchor="ctr">
                     <a:lnL w="9525" cap="flat" cmpd="sng" algn="ctr">
                       <a:solidFill>
                         <a:srgbClr val="E2E8F0"/>
@@ -5724,7 +9065,7 @@
                   </a:tcPr>
                 </a:tc>
               </a:tr>
-              <a:tr h="804672">
+              <a:tr h="713232">
                 <a:tc>
                   <a:txBody>
                     <a:bodyPr/>
@@ -5734,7 +9075,7 @@
                         <a:buNone/>
                       </a:pPr>
                       <a:r>
-                        <a:rPr lang="en-US" sz="1600" b="1" dirty="0">
+                        <a:rPr lang="en-US" sz="1500" b="1" dirty="0">
                           <a:solidFill>
                             <a:srgbClr val="002060"/>
                           </a:solidFill>
@@ -5742,16 +9083,16 @@
                           <a:ea typeface="Yu Gothic" pitchFamily="34" charset="-122"/>
                           <a:cs typeface="Yu Gothic" pitchFamily="34" charset="-120"/>
                         </a:rPr>
-                        <a:t>④ 手配状況の管理</a:t>
+                        <a:t>③ 発注書の作成・入力</a:t>
                       </a:r>
-                      <a:endParaRPr lang="en-US" sz="1600" dirty="0">
+                      <a:endParaRPr lang="en-US" sz="1500" dirty="0">
                         <a:latin typeface="Yu Gothic" charset="0"/>
                         <a:ea typeface="Yu Gothic" charset="0"/>
                         <a:cs typeface="Yu Gothic" charset="0"/>
                       </a:endParaRPr>
                     </a:p>
                   </a:txBody>
-                  <a:tcPr marL="137160" marR="137160" marT="54864" marB="54864" anchor="ctr">
+                  <a:tcPr marL="137160" marR="137160" marT="45720" marB="45720" anchor="ctr">
                     <a:lnL w="9525" cap="flat" cmpd="sng" algn="ctr">
                       <a:solidFill>
                         <a:srgbClr val="E2E8F0"/>
@@ -5799,7 +9140,7 @@
                         <a:buNone/>
                       </a:pPr>
                       <a:r>
-                        <a:rPr lang="en-US" sz="1600" dirty="0">
+                        <a:rPr lang="en-US" sz="1500" dirty="0">
                           <a:solidFill>
                             <a:srgbClr val="334155"/>
                           </a:solidFill>
@@ -5807,16 +9148,16 @@
                           <a:ea typeface="Yu Gothic" pitchFamily="34" charset="-122"/>
                           <a:cs typeface="Yu Gothic" pitchFamily="34" charset="-120"/>
                         </a:rPr>
-                        <a:t>現場・発注・納期の情報を一か所に集め、一覧で見られるようにする</a:t>
+                        <a:t>決まった手順の作成・転記・システム入力をロボットが代行する</a:t>
                       </a:r>
-                      <a:endParaRPr lang="en-US" sz="1600" dirty="0">
+                      <a:endParaRPr lang="en-US" sz="1500" dirty="0">
                         <a:latin typeface="Yu Gothic" charset="0"/>
                         <a:ea typeface="Yu Gothic" charset="0"/>
                         <a:cs typeface="Yu Gothic" charset="0"/>
                       </a:endParaRPr>
                     </a:p>
                   </a:txBody>
-                  <a:tcPr marL="137160" marR="137160" marT="54864" marB="54864" anchor="ctr">
+                  <a:tcPr marL="137160" marR="137160" marT="45720" marB="45720" anchor="ctr">
                     <a:lnL w="9525" cap="flat" cmpd="sng" algn="ctr">
                       <a:solidFill>
                         <a:srgbClr val="E2E8F0"/>
@@ -5864,7 +9205,204 @@
                         <a:buNone/>
                       </a:pPr>
                       <a:r>
-                        <a:rPr lang="en-US" sz="1600" dirty="0">
+                        <a:rPr lang="en-US" sz="1500" dirty="0">
+                          <a:solidFill>
+                            <a:srgbClr val="64748B"/>
+                          </a:solidFill>
+                          <a:latin typeface="Yu Gothic" pitchFamily="34" charset="0"/>
+                          <a:ea typeface="Yu Gothic" pitchFamily="34" charset="-122"/>
+                          <a:cs typeface="Yu Gothic" pitchFamily="34" charset="-120"/>
+                        </a:rPr>
+                        <a:t>RPA</a:t>
+                      </a:r>
+                      <a:endParaRPr lang="en-US" sz="1500" dirty="0">
+                        <a:latin typeface="Yu Gothic" charset="0"/>
+                        <a:ea typeface="Yu Gothic" charset="0"/>
+                        <a:cs typeface="Yu Gothic" charset="0"/>
+                      </a:endParaRPr>
+                    </a:p>
+                  </a:txBody>
+                  <a:tcPr marL="137160" marR="137160" marT="45720" marB="45720" anchor="ctr">
+                    <a:lnL w="9525" cap="flat" cmpd="sng" algn="ctr">
+                      <a:solidFill>
+                        <a:srgbClr val="E2E8F0"/>
+                      </a:solidFill>
+                      <a:prstDash val="solid"/>
+                      <a:round/>
+                      <a:headEnd type="none" w="med" len="med"/>
+                      <a:tailEnd type="none" w="med" len="med"/>
+                    </a:lnL>
+                    <a:lnR w="9525" cap="flat" cmpd="sng" algn="ctr">
+                      <a:solidFill>
+                        <a:srgbClr val="E2E8F0"/>
+                      </a:solidFill>
+                      <a:prstDash val="solid"/>
+                      <a:round/>
+                      <a:headEnd type="none" w="med" len="med"/>
+                      <a:tailEnd type="none" w="med" len="med"/>
+                    </a:lnR>
+                    <a:lnT w="9525" cap="flat" cmpd="sng" algn="ctr">
+                      <a:solidFill>
+                        <a:srgbClr val="E2E8F0"/>
+                      </a:solidFill>
+                      <a:prstDash val="solid"/>
+                      <a:round/>
+                      <a:headEnd type="none" w="med" len="med"/>
+                      <a:tailEnd type="none" w="med" len="med"/>
+                    </a:lnT>
+                    <a:lnB w="9525" cap="flat" cmpd="sng" algn="ctr">
+                      <a:solidFill>
+                        <a:srgbClr val="E2E8F0"/>
+                      </a:solidFill>
+                      <a:prstDash val="solid"/>
+                      <a:round/>
+                      <a:headEnd type="none" w="med" len="med"/>
+                      <a:tailEnd type="none" w="med" len="med"/>
+                    </a:lnB>
+                  </a:tcPr>
+                </a:tc>
+              </a:tr>
+              <a:tr h="713232">
+                <a:tc>
+                  <a:txBody>
+                    <a:bodyPr/>
+                    <a:lstStyle/>
+                    <a:p>
+                      <a:pPr indent="0" marL="0">
+                        <a:buNone/>
+                      </a:pPr>
+                      <a:r>
+                        <a:rPr lang="en-US" sz="1500" b="1" dirty="0">
+                          <a:solidFill>
+                            <a:srgbClr val="002060"/>
+                          </a:solidFill>
+                          <a:latin typeface="Yu Gothic" pitchFamily="34" charset="0"/>
+                          <a:ea typeface="Yu Gothic" pitchFamily="34" charset="-122"/>
+                          <a:cs typeface="Yu Gothic" pitchFamily="34" charset="-120"/>
+                        </a:rPr>
+                        <a:t>④ 手配状況の管理</a:t>
+                      </a:r>
+                      <a:endParaRPr lang="en-US" sz="1500" dirty="0">
+                        <a:latin typeface="Yu Gothic" charset="0"/>
+                        <a:ea typeface="Yu Gothic" charset="0"/>
+                        <a:cs typeface="Yu Gothic" charset="0"/>
+                      </a:endParaRPr>
+                    </a:p>
+                  </a:txBody>
+                  <a:tcPr marL="137160" marR="137160" marT="45720" marB="45720" anchor="ctr">
+                    <a:lnL w="9525" cap="flat" cmpd="sng" algn="ctr">
+                      <a:solidFill>
+                        <a:srgbClr val="E2E8F0"/>
+                      </a:solidFill>
+                      <a:prstDash val="solid"/>
+                      <a:round/>
+                      <a:headEnd type="none" w="med" len="med"/>
+                      <a:tailEnd type="none" w="med" len="med"/>
+                    </a:lnL>
+                    <a:lnR w="9525" cap="flat" cmpd="sng" algn="ctr">
+                      <a:solidFill>
+                        <a:srgbClr val="E2E8F0"/>
+                      </a:solidFill>
+                      <a:prstDash val="solid"/>
+                      <a:round/>
+                      <a:headEnd type="none" w="med" len="med"/>
+                      <a:tailEnd type="none" w="med" len="med"/>
+                    </a:lnR>
+                    <a:lnT w="9525" cap="flat" cmpd="sng" algn="ctr">
+                      <a:solidFill>
+                        <a:srgbClr val="E2E8F0"/>
+                      </a:solidFill>
+                      <a:prstDash val="solid"/>
+                      <a:round/>
+                      <a:headEnd type="none" w="med" len="med"/>
+                      <a:tailEnd type="none" w="med" len="med"/>
+                    </a:lnT>
+                    <a:lnB w="9525" cap="flat" cmpd="sng" algn="ctr">
+                      <a:solidFill>
+                        <a:srgbClr val="E2E8F0"/>
+                      </a:solidFill>
+                      <a:prstDash val="solid"/>
+                      <a:round/>
+                      <a:headEnd type="none" w="med" len="med"/>
+                      <a:tailEnd type="none" w="med" len="med"/>
+                    </a:lnB>
+                  </a:tcPr>
+                </a:tc>
+                <a:tc>
+                  <a:txBody>
+                    <a:bodyPr/>
+                    <a:lstStyle/>
+                    <a:p>
+                      <a:pPr indent="0" marL="0">
+                        <a:buNone/>
+                      </a:pPr>
+                      <a:r>
+                        <a:rPr lang="en-US" sz="1500" dirty="0">
+                          <a:solidFill>
+                            <a:srgbClr val="334155"/>
+                          </a:solidFill>
+                          <a:latin typeface="Yu Gothic" pitchFamily="34" charset="0"/>
+                          <a:ea typeface="Yu Gothic" pitchFamily="34" charset="-122"/>
+                          <a:cs typeface="Yu Gothic" pitchFamily="34" charset="-120"/>
+                        </a:rPr>
+                        <a:t>現場・発注・納期の情報を一か所に集め、一覧で見られるようにする</a:t>
+                      </a:r>
+                      <a:endParaRPr lang="en-US" sz="1500" dirty="0">
+                        <a:latin typeface="Yu Gothic" charset="0"/>
+                        <a:ea typeface="Yu Gothic" charset="0"/>
+                        <a:cs typeface="Yu Gothic" charset="0"/>
+                      </a:endParaRPr>
+                    </a:p>
+                  </a:txBody>
+                  <a:tcPr marL="137160" marR="137160" marT="45720" marB="45720" anchor="ctr">
+                    <a:lnL w="9525" cap="flat" cmpd="sng" algn="ctr">
+                      <a:solidFill>
+                        <a:srgbClr val="E2E8F0"/>
+                      </a:solidFill>
+                      <a:prstDash val="solid"/>
+                      <a:round/>
+                      <a:headEnd type="none" w="med" len="med"/>
+                      <a:tailEnd type="none" w="med" len="med"/>
+                    </a:lnL>
+                    <a:lnR w="9525" cap="flat" cmpd="sng" algn="ctr">
+                      <a:solidFill>
+                        <a:srgbClr val="E2E8F0"/>
+                      </a:solidFill>
+                      <a:prstDash val="solid"/>
+                      <a:round/>
+                      <a:headEnd type="none" w="med" len="med"/>
+                      <a:tailEnd type="none" w="med" len="med"/>
+                    </a:lnR>
+                    <a:lnT w="9525" cap="flat" cmpd="sng" algn="ctr">
+                      <a:solidFill>
+                        <a:srgbClr val="E2E8F0"/>
+                      </a:solidFill>
+                      <a:prstDash val="solid"/>
+                      <a:round/>
+                      <a:headEnd type="none" w="med" len="med"/>
+                      <a:tailEnd type="none" w="med" len="med"/>
+                    </a:lnT>
+                    <a:lnB w="9525" cap="flat" cmpd="sng" algn="ctr">
+                      <a:solidFill>
+                        <a:srgbClr val="E2E8F0"/>
+                      </a:solidFill>
+                      <a:prstDash val="solid"/>
+                      <a:round/>
+                      <a:headEnd type="none" w="med" len="med"/>
+                      <a:tailEnd type="none" w="med" len="med"/>
+                    </a:lnB>
+                  </a:tcPr>
+                </a:tc>
+                <a:tc>
+                  <a:txBody>
+                    <a:bodyPr/>
+                    <a:lstStyle/>
+                    <a:p>
+                      <a:pPr indent="0" marL="0">
+                        <a:buNone/>
+                      </a:pPr>
+                      <a:r>
+                        <a:rPr lang="en-US" sz="1500" dirty="0">
                           <a:solidFill>
                             <a:srgbClr val="64748B"/>
                           </a:solidFill>
@@ -5874,14 +9412,14 @@
                         </a:rPr>
                         <a:t>Smart CRM・ダッシュボード</a:t>
                       </a:r>
-                      <a:endParaRPr lang="en-US" sz="1600" dirty="0">
+                      <a:endParaRPr lang="en-US" sz="1500" dirty="0">
                         <a:latin typeface="Yu Gothic" charset="0"/>
                         <a:ea typeface="Yu Gothic" charset="0"/>
                         <a:cs typeface="Yu Gothic" charset="0"/>
                       </a:endParaRPr>
                     </a:p>
                   </a:txBody>
-                  <a:tcPr marL="137160" marR="137160" marT="54864" marB="54864" anchor="ctr">
+                  <a:tcPr marL="137160" marR="137160" marT="45720" marB="45720" anchor="ctr">
                     <a:lnL w="9525" cap="flat" cmpd="sng" algn="ctr">
                       <a:solidFill>
                         <a:srgbClr val="E2E8F0"/>
@@ -5933,8 +9471,8 @@
         </p:nvSpPr>
         <p:spPr>
           <a:xfrm>
-            <a:off x="1216152" y="5760720"/>
-            <a:ext cx="9820656" cy="365760"/>
+            <a:off x="1216152" y="5989320"/>
+            <a:ext cx="9820656" cy="320040"/>
           </a:xfrm>
           <a:prstGeom prst="rect">
             <a:avLst/>
@@ -5950,7 +9488,7 @@
               <a:buNone/>
             </a:pPr>
             <a:r>
-              <a:rPr lang="en-US" sz="1400" dirty="0">
+              <a:rPr lang="en-US" sz="1300" dirty="0">
                 <a:solidFill>
                   <a:srgbClr val="64748B"/>
                 </a:solidFill>
@@ -5960,7 +9498,7 @@
               </a:rPr>
               <a:t>実際に適用できるか、どの程度の効果があるかは、業務の詳細を確認したうえでご提案いたします</a:t>
             </a:r>
-            <a:endParaRPr lang="en-US" sz="1400" dirty="0"/>
+            <a:endParaRPr lang="en-US" sz="1300" dirty="0"/>
           </a:p>
         </p:txBody>
       </p:sp>
@@ -5972,9 +9510,9 @@
 </p:sld>
 </file>
 
-<file path=ppt/slides/slide6.xml><?xml version="1.0" encoding="utf-8"?>
+<file path=ppt/slides/slide9.xml><?xml version="1.0" encoding="utf-8"?>
 <p:sld xmlns:a="http://schemas.openxmlformats.org/drawingml/2006/main" xmlns:r="http://schemas.openxmlformats.org/officeDocument/2006/relationships" xmlns:p="http://schemas.openxmlformats.org/presentationml/2006/main">
-  <p:cSld name="Slide 6">
+  <p:cSld name="Slide 9">
     <p:bg>
       <p:bgPr>
         <a:solidFill>
@@ -6129,8 +9667,8 @@
         </p:nvSpPr>
         <p:spPr>
           <a:xfrm>
-            <a:off x="1216152" y="1755648"/>
-            <a:ext cx="512064" cy="512064"/>
+            <a:off x="1216152" y="1691640"/>
+            <a:ext cx="475488" cy="475488"/>
           </a:xfrm>
           <a:prstGeom prst="ellipse">
             <a:avLst/>
@@ -6149,8 +9687,8 @@
         </p:nvSpPr>
         <p:spPr>
           <a:xfrm>
-            <a:off x="1216152" y="1755648"/>
-            <a:ext cx="512064" cy="512064"/>
+            <a:off x="1216152" y="1691640"/>
+            <a:ext cx="475488" cy="475488"/>
           </a:xfrm>
           <a:prstGeom prst="rect">
             <a:avLst/>
@@ -6166,7 +9704,7 @@
               <a:buNone/>
             </a:pPr>
             <a:r>
-              <a:rPr lang="en-US" sz="2000" b="1" dirty="0">
+              <a:rPr lang="en-US" sz="1800" b="1" dirty="0">
                 <a:solidFill>
                   <a:srgbClr val="FFFFFF"/>
                 </a:solidFill>
@@ -6176,7 +9714,7 @@
               </a:rPr>
               <a:t>1</a:t>
             </a:r>
-            <a:endParaRPr lang="en-US" sz="2000" dirty="0"/>
+            <a:endParaRPr lang="en-US" sz="1800" dirty="0"/>
           </a:p>
         </p:txBody>
       </p:sp>
@@ -6188,8 +9726,8 @@
         </p:nvSpPr>
         <p:spPr>
           <a:xfrm>
-            <a:off x="1947672" y="1645920"/>
-            <a:ext cx="3108960" cy="731520"/>
+            <a:off x="1901952" y="1600200"/>
+            <a:ext cx="2743200" cy="658368"/>
           </a:xfrm>
           <a:prstGeom prst="rect">
             <a:avLst/>
@@ -6205,7 +9743,7 @@
               <a:buNone/>
             </a:pPr>
             <a:r>
-              <a:rPr lang="en-US" sz="2000" b="1" dirty="0">
+              <a:rPr lang="en-US" sz="1900" b="1" dirty="0">
                 <a:solidFill>
                   <a:srgbClr val="002060"/>
                 </a:solidFill>
@@ -6213,9 +9751,9 @@
                 <a:ea typeface="Yu Gothic" pitchFamily="34" charset="-122"/>
                 <a:cs typeface="Yu Gothic" pitchFamily="34" charset="-120"/>
               </a:rPr>
-              <a:t>調達業務の流れ</a:t>
-            </a:r>
-            <a:endParaRPr lang="en-US" sz="2000" dirty="0"/>
+              <a:t>経験者に聞く場面</a:t>
+            </a:r>
+            <a:endParaRPr lang="en-US" sz="1900" dirty="0"/>
           </a:p>
         </p:txBody>
       </p:sp>
@@ -6227,8 +9765,8 @@
         </p:nvSpPr>
         <p:spPr>
           <a:xfrm>
-            <a:off x="5102352" y="1645920"/>
-            <a:ext cx="5934456" cy="731520"/>
+            <a:off x="4736592" y="1600200"/>
+            <a:ext cx="6300216" cy="658368"/>
           </a:xfrm>
           <a:prstGeom prst="rect">
             <a:avLst/>
@@ -6244,7 +9782,7 @@
               <a:buNone/>
             </a:pPr>
             <a:r>
-              <a:rPr lang="en-US" sz="1700" dirty="0">
+              <a:rPr lang="en-US" sz="1600" dirty="0">
                 <a:solidFill>
                   <a:srgbClr val="334155"/>
                 </a:solidFill>
@@ -6252,9 +9790,9 @@
                 <a:ea typeface="Yu Gothic" pitchFamily="34" charset="-122"/>
                 <a:cs typeface="Yu Gothic" pitchFamily="34" charset="-120"/>
               </a:rPr>
-              <a:t>見積依頼から支払いまでの流れと、関わる部署・人数</a:t>
-            </a:r>
-            <a:endParaRPr lang="en-US" sz="1700" dirty="0"/>
+              <a:t>ベテランに確認しないと進まない仕事と、その頻度</a:t>
+            </a:r>
+            <a:endParaRPr lang="en-US" sz="1600" dirty="0"/>
           </a:p>
         </p:txBody>
       </p:sp>
@@ -6266,7 +9804,7 @@
         </p:nvSpPr>
         <p:spPr>
           <a:xfrm>
-            <a:off x="1216152" y="2450592"/>
+            <a:off x="1216152" y="2304288"/>
             <a:ext cx="9820656" cy="0"/>
           </a:xfrm>
           <a:prstGeom prst="line">
@@ -6289,8 +9827,8 @@
         </p:nvSpPr>
         <p:spPr>
           <a:xfrm>
-            <a:off x="1216152" y="2624328"/>
-            <a:ext cx="512064" cy="512064"/>
+            <a:off x="1216152" y="2441448"/>
+            <a:ext cx="475488" cy="475488"/>
           </a:xfrm>
           <a:prstGeom prst="ellipse">
             <a:avLst/>
@@ -6309,8 +9847,8 @@
         </p:nvSpPr>
         <p:spPr>
           <a:xfrm>
-            <a:off x="1216152" y="2624328"/>
-            <a:ext cx="512064" cy="512064"/>
+            <a:off x="1216152" y="2441448"/>
+            <a:ext cx="475488" cy="475488"/>
           </a:xfrm>
           <a:prstGeom prst="rect">
             <a:avLst/>
@@ -6326,7 +9864,7 @@
               <a:buNone/>
             </a:pPr>
             <a:r>
-              <a:rPr lang="en-US" sz="2000" b="1" dirty="0">
+              <a:rPr lang="en-US" sz="1800" b="1" dirty="0">
                 <a:solidFill>
                   <a:srgbClr val="FFFFFF"/>
                 </a:solidFill>
@@ -6336,7 +9874,7 @@
               </a:rPr>
               <a:t>2</a:t>
             </a:r>
-            <a:endParaRPr lang="en-US" sz="2000" dirty="0"/>
+            <a:endParaRPr lang="en-US" sz="1800" dirty="0"/>
           </a:p>
         </p:txBody>
       </p:sp>
@@ -6348,8 +9886,8 @@
         </p:nvSpPr>
         <p:spPr>
           <a:xfrm>
-            <a:off x="1947672" y="2514600"/>
-            <a:ext cx="3108960" cy="731520"/>
+            <a:off x="1901952" y="2350008"/>
+            <a:ext cx="2743200" cy="658368"/>
           </a:xfrm>
           <a:prstGeom prst="rect">
             <a:avLst/>
@@ -6365,7 +9903,7 @@
               <a:buNone/>
             </a:pPr>
             <a:r>
-              <a:rPr lang="en-US" sz="2000" b="1" dirty="0">
+              <a:rPr lang="en-US" sz="1900" b="1" dirty="0">
                 <a:solidFill>
                   <a:srgbClr val="002060"/>
                 </a:solidFill>
@@ -6373,9 +9911,9 @@
                 <a:ea typeface="Yu Gothic" pitchFamily="34" charset="-122"/>
                 <a:cs typeface="Yu Gothic" pitchFamily="34" charset="-120"/>
               </a:rPr>
-              <a:t>手間がかかっている作業</a:t>
-            </a:r>
-            <a:endParaRPr lang="en-US" sz="2000" dirty="0"/>
+              <a:t>調達業務の流れ</a:t>
+            </a:r>
+            <a:endParaRPr lang="en-US" sz="1900" dirty="0"/>
           </a:p>
         </p:txBody>
       </p:sp>
@@ -6387,8 +9925,8 @@
         </p:nvSpPr>
         <p:spPr>
           <a:xfrm>
-            <a:off x="5102352" y="2514600"/>
-            <a:ext cx="5934456" cy="731520"/>
+            <a:off x="4736592" y="2350008"/>
+            <a:ext cx="6300216" cy="658368"/>
           </a:xfrm>
           <a:prstGeom prst="rect">
             <a:avLst/>
@@ -6404,7 +9942,7 @@
               <a:buNone/>
             </a:pPr>
             <a:r>
-              <a:rPr lang="en-US" sz="1700" dirty="0">
+              <a:rPr lang="en-US" sz="1600" dirty="0">
                 <a:solidFill>
                   <a:srgbClr val="334155"/>
                 </a:solidFill>
@@ -6412,9 +9950,9 @@
                 <a:ea typeface="Yu Gothic" pitchFamily="34" charset="-122"/>
                 <a:cs typeface="Yu Gothic" pitchFamily="34" charset="-120"/>
               </a:rPr>
-              <a:t>転記・集計・確認など、繰り返し発生している作業</a:t>
-            </a:r>
-            <a:endParaRPr lang="en-US" sz="1700" dirty="0"/>
+              <a:t>見積依頼から支払いまでの流れと、関わる部署・人数</a:t>
+            </a:r>
+            <a:endParaRPr lang="en-US" sz="1600" dirty="0"/>
           </a:p>
         </p:txBody>
       </p:sp>
@@ -6426,7 +9964,7 @@
         </p:nvSpPr>
         <p:spPr>
           <a:xfrm>
-            <a:off x="1216152" y="3319272"/>
+            <a:off x="1216152" y="3054096"/>
             <a:ext cx="9820656" cy="0"/>
           </a:xfrm>
           <a:prstGeom prst="line">
@@ -6449,8 +9987,8 @@
         </p:nvSpPr>
         <p:spPr>
           <a:xfrm>
-            <a:off x="1216152" y="3493008"/>
-            <a:ext cx="512064" cy="512064"/>
+            <a:off x="1216152" y="3191256"/>
+            <a:ext cx="475488" cy="475488"/>
           </a:xfrm>
           <a:prstGeom prst="ellipse">
             <a:avLst/>
@@ -6469,8 +10007,8 @@
         </p:nvSpPr>
         <p:spPr>
           <a:xfrm>
-            <a:off x="1216152" y="3493008"/>
-            <a:ext cx="512064" cy="512064"/>
+            <a:off x="1216152" y="3191256"/>
+            <a:ext cx="475488" cy="475488"/>
           </a:xfrm>
           <a:prstGeom prst="rect">
             <a:avLst/>
@@ -6486,7 +10024,7 @@
               <a:buNone/>
             </a:pPr>
             <a:r>
-              <a:rPr lang="en-US" sz="2000" b="1" dirty="0">
+              <a:rPr lang="en-US" sz="1800" b="1" dirty="0">
                 <a:solidFill>
                   <a:srgbClr val="FFFFFF"/>
                 </a:solidFill>
@@ -6496,7 +10034,7 @@
               </a:rPr>
               <a:t>3</a:t>
             </a:r>
-            <a:endParaRPr lang="en-US" sz="2000" dirty="0"/>
+            <a:endParaRPr lang="en-US" sz="1800" dirty="0"/>
           </a:p>
         </p:txBody>
       </p:sp>
@@ -6508,8 +10046,8 @@
         </p:nvSpPr>
         <p:spPr>
           <a:xfrm>
-            <a:off x="1947672" y="3383280"/>
-            <a:ext cx="3108960" cy="731520"/>
+            <a:off x="1901952" y="3099816"/>
+            <a:ext cx="2743200" cy="658368"/>
           </a:xfrm>
           <a:prstGeom prst="rect">
             <a:avLst/>
@@ -6525,7 +10063,7 @@
               <a:buNone/>
             </a:pPr>
             <a:r>
-              <a:rPr lang="en-US" sz="2000" b="1" dirty="0">
+              <a:rPr lang="en-US" sz="1900" b="1" dirty="0">
                 <a:solidFill>
                   <a:srgbClr val="002060"/>
                 </a:solidFill>
@@ -6533,9 +10071,9 @@
                 <a:ea typeface="Yu Gothic" pitchFamily="34" charset="-122"/>
                 <a:cs typeface="Yu Gothic" pitchFamily="34" charset="-120"/>
               </a:rPr>
-              <a:t>お使いのシステム</a:t>
-            </a:r>
-            <a:endParaRPr lang="en-US" sz="2000" dirty="0"/>
+              <a:t>手間がかかる作業</a:t>
+            </a:r>
+            <a:endParaRPr lang="en-US" sz="1900" dirty="0"/>
           </a:p>
         </p:txBody>
       </p:sp>
@@ -6547,8 +10085,8 @@
         </p:nvSpPr>
         <p:spPr>
           <a:xfrm>
-            <a:off x="5102352" y="3383280"/>
-            <a:ext cx="5934456" cy="731520"/>
+            <a:off x="4736592" y="3099816"/>
+            <a:ext cx="6300216" cy="658368"/>
           </a:xfrm>
           <a:prstGeom prst="rect">
             <a:avLst/>
@@ -6564,7 +10102,7 @@
               <a:buNone/>
             </a:pPr>
             <a:r>
-              <a:rPr lang="en-US" sz="1700" dirty="0">
+              <a:rPr lang="en-US" sz="1600" dirty="0">
                 <a:solidFill>
                   <a:srgbClr val="334155"/>
                 </a:solidFill>
@@ -6572,9 +10110,9 @@
                 <a:ea typeface="Yu Gothic" pitchFamily="34" charset="-122"/>
                 <a:cs typeface="Yu Gothic" pitchFamily="34" charset="-120"/>
               </a:rPr>
-              <a:t>基幹システム・Excel・メールなど、現在の道具と使い分け</a:t>
-            </a:r>
-            <a:endParaRPr lang="en-US" sz="1700" dirty="0"/>
+              <a:t>転記・集計・確認など、繰り返し発生している作業</a:t>
+            </a:r>
+            <a:endParaRPr lang="en-US" sz="1600" dirty="0"/>
           </a:p>
         </p:txBody>
       </p:sp>
@@ -6586,7 +10124,7 @@
         </p:nvSpPr>
         <p:spPr>
           <a:xfrm>
-            <a:off x="1216152" y="4187952"/>
+            <a:off x="1216152" y="3803904"/>
             <a:ext cx="9820656" cy="0"/>
           </a:xfrm>
           <a:prstGeom prst="line">
@@ -6609,8 +10147,8 @@
         </p:nvSpPr>
         <p:spPr>
           <a:xfrm>
-            <a:off x="1216152" y="4361688"/>
-            <a:ext cx="512064" cy="512064"/>
+            <a:off x="1216152" y="3941064"/>
+            <a:ext cx="475488" cy="475488"/>
           </a:xfrm>
           <a:prstGeom prst="ellipse">
             <a:avLst/>
@@ -6629,8 +10167,8 @@
         </p:nvSpPr>
         <p:spPr>
           <a:xfrm>
-            <a:off x="1216152" y="4361688"/>
-            <a:ext cx="512064" cy="512064"/>
+            <a:off x="1216152" y="3941064"/>
+            <a:ext cx="475488" cy="475488"/>
           </a:xfrm>
           <a:prstGeom prst="rect">
             <a:avLst/>
@@ -6646,7 +10184,7 @@
               <a:buNone/>
             </a:pPr>
             <a:r>
-              <a:rPr lang="en-US" sz="2000" b="1" dirty="0">
+              <a:rPr lang="en-US" sz="1800" b="1" dirty="0">
                 <a:solidFill>
                   <a:srgbClr val="FFFFFF"/>
                 </a:solidFill>
@@ -6656,7 +10194,7 @@
               </a:rPr>
               <a:t>4</a:t>
             </a:r>
-            <a:endParaRPr lang="en-US" sz="2000" dirty="0"/>
+            <a:endParaRPr lang="en-US" sz="1800" dirty="0"/>
           </a:p>
         </p:txBody>
       </p:sp>
@@ -6668,8 +10206,8 @@
         </p:nvSpPr>
         <p:spPr>
           <a:xfrm>
-            <a:off x="1947672" y="4251960"/>
-            <a:ext cx="3108960" cy="731520"/>
+            <a:off x="1901952" y="3849624"/>
+            <a:ext cx="2743200" cy="658368"/>
           </a:xfrm>
           <a:prstGeom prst="rect">
             <a:avLst/>
@@ -6685,7 +10223,7 @@
               <a:buNone/>
             </a:pPr>
             <a:r>
-              <a:rPr lang="en-US" sz="2000" b="1" dirty="0">
+              <a:rPr lang="en-US" sz="1900" b="1" dirty="0">
                 <a:solidFill>
                   <a:srgbClr val="002060"/>
                 </a:solidFill>
@@ -6693,9 +10231,9 @@
                 <a:ea typeface="Yu Gothic" pitchFamily="34" charset="-122"/>
                 <a:cs typeface="Yu Gothic" pitchFamily="34" charset="-120"/>
               </a:rPr>
-              <a:t>優先したいこと</a:t>
-            </a:r>
-            <a:endParaRPr lang="en-US" sz="2000" dirty="0"/>
+              <a:t>お使いの環境</a:t>
+            </a:r>
+            <a:endParaRPr lang="en-US" sz="1900" dirty="0"/>
           </a:p>
         </p:txBody>
       </p:sp>
@@ -6707,8 +10245,8 @@
         </p:nvSpPr>
         <p:spPr>
           <a:xfrm>
-            <a:off x="5102352" y="4251960"/>
-            <a:ext cx="5934456" cy="731520"/>
+            <a:off x="4736592" y="3849624"/>
+            <a:ext cx="6300216" cy="658368"/>
           </a:xfrm>
           <a:prstGeom prst="rect">
             <a:avLst/>
@@ -6724,7 +10262,7 @@
               <a:buNone/>
             </a:pPr>
             <a:r>
-              <a:rPr lang="en-US" sz="1700" dirty="0">
+              <a:rPr lang="en-US" sz="1600" dirty="0">
                 <a:solidFill>
                   <a:srgbClr val="334155"/>
                 </a:solidFill>
@@ -6732,9 +10270,9 @@
                 <a:ea typeface="Yu Gothic" pitchFamily="34" charset="-122"/>
                 <a:cs typeface="Yu Gothic" pitchFamily="34" charset="-120"/>
               </a:rPr>
-              <a:t>まず解決したいことと、いつ頃までに変えたいか</a:t>
-            </a:r>
-            <a:endParaRPr lang="en-US" sz="1700" dirty="0"/>
+              <a:t>基幹システム・Excel・会議の記録やファイルの置き場所</a:t>
+            </a:r>
+            <a:endParaRPr lang="en-US" sz="1600" dirty="0"/>
           </a:p>
         </p:txBody>
       </p:sp>
@@ -6746,7 +10284,7 @@
         </p:nvSpPr>
         <p:spPr>
           <a:xfrm>
-            <a:off x="1216152" y="5056632"/>
+            <a:off x="1216152" y="4553712"/>
             <a:ext cx="9820656" cy="0"/>
           </a:xfrm>
           <a:prstGeom prst="line">
@@ -6769,8 +10307,8 @@
         </p:nvSpPr>
         <p:spPr>
           <a:xfrm>
-            <a:off x="1216152" y="5230368"/>
-            <a:ext cx="512064" cy="512064"/>
+            <a:off x="1216152" y="4690872"/>
+            <a:ext cx="475488" cy="475488"/>
           </a:xfrm>
           <a:prstGeom prst="ellipse">
             <a:avLst/>
@@ -6789,8 +10327,8 @@
         </p:nvSpPr>
         <p:spPr>
           <a:xfrm>
-            <a:off x="1216152" y="5230368"/>
-            <a:ext cx="512064" cy="512064"/>
+            <a:off x="1216152" y="4690872"/>
+            <a:ext cx="475488" cy="475488"/>
           </a:xfrm>
           <a:prstGeom prst="rect">
             <a:avLst/>
@@ -6806,7 +10344,7 @@
               <a:buNone/>
             </a:pPr>
             <a:r>
-              <a:rPr lang="en-US" sz="2000" b="1" dirty="0">
+              <a:rPr lang="en-US" sz="1800" b="1" dirty="0">
                 <a:solidFill>
                   <a:srgbClr val="FFFFFF"/>
                 </a:solidFill>
@@ -6816,7 +10354,7 @@
               </a:rPr>
               <a:t>5</a:t>
             </a:r>
-            <a:endParaRPr lang="en-US" sz="2000" dirty="0"/>
+            <a:endParaRPr lang="en-US" sz="1800" dirty="0"/>
           </a:p>
         </p:txBody>
       </p:sp>
@@ -6828,8 +10366,8 @@
         </p:nvSpPr>
         <p:spPr>
           <a:xfrm>
-            <a:off x="1947672" y="5120640"/>
-            <a:ext cx="3108960" cy="731520"/>
+            <a:off x="1901952" y="4599432"/>
+            <a:ext cx="2743200" cy="658368"/>
           </a:xfrm>
           <a:prstGeom prst="rect">
             <a:avLst/>
@@ -6845,7 +10383,7 @@
               <a:buNone/>
             </a:pPr>
             <a:r>
-              <a:rPr lang="en-US" sz="2000" b="1" dirty="0">
+              <a:rPr lang="en-US" sz="1900" b="1" dirty="0">
                 <a:solidFill>
                   <a:srgbClr val="002060"/>
                 </a:solidFill>
@@ -6853,9 +10391,9 @@
                 <a:ea typeface="Yu Gothic" pitchFamily="34" charset="-122"/>
                 <a:cs typeface="Yu Gothic" pitchFamily="34" charset="-120"/>
               </a:rPr>
-              <a:t>ご検討の進め方</a:t>
-            </a:r>
-            <a:endParaRPr lang="en-US" sz="2000" dirty="0"/>
+              <a:t>優先と時期</a:t>
+            </a:r>
+            <a:endParaRPr lang="en-US" sz="1900" dirty="0"/>
           </a:p>
         </p:txBody>
       </p:sp>
@@ -6867,8 +10405,8 @@
         </p:nvSpPr>
         <p:spPr>
           <a:xfrm>
-            <a:off x="5102352" y="5120640"/>
-            <a:ext cx="5934456" cy="731520"/>
+            <a:off x="4736592" y="4599432"/>
+            <a:ext cx="6300216" cy="658368"/>
           </a:xfrm>
           <a:prstGeom prst="rect">
             <a:avLst/>
@@ -6884,7 +10422,7 @@
               <a:buNone/>
             </a:pPr>
             <a:r>
-              <a:rPr lang="en-US" sz="1700" dirty="0">
+              <a:rPr lang="en-US" sz="1600" dirty="0">
                 <a:solidFill>
                   <a:srgbClr val="334155"/>
                 </a:solidFill>
@@ -6892,185 +10430,28 @@
                 <a:ea typeface="Yu Gothic" pitchFamily="34" charset="-122"/>
                 <a:cs typeface="Yu Gothic" pitchFamily="34" charset="-120"/>
               </a:rPr>
-              <a:t>社内のご相談先や、ご判断の流れ</a:t>
-            </a:r>
-            <a:endParaRPr lang="en-US" sz="1700" dirty="0"/>
-          </a:p>
-        </p:txBody>
-      </p:sp>
-    </p:spTree>
-  </p:cSld>
-  <p:clrMapOvr>
-    <a:masterClrMapping/>
-  </p:clrMapOvr>
-</p:sld>
-</file>
-
-<file path=ppt/slides/slide7.xml><?xml version="1.0" encoding="utf-8"?>
-<p:sld xmlns:a="http://schemas.openxmlformats.org/drawingml/2006/main" xmlns:r="http://schemas.openxmlformats.org/officeDocument/2006/relationships" xmlns:p="http://schemas.openxmlformats.org/presentationml/2006/main">
-  <p:cSld name="Slide 7">
-    <p:bg>
-      <p:bgPr>
-        <a:solidFill>
-          <a:srgbClr val="FFFFFF"/>
-        </a:solidFill>
-      </p:bgPr>
-    </p:bg>
-    <p:spTree>
-      <p:nvGrpSpPr>
-        <p:cNvPr id="1" name=""/>
-        <p:cNvGrpSpPr/>
-        <p:nvPr/>
-      </p:nvGrpSpPr>
-      <p:grpSpPr>
-        <a:xfrm>
-          <a:off x="0" y="0"/>
-          <a:ext cx="0" cy="0"/>
-          <a:chOff x="0" y="0"/>
-          <a:chExt cx="0" cy="0"/>
-        </a:xfrm>
-      </p:grpSpPr>
-      <p:sp>
-        <p:nvSpPr>
-          <p:cNvPr id="2" name="Text 0"/>
-          <p:cNvSpPr/>
-          <p:nvPr/>
-        </p:nvSpPr>
-        <p:spPr>
-          <a:xfrm>
-            <a:off x="1216152" y="411480"/>
-            <a:ext cx="9820656" cy="548640"/>
-          </a:xfrm>
-          <a:prstGeom prst="rect">
-            <a:avLst/>
-          </a:prstGeom>
-          <a:noFill/>
-          <a:ln/>
-        </p:spPr>
-        <p:txBody>
-          <a:bodyPr wrap="square" lIns="0" tIns="0" rIns="0" bIns="0" rtlCol="0" anchor="ctr"/>
-          <a:lstStyle/>
-          <a:p>
-            <a:pPr indent="0" marL="0">
-              <a:buNone/>
-            </a:pPr>
-            <a:r>
-              <a:rPr lang="en-US" sz="2800" b="1" dirty="0">
-                <a:solidFill>
-                  <a:srgbClr val="002060"/>
-                </a:solidFill>
-                <a:latin typeface="Yu Gothic" pitchFamily="34" charset="0"/>
-                <a:ea typeface="Yu Gothic" pitchFamily="34" charset="-122"/>
-                <a:cs typeface="Yu Gothic" pitchFamily="34" charset="-120"/>
-              </a:rPr>
-              <a:t>今後の進め方（案）</a:t>
-            </a:r>
-            <a:endParaRPr lang="en-US" sz="2800" dirty="0"/>
-          </a:p>
-        </p:txBody>
-      </p:sp>
-      <p:sp>
-        <p:nvSpPr>
-          <p:cNvPr id="3" name="Shape 1"/>
-          <p:cNvSpPr/>
-          <p:nvPr/>
-        </p:nvSpPr>
-        <p:spPr>
-          <a:xfrm>
-            <a:off x="1216152" y="1024128"/>
-            <a:ext cx="1097280" cy="0"/>
+              <a:t>まず解決したいことと、いつ頃までに変えたいか</a:t>
+            </a:r>
+            <a:endParaRPr lang="en-US" sz="1600" dirty="0"/>
+          </a:p>
+        </p:txBody>
+      </p:sp>
+      <p:sp>
+        <p:nvSpPr>
+          <p:cNvPr id="30" name="Shape 27"/>
+          <p:cNvSpPr/>
+          <p:nvPr/>
+        </p:nvSpPr>
+        <p:spPr>
+          <a:xfrm>
+            <a:off x="1216152" y="5303520"/>
+            <a:ext cx="9820656" cy="0"/>
           </a:xfrm>
           <a:prstGeom prst="line">
             <a:avLst/>
           </a:prstGeom>
           <a:noFill/>
-          <a:ln w="31750">
-            <a:solidFill>
-              <a:srgbClr val="EB6311"/>
-            </a:solidFill>
-            <a:prstDash val="solid"/>
-          </a:ln>
-        </p:spPr>
-      </p:sp>
-      <p:sp>
-        <p:nvSpPr>
-          <p:cNvPr id="4" name="Text 2"/>
-          <p:cNvSpPr/>
-          <p:nvPr/>
-        </p:nvSpPr>
-        <p:spPr>
-          <a:xfrm>
-            <a:off x="1216152" y="1115568"/>
-            <a:ext cx="9820656" cy="365760"/>
-          </a:xfrm>
-          <a:prstGeom prst="rect">
-            <a:avLst/>
-          </a:prstGeom>
-          <a:noFill/>
-          <a:ln/>
-        </p:spPr>
-        <p:txBody>
-          <a:bodyPr wrap="square" lIns="0" tIns="0" rIns="0" bIns="0" rtlCol="0" anchor="ctr"/>
-          <a:lstStyle/>
-          <a:p>
-            <a:pPr indent="0" marL="0">
-              <a:buNone/>
-            </a:pPr>
-            <a:r>
-              <a:rPr lang="en-US" sz="1500" dirty="0">
-                <a:solidFill>
-                  <a:srgbClr val="64748B"/>
-                </a:solidFill>
-                <a:latin typeface="Yu Gothic" pitchFamily="34" charset="0"/>
-                <a:ea typeface="Yu Gothic" pitchFamily="34" charset="-122"/>
-                <a:cs typeface="Yu Gothic" pitchFamily="34" charset="-120"/>
-              </a:rPr>
-              <a:t>小さく確かめながら進めます</a:t>
-            </a:r>
-            <a:endParaRPr lang="en-US" sz="1500" dirty="0"/>
-          </a:p>
-        </p:txBody>
-      </p:sp>
-      <p:pic>
-        <p:nvPicPr>
-          <p:cNvPr id="5" name="Image 0" descr="/home/user/-/tak-evac/src/assets/logo_t.png">    </p:cNvPr>
-          <p:cNvPicPr>
-            <a:picLocks noChangeAspect="1"/>
-          </p:cNvPicPr>
-          <p:nvPr/>
-        </p:nvPicPr>
-        <p:blipFill>
-          <a:blip r:embed="rId1"/>
-          <a:stretch>
-            <a:fillRect/>
-          </a:stretch>
-        </p:blipFill>
-        <p:spPr>
-          <a:xfrm>
-            <a:off x="228600" y="6199632"/>
-            <a:ext cx="457200" cy="457200"/>
-          </a:xfrm>
-          <a:prstGeom prst="rect">
-            <a:avLst/>
-          </a:prstGeom>
-        </p:spPr>
-      </p:pic>
-      <p:sp>
-        <p:nvSpPr>
-          <p:cNvPr id="6" name="Shape 3"/>
-          <p:cNvSpPr/>
-          <p:nvPr/>
-        </p:nvSpPr>
-        <p:spPr>
-          <a:xfrm>
-            <a:off x="2443734" y="2011680"/>
-            <a:ext cx="7365492" cy="0"/>
-          </a:xfrm>
-          <a:prstGeom prst="line">
-            <a:avLst/>
-          </a:prstGeom>
-          <a:noFill/>
-          <a:ln w="38100">
+          <a:ln w="9525">
             <a:solidFill>
               <a:srgbClr val="E2E8F0"/>
             </a:solidFill>
@@ -7080,156 +10461,14 @@
       </p:sp>
       <p:sp>
         <p:nvSpPr>
-          <p:cNvPr id="7" name="Shape 4"/>
-          <p:cNvSpPr/>
-          <p:nvPr/>
-        </p:nvSpPr>
-        <p:spPr>
-          <a:xfrm>
-            <a:off x="2077974" y="1645920"/>
-            <a:ext cx="731520" cy="731520"/>
-          </a:xfrm>
-          <a:prstGeom prst="ellipse">
-            <a:avLst/>
-          </a:prstGeom>
-          <a:solidFill>
-            <a:srgbClr val="EB6311"/>
-          </a:solidFill>
-          <a:ln w="38100">
-            <a:solidFill>
-              <a:srgbClr val="FFFFFF"/>
-            </a:solidFill>
-            <a:prstDash val="solid"/>
-          </a:ln>
-        </p:spPr>
-      </p:sp>
-      <p:sp>
-        <p:nvSpPr>
-          <p:cNvPr id="8" name="Text 5"/>
-          <p:cNvSpPr/>
-          <p:nvPr/>
-        </p:nvSpPr>
-        <p:spPr>
-          <a:xfrm>
-            <a:off x="2077974" y="1645920"/>
-            <a:ext cx="731520" cy="731520"/>
-          </a:xfrm>
-          <a:prstGeom prst="rect">
-            <a:avLst/>
-          </a:prstGeom>
-          <a:noFill/>
-          <a:ln/>
-        </p:spPr>
-        <p:txBody>
-          <a:bodyPr wrap="square" lIns="0" tIns="0" rIns="0" bIns="0" rtlCol="0" anchor="ctr"/>
-          <a:lstStyle/>
-          <a:p>
-            <a:pPr algn="ctr" indent="0" marL="0">
-              <a:buNone/>
-            </a:pPr>
-            <a:r>
-              <a:rPr lang="en-US" sz="2400" b="1" dirty="0">
-                <a:solidFill>
-                  <a:srgbClr val="FFFFFF"/>
-                </a:solidFill>
-                <a:latin typeface="Yu Gothic" pitchFamily="34" charset="0"/>
-                <a:ea typeface="Yu Gothic" pitchFamily="34" charset="-122"/>
-                <a:cs typeface="Yu Gothic" pitchFamily="34" charset="-120"/>
-              </a:rPr>
-              <a:t>1</a:t>
-            </a:r>
-            <a:endParaRPr lang="en-US" sz="2400" dirty="0"/>
-          </a:p>
-        </p:txBody>
-      </p:sp>
-      <p:sp>
-        <p:nvSpPr>
-          <p:cNvPr id="9" name="Text 6"/>
-          <p:cNvSpPr/>
-          <p:nvPr/>
-        </p:nvSpPr>
-        <p:spPr>
-          <a:xfrm>
-            <a:off x="1307592" y="2560320"/>
-            <a:ext cx="2272284" cy="457200"/>
-          </a:xfrm>
-          <a:prstGeom prst="rect">
-            <a:avLst/>
-          </a:prstGeom>
-          <a:noFill/>
-          <a:ln/>
-        </p:spPr>
-        <p:txBody>
-          <a:bodyPr wrap="square" lIns="0" tIns="0" rIns="0" bIns="0" rtlCol="0" anchor="ctr"/>
-          <a:lstStyle/>
-          <a:p>
-            <a:pPr algn="ctr" indent="0" marL="0">
-              <a:buNone/>
-            </a:pPr>
-            <a:r>
-              <a:rPr lang="en-US" sz="2000" b="1" dirty="0">
-                <a:solidFill>
-                  <a:srgbClr val="EB6311"/>
-                </a:solidFill>
-                <a:latin typeface="Yu Gothic" pitchFamily="34" charset="0"/>
-                <a:ea typeface="Yu Gothic" pitchFamily="34" charset="-122"/>
-                <a:cs typeface="Yu Gothic" pitchFamily="34" charset="-120"/>
-              </a:rPr>
-              <a:t>本日のお伺い</a:t>
-            </a:r>
-            <a:endParaRPr lang="en-US" sz="2000" dirty="0"/>
-          </a:p>
-        </p:txBody>
-      </p:sp>
-      <p:sp>
-        <p:nvSpPr>
-          <p:cNvPr id="10" name="Text 7"/>
-          <p:cNvSpPr/>
-          <p:nvPr/>
-        </p:nvSpPr>
-        <p:spPr>
-          <a:xfrm>
-            <a:off x="1353312" y="3063240"/>
-            <a:ext cx="2180844" cy="1005840"/>
-          </a:xfrm>
-          <a:prstGeom prst="rect">
-            <a:avLst/>
-          </a:prstGeom>
-          <a:noFill/>
-          <a:ln/>
-        </p:spPr>
-        <p:txBody>
-          <a:bodyPr wrap="square" lIns="0" tIns="0" rIns="0" bIns="0" rtlCol="0" anchor="t"/>
-          <a:lstStyle/>
-          <a:p>
-            <a:pPr algn="ctr" indent="0" marL="0">
-              <a:buNone/>
-            </a:pPr>
-            <a:r>
-              <a:rPr lang="en-US" sz="1500" dirty="0">
-                <a:solidFill>
-                  <a:srgbClr val="334155"/>
-                </a:solidFill>
-                <a:latin typeface="Yu Gothic" pitchFamily="34" charset="0"/>
-                <a:ea typeface="Yu Gothic" pitchFamily="34" charset="-122"/>
-                <a:cs typeface="Yu Gothic" pitchFamily="34" charset="-120"/>
-              </a:rPr>
-              <a:t>現状とお困りごとを伺い、テーマの候補を挙げる</a:t>
-            </a:r>
-            <a:endParaRPr lang="en-US" sz="1500" dirty="0"/>
-          </a:p>
-        </p:txBody>
-      </p:sp>
-      <p:sp>
-        <p:nvSpPr>
-          <p:cNvPr id="11" name="Shape 8"/>
-          <p:cNvSpPr/>
-          <p:nvPr/>
-        </p:nvSpPr>
-        <p:spPr>
-          <a:xfrm>
-            <a:off x="4533138" y="1645920"/>
-            <a:ext cx="731520" cy="731520"/>
+          <p:cNvPr id="31" name="Shape 28"/>
+          <p:cNvSpPr/>
+          <p:nvPr/>
+        </p:nvSpPr>
+        <p:spPr>
+          <a:xfrm>
+            <a:off x="1216152" y="5440680"/>
+            <a:ext cx="475488" cy="475488"/>
           </a:xfrm>
           <a:prstGeom prst="ellipse">
             <a:avLst/>
@@ -7237,24 +10476,19 @@
           <a:solidFill>
             <a:srgbClr val="002060"/>
           </a:solidFill>
-          <a:ln w="38100">
-            <a:solidFill>
-              <a:srgbClr val="FFFFFF"/>
-            </a:solidFill>
-            <a:prstDash val="solid"/>
-          </a:ln>
-        </p:spPr>
-      </p:sp>
-      <p:sp>
-        <p:nvSpPr>
-          <p:cNvPr id="12" name="Text 9"/>
-          <p:cNvSpPr/>
-          <p:nvPr/>
-        </p:nvSpPr>
-        <p:spPr>
-          <a:xfrm>
-            <a:off x="4533138" y="1645920"/>
-            <a:ext cx="731520" cy="731520"/>
+          <a:ln/>
+        </p:spPr>
+      </p:sp>
+      <p:sp>
+        <p:nvSpPr>
+          <p:cNvPr id="32" name="Text 29"/>
+          <p:cNvSpPr/>
+          <p:nvPr/>
+        </p:nvSpPr>
+        <p:spPr>
+          <a:xfrm>
+            <a:off x="1216152" y="5440680"/>
+            <a:ext cx="475488" cy="475488"/>
           </a:xfrm>
           <a:prstGeom prst="rect">
             <a:avLst/>
@@ -7270,7 +10504,7 @@
               <a:buNone/>
             </a:pPr>
             <a:r>
-              <a:rPr lang="en-US" sz="2400" b="1" dirty="0">
+              <a:rPr lang="en-US" sz="1800" b="1" dirty="0">
                 <a:solidFill>
                   <a:srgbClr val="FFFFFF"/>
                 </a:solidFill>
@@ -7278,22 +10512,22 @@
                 <a:ea typeface="Yu Gothic" pitchFamily="34" charset="-122"/>
                 <a:cs typeface="Yu Gothic" pitchFamily="34" charset="-120"/>
               </a:rPr>
-              <a:t>2</a:t>
-            </a:r>
-            <a:endParaRPr lang="en-US" sz="2400" dirty="0"/>
-          </a:p>
-        </p:txBody>
-      </p:sp>
-      <p:sp>
-        <p:nvSpPr>
-          <p:cNvPr id="13" name="Text 10"/>
-          <p:cNvSpPr/>
-          <p:nvPr/>
-        </p:nvSpPr>
-        <p:spPr>
-          <a:xfrm>
-            <a:off x="3762756" y="2560320"/>
-            <a:ext cx="2272284" cy="457200"/>
+              <a:t>6</a:t>
+            </a:r>
+            <a:endParaRPr lang="en-US" sz="1800" dirty="0"/>
+          </a:p>
+        </p:txBody>
+      </p:sp>
+      <p:sp>
+        <p:nvSpPr>
+          <p:cNvPr id="33" name="Text 30"/>
+          <p:cNvSpPr/>
+          <p:nvPr/>
+        </p:nvSpPr>
+        <p:spPr>
+          <a:xfrm>
+            <a:off x="1901952" y="5349240"/>
+            <a:ext cx="2743200" cy="658368"/>
           </a:xfrm>
           <a:prstGeom prst="rect">
             <a:avLst/>
@@ -7305,11 +10539,11 @@
           <a:bodyPr wrap="square" lIns="0" tIns="0" rIns="0" bIns="0" rtlCol="0" anchor="ctr"/>
           <a:lstStyle/>
           <a:p>
-            <a:pPr algn="ctr" indent="0" marL="0">
-              <a:buNone/>
-            </a:pPr>
-            <a:r>
-              <a:rPr lang="en-US" sz="2000" b="1" dirty="0">
+            <a:pPr indent="0" marL="0">
+              <a:buNone/>
+            </a:pPr>
+            <a:r>
+              <a:rPr lang="en-US" sz="1900" b="1" dirty="0">
                 <a:solidFill>
                   <a:srgbClr val="002060"/>
                 </a:solidFill>
@@ -7317,38 +10551,38 @@
                 <a:ea typeface="Yu Gothic" pitchFamily="34" charset="-122"/>
                 <a:cs typeface="Yu Gothic" pitchFamily="34" charset="-120"/>
               </a:rPr>
-              <a:t>業務の詳細確認</a:t>
-            </a:r>
-            <a:endParaRPr lang="en-US" sz="2000" dirty="0"/>
-          </a:p>
-        </p:txBody>
-      </p:sp>
-      <p:sp>
-        <p:nvSpPr>
-          <p:cNvPr id="14" name="Text 11"/>
-          <p:cNvSpPr/>
-          <p:nvPr/>
-        </p:nvSpPr>
-        <p:spPr>
-          <a:xfrm>
-            <a:off x="3808476" y="3063240"/>
-            <a:ext cx="2180844" cy="1005840"/>
-          </a:xfrm>
-          <a:prstGeom prst="rect">
-            <a:avLst/>
-          </a:prstGeom>
-          <a:noFill/>
-          <a:ln/>
-        </p:spPr>
-        <p:txBody>
-          <a:bodyPr wrap="square" lIns="0" tIns="0" rIns="0" bIns="0" rtlCol="0" anchor="t"/>
-          <a:lstStyle/>
-          <a:p>
-            <a:pPr algn="ctr" indent="0" marL="0">
-              <a:buNone/>
-            </a:pPr>
-            <a:r>
-              <a:rPr lang="en-US" sz="1500" dirty="0">
+              <a:t>ご検討の進め方</a:t>
+            </a:r>
+            <a:endParaRPr lang="en-US" sz="1900" dirty="0"/>
+          </a:p>
+        </p:txBody>
+      </p:sp>
+      <p:sp>
+        <p:nvSpPr>
+          <p:cNvPr id="34" name="Text 31"/>
+          <p:cNvSpPr/>
+          <p:nvPr/>
+        </p:nvSpPr>
+        <p:spPr>
+          <a:xfrm>
+            <a:off x="4736592" y="5349240"/>
+            <a:ext cx="6300216" cy="658368"/>
+          </a:xfrm>
+          <a:prstGeom prst="rect">
+            <a:avLst/>
+          </a:prstGeom>
+          <a:noFill/>
+          <a:ln/>
+        </p:spPr>
+        <p:txBody>
+          <a:bodyPr wrap="square" lIns="0" tIns="0" rIns="0" bIns="0" rtlCol="0" anchor="ctr"/>
+          <a:lstStyle/>
+          <a:p>
+            <a:pPr indent="0" marL="0">
+              <a:buNone/>
+            </a:pPr>
+            <a:r>
+              <a:rPr lang="en-US" sz="1600" dirty="0">
                 <a:solidFill>
                   <a:srgbClr val="334155"/>
                 </a:solidFill>
@@ -7356,555 +10590,9 @@
                 <a:ea typeface="Yu Gothic" pitchFamily="34" charset="-122"/>
                 <a:cs typeface="Yu Gothic" pitchFamily="34" charset="-120"/>
               </a:rPr>
-              <a:t>実務ご担当者様も交え、対象業務の流れと手間を確認する</a:t>
-            </a:r>
-            <a:endParaRPr lang="en-US" sz="1500" dirty="0"/>
-          </a:p>
-        </p:txBody>
-      </p:sp>
-      <p:sp>
-        <p:nvSpPr>
-          <p:cNvPr id="15" name="Shape 12"/>
-          <p:cNvSpPr/>
-          <p:nvPr/>
-        </p:nvSpPr>
-        <p:spPr>
-          <a:xfrm>
-            <a:off x="6988302" y="1645920"/>
-            <a:ext cx="731520" cy="731520"/>
-          </a:xfrm>
-          <a:prstGeom prst="ellipse">
-            <a:avLst/>
-          </a:prstGeom>
-          <a:solidFill>
-            <a:srgbClr val="002060"/>
-          </a:solidFill>
-          <a:ln w="38100">
-            <a:solidFill>
-              <a:srgbClr val="FFFFFF"/>
-            </a:solidFill>
-            <a:prstDash val="solid"/>
-          </a:ln>
-        </p:spPr>
-      </p:sp>
-      <p:sp>
-        <p:nvSpPr>
-          <p:cNvPr id="16" name="Text 13"/>
-          <p:cNvSpPr/>
-          <p:nvPr/>
-        </p:nvSpPr>
-        <p:spPr>
-          <a:xfrm>
-            <a:off x="6988302" y="1645920"/>
-            <a:ext cx="731520" cy="731520"/>
-          </a:xfrm>
-          <a:prstGeom prst="rect">
-            <a:avLst/>
-          </a:prstGeom>
-          <a:noFill/>
-          <a:ln/>
-        </p:spPr>
-        <p:txBody>
-          <a:bodyPr wrap="square" lIns="0" tIns="0" rIns="0" bIns="0" rtlCol="0" anchor="ctr"/>
-          <a:lstStyle/>
-          <a:p>
-            <a:pPr algn="ctr" indent="0" marL="0">
-              <a:buNone/>
-            </a:pPr>
-            <a:r>
-              <a:rPr lang="en-US" sz="2400" b="1" dirty="0">
-                <a:solidFill>
-                  <a:srgbClr val="FFFFFF"/>
-                </a:solidFill>
-                <a:latin typeface="Yu Gothic" pitchFamily="34" charset="0"/>
-                <a:ea typeface="Yu Gothic" pitchFamily="34" charset="-122"/>
-                <a:cs typeface="Yu Gothic" pitchFamily="34" charset="-120"/>
-              </a:rPr>
-              <a:t>3</a:t>
-            </a:r>
-            <a:endParaRPr lang="en-US" sz="2400" dirty="0"/>
-          </a:p>
-        </p:txBody>
-      </p:sp>
-      <p:sp>
-        <p:nvSpPr>
-          <p:cNvPr id="17" name="Text 14"/>
-          <p:cNvSpPr/>
-          <p:nvPr/>
-        </p:nvSpPr>
-        <p:spPr>
-          <a:xfrm>
-            <a:off x="6217920" y="2560320"/>
-            <a:ext cx="2272284" cy="457200"/>
-          </a:xfrm>
-          <a:prstGeom prst="rect">
-            <a:avLst/>
-          </a:prstGeom>
-          <a:noFill/>
-          <a:ln/>
-        </p:spPr>
-        <p:txBody>
-          <a:bodyPr wrap="square" lIns="0" tIns="0" rIns="0" bIns="0" rtlCol="0" anchor="ctr"/>
-          <a:lstStyle/>
-          <a:p>
-            <a:pPr algn="ctr" indent="0" marL="0">
-              <a:buNone/>
-            </a:pPr>
-            <a:r>
-              <a:rPr lang="en-US" sz="2000" b="1" dirty="0">
-                <a:solidFill>
-                  <a:srgbClr val="002060"/>
-                </a:solidFill>
-                <a:latin typeface="Yu Gothic" pitchFamily="34" charset="0"/>
-                <a:ea typeface="Yu Gothic" pitchFamily="34" charset="-122"/>
-                <a:cs typeface="Yu Gothic" pitchFamily="34" charset="-120"/>
-              </a:rPr>
-              <a:t>ご提案</a:t>
-            </a:r>
-            <a:endParaRPr lang="en-US" sz="2000" dirty="0"/>
-          </a:p>
-        </p:txBody>
-      </p:sp>
-      <p:sp>
-        <p:nvSpPr>
-          <p:cNvPr id="18" name="Text 15"/>
-          <p:cNvSpPr/>
-          <p:nvPr/>
-        </p:nvSpPr>
-        <p:spPr>
-          <a:xfrm>
-            <a:off x="6263640" y="3063240"/>
-            <a:ext cx="2180844" cy="1005840"/>
-          </a:xfrm>
-          <a:prstGeom prst="rect">
-            <a:avLst/>
-          </a:prstGeom>
-          <a:noFill/>
-          <a:ln/>
-        </p:spPr>
-        <p:txBody>
-          <a:bodyPr wrap="square" lIns="0" tIns="0" rIns="0" bIns="0" rtlCol="0" anchor="t"/>
-          <a:lstStyle/>
-          <a:p>
-            <a:pPr algn="ctr" indent="0" marL="0">
-              <a:buNone/>
-            </a:pPr>
-            <a:r>
-              <a:rPr lang="en-US" sz="1500" dirty="0">
-                <a:solidFill>
-                  <a:srgbClr val="334155"/>
-                </a:solidFill>
-                <a:latin typeface="Yu Gothic" pitchFamily="34" charset="0"/>
-                <a:ea typeface="Yu Gothic" pitchFamily="34" charset="-122"/>
-                <a:cs typeface="Yu Gothic" pitchFamily="34" charset="-120"/>
-              </a:rPr>
-              <a:t>効果が見込める業務を選び、進め方と概算をご提示する</a:t>
-            </a:r>
-            <a:endParaRPr lang="en-US" sz="1500" dirty="0"/>
-          </a:p>
-        </p:txBody>
-      </p:sp>
-      <p:sp>
-        <p:nvSpPr>
-          <p:cNvPr id="19" name="Shape 16"/>
-          <p:cNvSpPr/>
-          <p:nvPr/>
-        </p:nvSpPr>
-        <p:spPr>
-          <a:xfrm>
-            <a:off x="9443466" y="1645920"/>
-            <a:ext cx="731520" cy="731520"/>
-          </a:xfrm>
-          <a:prstGeom prst="ellipse">
-            <a:avLst/>
-          </a:prstGeom>
-          <a:solidFill>
-            <a:srgbClr val="002060"/>
-          </a:solidFill>
-          <a:ln w="38100">
-            <a:solidFill>
-              <a:srgbClr val="FFFFFF"/>
-            </a:solidFill>
-            <a:prstDash val="solid"/>
-          </a:ln>
-        </p:spPr>
-      </p:sp>
-      <p:sp>
-        <p:nvSpPr>
-          <p:cNvPr id="20" name="Text 17"/>
-          <p:cNvSpPr/>
-          <p:nvPr/>
-        </p:nvSpPr>
-        <p:spPr>
-          <a:xfrm>
-            <a:off x="9443466" y="1645920"/>
-            <a:ext cx="731520" cy="731520"/>
-          </a:xfrm>
-          <a:prstGeom prst="rect">
-            <a:avLst/>
-          </a:prstGeom>
-          <a:noFill/>
-          <a:ln/>
-        </p:spPr>
-        <p:txBody>
-          <a:bodyPr wrap="square" lIns="0" tIns="0" rIns="0" bIns="0" rtlCol="0" anchor="ctr"/>
-          <a:lstStyle/>
-          <a:p>
-            <a:pPr algn="ctr" indent="0" marL="0">
-              <a:buNone/>
-            </a:pPr>
-            <a:r>
-              <a:rPr lang="en-US" sz="2400" b="1" dirty="0">
-                <a:solidFill>
-                  <a:srgbClr val="FFFFFF"/>
-                </a:solidFill>
-                <a:latin typeface="Yu Gothic" pitchFamily="34" charset="0"/>
-                <a:ea typeface="Yu Gothic" pitchFamily="34" charset="-122"/>
-                <a:cs typeface="Yu Gothic" pitchFamily="34" charset="-120"/>
-              </a:rPr>
-              <a:t>4</a:t>
-            </a:r>
-            <a:endParaRPr lang="en-US" sz="2400" dirty="0"/>
-          </a:p>
-        </p:txBody>
-      </p:sp>
-      <p:sp>
-        <p:nvSpPr>
-          <p:cNvPr id="21" name="Text 18"/>
-          <p:cNvSpPr/>
-          <p:nvPr/>
-        </p:nvSpPr>
-        <p:spPr>
-          <a:xfrm>
-            <a:off x="8673084" y="2560320"/>
-            <a:ext cx="2272284" cy="457200"/>
-          </a:xfrm>
-          <a:prstGeom prst="rect">
-            <a:avLst/>
-          </a:prstGeom>
-          <a:noFill/>
-          <a:ln/>
-        </p:spPr>
-        <p:txBody>
-          <a:bodyPr wrap="square" lIns="0" tIns="0" rIns="0" bIns="0" rtlCol="0" anchor="ctr"/>
-          <a:lstStyle/>
-          <a:p>
-            <a:pPr algn="ctr" indent="0" marL="0">
-              <a:buNone/>
-            </a:pPr>
-            <a:r>
-              <a:rPr lang="en-US" sz="2000" b="1" dirty="0">
-                <a:solidFill>
-                  <a:srgbClr val="002060"/>
-                </a:solidFill>
-                <a:latin typeface="Yu Gothic" pitchFamily="34" charset="0"/>
-                <a:ea typeface="Yu Gothic" pitchFamily="34" charset="-122"/>
-                <a:cs typeface="Yu Gothic" pitchFamily="34" charset="-120"/>
-              </a:rPr>
-              <a:t>小さく試す</a:t>
-            </a:r>
-            <a:endParaRPr lang="en-US" sz="2000" dirty="0"/>
-          </a:p>
-        </p:txBody>
-      </p:sp>
-      <p:sp>
-        <p:nvSpPr>
-          <p:cNvPr id="22" name="Text 19"/>
-          <p:cNvSpPr/>
-          <p:nvPr/>
-        </p:nvSpPr>
-        <p:spPr>
-          <a:xfrm>
-            <a:off x="8718804" y="3063240"/>
-            <a:ext cx="2180844" cy="1005840"/>
-          </a:xfrm>
-          <a:prstGeom prst="rect">
-            <a:avLst/>
-          </a:prstGeom>
-          <a:noFill/>
-          <a:ln/>
-        </p:spPr>
-        <p:txBody>
-          <a:bodyPr wrap="square" lIns="0" tIns="0" rIns="0" bIns="0" rtlCol="0" anchor="t"/>
-          <a:lstStyle/>
-          <a:p>
-            <a:pPr algn="ctr" indent="0" marL="0">
-              <a:buNone/>
-            </a:pPr>
-            <a:r>
-              <a:rPr lang="en-US" sz="1500" dirty="0">
-                <a:solidFill>
-                  <a:srgbClr val="334155"/>
-                </a:solidFill>
-                <a:latin typeface="Yu Gothic" pitchFamily="34" charset="0"/>
-                <a:ea typeface="Yu Gothic" pitchFamily="34" charset="-122"/>
-                <a:cs typeface="Yu Gothic" pitchFamily="34" charset="-120"/>
-              </a:rPr>
-              <a:t>デモや一部業務での検証で、使えるかを確かめる</a:t>
-            </a:r>
-            <a:endParaRPr lang="en-US" sz="1500" dirty="0"/>
-          </a:p>
-        </p:txBody>
-      </p:sp>
-      <p:sp>
-        <p:nvSpPr>
-          <p:cNvPr id="23" name="Shape 20"/>
-          <p:cNvSpPr/>
-          <p:nvPr/>
-        </p:nvSpPr>
-        <p:spPr>
-          <a:xfrm>
-            <a:off x="1216152" y="4434840"/>
-            <a:ext cx="9820656" cy="1325880"/>
-          </a:xfrm>
-          <a:prstGeom prst="rect">
-            <a:avLst/>
-          </a:prstGeom>
-          <a:solidFill>
-            <a:srgbClr val="FFF7ED"/>
-          </a:solidFill>
-          <a:ln w="12700">
-            <a:solidFill>
-              <a:srgbClr val="EB6311"/>
-            </a:solidFill>
-            <a:prstDash val="solid"/>
-          </a:ln>
-        </p:spPr>
-      </p:sp>
-      <p:sp>
-        <p:nvSpPr>
-          <p:cNvPr id="24" name="Text 21"/>
-          <p:cNvSpPr/>
-          <p:nvPr/>
-        </p:nvSpPr>
-        <p:spPr>
-          <a:xfrm>
-            <a:off x="1536192" y="4434840"/>
-            <a:ext cx="2560320" cy="1325880"/>
-          </a:xfrm>
-          <a:prstGeom prst="rect">
-            <a:avLst/>
-          </a:prstGeom>
-          <a:noFill/>
-          <a:ln/>
-        </p:spPr>
-        <p:txBody>
-          <a:bodyPr wrap="square" lIns="0" tIns="0" rIns="0" bIns="0" rtlCol="0" anchor="ctr"/>
-          <a:lstStyle/>
-          <a:p>
-            <a:pPr indent="0" marL="0">
-              <a:buNone/>
-            </a:pPr>
-            <a:r>
-              <a:rPr lang="en-US" sz="1800" b="1" dirty="0">
-                <a:solidFill>
-                  <a:srgbClr val="EB6311"/>
-                </a:solidFill>
-                <a:latin typeface="Yu Gothic" pitchFamily="34" charset="0"/>
-                <a:ea typeface="Yu Gothic" pitchFamily="34" charset="-122"/>
-                <a:cs typeface="Yu Gothic" pitchFamily="34" charset="-120"/>
-              </a:rPr>
-              <a:t>本日決めたいこと</a:t>
-            </a:r>
-            <a:endParaRPr lang="en-US" sz="1800" dirty="0"/>
-          </a:p>
-        </p:txBody>
-      </p:sp>
-      <p:sp>
-        <p:nvSpPr>
-          <p:cNvPr id="25" name="Text 22"/>
-          <p:cNvSpPr/>
-          <p:nvPr/>
-        </p:nvSpPr>
-        <p:spPr>
-          <a:xfrm>
-            <a:off x="4142232" y="4434840"/>
-            <a:ext cx="6620256" cy="1325880"/>
-          </a:xfrm>
-          <a:prstGeom prst="rect">
-            <a:avLst/>
-          </a:prstGeom>
-          <a:noFill/>
-          <a:ln/>
-        </p:spPr>
-        <p:txBody>
-          <a:bodyPr wrap="square" lIns="0" tIns="0" rIns="0" bIns="0" rtlCol="0" anchor="ctr"/>
-          <a:lstStyle/>
-          <a:p>
-            <a:pPr marL="342900" indent="-342900">
-              <a:spcAft>
-                <a:spcPts val="600"/>
-              </a:spcAft>
-              <a:buSzPct val="100000"/>
-              <a:buChar char="•"/>
-            </a:pPr>
-            <a:r>
-              <a:rPr lang="en-US" sz="1800" dirty="0">
-                <a:solidFill>
-                  <a:srgbClr val="002060"/>
-                </a:solidFill>
-                <a:latin typeface="Yu Gothic" pitchFamily="34" charset="0"/>
-                <a:ea typeface="Yu Gothic" pitchFamily="34" charset="-122"/>
-                <a:cs typeface="Yu Gothic" pitchFamily="34" charset="-120"/>
-              </a:rPr>
-              <a:t>次回、詳しく確認するテーマ</a:t>
-            </a:r>
-            <a:endParaRPr lang="en-US" sz="1800" dirty="0"/>
-          </a:p>
-          <a:p>
-            <a:pPr marL="342900" indent="-342900">
-              <a:spcAft>
-                <a:spcPts val="600"/>
-              </a:spcAft>
-              <a:buSzPct val="100000"/>
-              <a:buChar char="•"/>
-            </a:pPr>
-            <a:r>
-              <a:rPr lang="en-US" sz="1800" dirty="0">
-                <a:solidFill>
-                  <a:srgbClr val="002060"/>
-                </a:solidFill>
-                <a:latin typeface="Yu Gothic" pitchFamily="34" charset="0"/>
-                <a:ea typeface="Yu Gothic" pitchFamily="34" charset="-122"/>
-                <a:cs typeface="Yu Gothic" pitchFamily="34" charset="-120"/>
-              </a:rPr>
-              <a:t>次回の日程と、ご同席いただく方（実務ご担当者様など）</a:t>
-            </a:r>
-            <a:endParaRPr lang="en-US" sz="1800" dirty="0"/>
-          </a:p>
-        </p:txBody>
-      </p:sp>
-    </p:spTree>
-  </p:cSld>
-  <p:clrMapOvr>
-    <a:masterClrMapping/>
-  </p:clrMapOvr>
-</p:sld>
-</file>
-
-<file path=ppt/slides/slide8.xml><?xml version="1.0" encoding="utf-8"?>
-<p:sld xmlns:a="http://schemas.openxmlformats.org/drawingml/2006/main" xmlns:r="http://schemas.openxmlformats.org/officeDocument/2006/relationships" xmlns:p="http://schemas.openxmlformats.org/presentationml/2006/main">
-  <p:cSld name="Slide 8">
-    <p:bg>
-      <p:bgPr>
-        <a:solidFill>
-          <a:srgbClr val="FFFFFF"/>
-        </a:solidFill>
-      </p:bgPr>
-    </p:bg>
-    <p:spTree>
-      <p:nvGrpSpPr>
-        <p:cNvPr id="1" name=""/>
-        <p:cNvGrpSpPr/>
-        <p:nvPr/>
-      </p:nvGrpSpPr>
-      <p:grpSpPr>
-        <a:xfrm>
-          <a:off x="0" y="0"/>
-          <a:ext cx="0" cy="0"/>
-          <a:chOff x="0" y="0"/>
-          <a:chExt cx="0" cy="0"/>
-        </a:xfrm>
-      </p:grpSpPr>
-      <p:pic>
-        <p:nvPicPr>
-          <p:cNvPr id="2" name="Image 0" descr="/home/user/-/tak-evac/src/assets/bg_cover.png">    </p:cNvPr>
-          <p:cNvPicPr>
-            <a:picLocks noChangeAspect="1"/>
-          </p:cNvPicPr>
-          <p:nvPr/>
-        </p:nvPicPr>
-        <p:blipFill>
-          <a:blip r:embed="rId1"/>
-          <a:stretch>
-            <a:fillRect/>
-          </a:stretch>
-        </p:blipFill>
-        <p:spPr>
-          <a:xfrm>
-            <a:off x="0" y="0"/>
-            <a:ext cx="12191695" cy="6858000"/>
-          </a:xfrm>
-          <a:prstGeom prst="rect">
-            <a:avLst/>
-          </a:prstGeom>
-        </p:spPr>
-      </p:pic>
-      <p:sp>
-        <p:nvSpPr>
-          <p:cNvPr id="3" name="Text 0"/>
-          <p:cNvSpPr/>
-          <p:nvPr/>
-        </p:nvSpPr>
-        <p:spPr>
-          <a:xfrm>
-            <a:off x="457200" y="2377440"/>
-            <a:ext cx="11277295" cy="2103120"/>
-          </a:xfrm>
-          <a:prstGeom prst="rect">
-            <a:avLst/>
-          </a:prstGeom>
-          <a:noFill/>
-          <a:ln/>
-        </p:spPr>
-        <p:txBody>
-          <a:bodyPr wrap="square" lIns="0" tIns="0" rIns="0" bIns="0" rtlCol="0" anchor="ctr"/>
-          <a:lstStyle/>
-          <a:p>
-            <a:pPr algn="ctr" indent="0" marL="0">
-              <a:buNone/>
-            </a:pPr>
-            <a:r>
-              <a:rPr lang="en-US" sz="12000" b="1" dirty="0">
-                <a:solidFill>
-                  <a:srgbClr val="002060"/>
-                </a:solidFill>
-                <a:latin typeface="Yu Gothic" pitchFamily="34" charset="0"/>
-                <a:ea typeface="Yu Gothic" pitchFamily="34" charset="-122"/>
-                <a:cs typeface="Yu Gothic" pitchFamily="34" charset="-120"/>
-              </a:rPr>
-              <a:t>thank you!</a:t>
-            </a:r>
-            <a:endParaRPr lang="en-US" sz="12000" dirty="0"/>
-          </a:p>
-        </p:txBody>
-      </p:sp>
-      <p:sp>
-        <p:nvSpPr>
-          <p:cNvPr id="4" name="Text 1"/>
-          <p:cNvSpPr/>
-          <p:nvPr/>
-        </p:nvSpPr>
-        <p:spPr>
-          <a:xfrm>
-            <a:off x="457200" y="4663440"/>
-            <a:ext cx="11277295" cy="548640"/>
-          </a:xfrm>
-          <a:prstGeom prst="rect">
-            <a:avLst/>
-          </a:prstGeom>
-          <a:noFill/>
-          <a:ln/>
-        </p:spPr>
-        <p:txBody>
-          <a:bodyPr wrap="square" lIns="0" tIns="0" rIns="0" bIns="0" rtlCol="0" anchor="ctr"/>
-          <a:lstStyle/>
-          <a:p>
-            <a:pPr algn="ctr" indent="0" marL="0">
-              <a:buNone/>
-            </a:pPr>
-            <a:r>
-              <a:rPr lang="en-US" sz="2200" b="1" dirty="0">
-                <a:solidFill>
-                  <a:srgbClr val="002060"/>
-                </a:solidFill>
-                <a:latin typeface="Yu Gothic" pitchFamily="34" charset="0"/>
-                <a:ea typeface="Yu Gothic" pitchFamily="34" charset="-122"/>
-                <a:cs typeface="Yu Gothic" pitchFamily="34" charset="-120"/>
-              </a:rPr>
-              <a:t>thomas株式会社　宮川 晋之介</a:t>
-            </a:r>
-            <a:endParaRPr lang="en-US" sz="2200" dirty="0"/>
+              <a:t>社内のご相談先や、ご判断の流れ</a:t>
+            </a:r>
+            <a:endParaRPr lang="en-US" sz="1600" dirty="0"/>
           </a:p>
         </p:txBody>
       </p:sp>
